--- a/Exams/CSC175  Sp26 Midterm Sample Questions ANS.pptx
+++ b/Exams/CSC175  Sp26 Midterm Sample Questions ANS.pptx
@@ -4882,8 +4882,8 @@
         </p:nvSpPr>
         <p:spPr>
           <a:xfrm>
-            <a:off x="1734679" y="2562285"/>
-            <a:ext cx="8925841" cy="584775"/>
+            <a:off x="746651" y="2562285"/>
+            <a:ext cx="9913869" cy="584775"/>
           </a:xfrm>
           <a:prstGeom prst="rect">
             <a:avLst/>
@@ -4903,7 +4903,7 @@
                   <a:srgbClr val="C00000"/>
                 </a:solidFill>
               </a:rPr>
-              <a:t>CSC175 Spring 2026 Sample Exam Questions</a:t>
+              <a:t>CSC175 Spring 2026 Sample Exam Questions ANS</a:t>
             </a:r>
           </a:p>
         </p:txBody>
@@ -5242,22 +5242,25 @@
         </p:nvSpPr>
         <p:spPr>
           <a:xfrm>
-            <a:off x="609600" y="1143000"/>
-            <a:ext cx="6477000" cy="5638800"/>
+            <a:off x="304800" y="1096108"/>
+            <a:ext cx="7162800" cy="5638800"/>
           </a:xfrm>
+          <a:solidFill>
+            <a:schemeClr val="bg1"/>
+          </a:solidFill>
         </p:spPr>
         <p:txBody>
           <a:bodyPr>
-            <a:normAutofit lnSpcReduction="10000"/>
+            <a:normAutofit fontScale="92500" lnSpcReduction="20000"/>
           </a:bodyPr>
           <a:lstStyle/>
           <a:p>
             <a:r>
-              <a:rPr lang="en-US" altLang="zh-CN" sz="1100" dirty="0"/>
-              <a:t>Q3.  In detail. Assume that at time t=0,  A sends a packet to C.  At t=0.5 seconds, </a:t>
-            </a:r>
-            <a:r>
-              <a:rPr lang="en-US" altLang="zh-CN" sz="1100" dirty="0">
+              <a:rPr lang="en-US" altLang="zh-CN" sz="1400" dirty="0"/>
+              <a:t>Q3. in detail. Assume that at time t=0,  A sends a packet to C.  At t=0.5 seconds, </a:t>
+            </a:r>
+            <a:r>
+              <a:rPr lang="en-US" altLang="zh-CN" sz="1400" dirty="0">
                 <a:solidFill>
                   <a:srgbClr val="C00000"/>
                 </a:solidFill>
@@ -5265,86 +5268,86 @@
               <a:t>the link between R4 and R5 goes down</a:t>
             </a:r>
             <a:r>
-              <a:rPr lang="en-US" altLang="zh-CN" sz="1100" dirty="0"/>
+              <a:rPr lang="en-US" altLang="zh-CN" sz="1400" dirty="0"/>
               <a:t>, and R4 and R5 instantaneously recognize and recompute their routes. </a:t>
             </a:r>
           </a:p>
           <a:p>
             <a:r>
-              <a:rPr lang="en-US" altLang="zh-CN" sz="1100" dirty="0"/>
+              <a:rPr lang="en-US" altLang="zh-CN" sz="1400" dirty="0"/>
               <a:t>ANS:  </a:t>
             </a:r>
             <a:r>
-              <a:rPr lang="pt-BR" altLang="zh-CN" sz="1100" dirty="0"/>
+              <a:rPr lang="pt-BR" altLang="zh-CN" sz="1400" dirty="0"/>
               <a:t>A → R1 → R2 → R3 → R2 →R6 → R5 → C</a:t>
             </a:r>
           </a:p>
           <a:p>
             <a:r>
-              <a:rPr lang="en-US" altLang="zh-CN" sz="1100" dirty="0"/>
+              <a:rPr lang="en-US" altLang="zh-CN" sz="1400" dirty="0"/>
               <a:t>Explanation: Here is the detailed timeline of events for Q4.5, which is driven by the "race" between the packet's physical propagation delay and the Link-State Advertisement (LSA) propagation delay. Both delays are strictly tied to the link costs.</a:t>
             </a:r>
           </a:p>
           <a:p>
             <a:r>
-              <a:rPr lang="en-US" altLang="zh-CN" sz="1100" dirty="0"/>
+              <a:rPr lang="en-US" altLang="zh-CN" sz="1400" dirty="0"/>
               <a:t>t = 0.0s. Host A sends the packet toward Host C. The packet arrives at R1, and R1 forwards it to R2. The propagation delay for the R1-R2 link is 1 second.</a:t>
             </a:r>
           </a:p>
           <a:p>
             <a:r>
-              <a:rPr lang="en-US" altLang="zh-CN" sz="1100" dirty="0"/>
+              <a:rPr lang="en-US" altLang="zh-CN" sz="1400" dirty="0"/>
               <a:t>t = 0.5s. While the packet is mid-flight between R1 and R2, the link between R4 and R5 suddenly fails. R4 and R5 immediately recognize the failure and generate LSAs detailing the broken link. These LSAs begin propagating across the network at a speed dictated by the link costs.</a:t>
             </a:r>
           </a:p>
           <a:p>
             <a:r>
-              <a:rPr lang="en-US" altLang="zh-CN" sz="1100" dirty="0"/>
+              <a:rPr lang="en-US" altLang="zh-CN" sz="1400" dirty="0"/>
               <a:t>t = 1.0s. Packet Location: Arrives at R2. LSA Status: The failure LSA from R4 has not yet reached R2 because it has only been propagating for 0.5 seconds, and the delay (cost) from R4 to R2 is longer than that. Action: Because R2 is unaware of the broken link, its routing table still indicates that the shortest path to C is via R3. R2 forwards the packet to R3. The delay for the R2-R3 link is 2 seconds.</a:t>
             </a:r>
           </a:p>
           <a:p>
             <a:r>
-              <a:rPr lang="en-US" altLang="zh-CN" sz="1100" dirty="0"/>
+              <a:rPr lang="en-US" altLang="zh-CN" sz="1400" dirty="0"/>
               <a:t>t = 1.0s – 3.0s. Packet is in transit between R2 and R3. Meanwhile, the LSAs are continuing to propagate across the network toward R2 and R3.</a:t>
             </a:r>
           </a:p>
           <a:p>
             <a:r>
-              <a:rPr lang="en-US" altLang="zh-CN" sz="1100" dirty="0"/>
+              <a:rPr lang="en-US" altLang="zh-CN" sz="1400" dirty="0"/>
               <a:t>t = 3.0s. Packet Location: Arrives at R3. LSA Status: By this time (2.5 seconds after the failure), the LSA originating from R4 has successfully arrived at R3. R3 processes it instantaneously and updates its routing table. Action: R3 recalculates its shortest path to C because it now knows the R4-R5 link is down. The new shortest path routes back through R2. R3 forwards the packet back to R2, which takes another 2 seconds.</a:t>
             </a:r>
           </a:p>
           <a:p>
             <a:r>
-              <a:rPr lang="en-US" altLang="zh-CN" sz="1100" dirty="0"/>
+              <a:rPr lang="en-US" altLang="zh-CN" sz="1400" dirty="0"/>
               <a:t>t = 3.0s – 5.0s. Packet travels from R3 back to R2.  During this window, </a:t>
             </a:r>
             <a:r>
-              <a:rPr lang="en-US" altLang="zh-CN" sz="1100" dirty="0">
+              <a:rPr lang="en-US" altLang="zh-CN" sz="1400" dirty="0">
                 <a:solidFill>
                   <a:srgbClr val="C00000"/>
                 </a:solidFill>
               </a:rPr>
-              <a:t>the LSA from R4 also successfully reaches R2 at time 4.5</a:t>
-            </a:r>
-            <a:r>
-              <a:rPr lang="en-US" altLang="zh-CN" sz="1100" dirty="0"/>
+              <a:t>the LSA from R4 successfully reaches R2 at time 4.5</a:t>
+            </a:r>
+            <a:r>
+              <a:rPr lang="en-US" altLang="zh-CN" sz="1400" dirty="0"/>
               <a:t>, and R2 instantaneously updates its own routing table.</a:t>
             </a:r>
           </a:p>
           <a:p>
             <a:r>
-              <a:rPr lang="en-US" altLang="zh-CN" sz="1100" dirty="0"/>
+              <a:rPr lang="en-US" altLang="zh-CN" sz="1400" dirty="0"/>
               <a:t>t = 5.0s. Packet Location: Arrives back at R2. LSA Status: R2 is now fully aware of the R4-R5 link failure. Action: R2 recalculates its next-best path to C. With the old route invalidated, R2 determines the new optimal route is via R6. R2 forwards the packet to R6.</a:t>
             </a:r>
           </a:p>
           <a:p>
             <a:r>
-              <a:rPr lang="en-US" altLang="zh-CN" sz="1100" dirty="0"/>
+              <a:rPr lang="en-US" altLang="zh-CN" sz="1400" dirty="0"/>
               <a:t>t &gt; 5.0s. The packet successfully continues along the updated path, safely traveling from R6 → R5 → Host C.</a:t>
             </a:r>
-            <a:endParaRPr lang="zh-CN" altLang="en-US" sz="1100" dirty="0"/>
+            <a:endParaRPr lang="zh-CN" altLang="en-US" sz="1400" dirty="0"/>
           </a:p>
         </p:txBody>
       </p:sp>
@@ -5369,8 +5372,8 @@
         </p:blipFill>
         <p:spPr>
           <a:xfrm>
-            <a:off x="6870180" y="1752601"/>
-            <a:ext cx="5243051" cy="2743199"/>
+            <a:off x="7467599" y="1752601"/>
+            <a:ext cx="4645631" cy="2430625"/>
           </a:xfrm>
           <a:prstGeom prst="rect">
             <a:avLst/>
@@ -5496,13 +5499,13 @@
         </p:spPr>
         <p:txBody>
           <a:bodyPr>
-            <a:normAutofit fontScale="77500" lnSpcReduction="20000"/>
+            <a:normAutofit fontScale="92500" lnSpcReduction="10000"/>
           </a:bodyPr>
           <a:lstStyle/>
           <a:p>
             <a:r>
               <a:rPr lang="en-US" altLang="zh-CN" dirty="0"/>
-              <a:t>Q3.  Assume that at time t=0,  A sends a packet to C.  At t=0.5 seconds, </a:t>
+              <a:t>Q3. continued.  Why does </a:t>
             </a:r>
             <a:r>
               <a:rPr lang="en-US" altLang="zh-CN" dirty="0">
@@ -5510,27 +5513,11 @@
                   <a:srgbClr val="C00000"/>
                 </a:solidFill>
               </a:rPr>
-              <a:t>the link between R4 and R5 goes down</a:t>
+              <a:t>the LSA from R4 successfully reaches R2 at time 4.5</a:t>
             </a:r>
             <a:r>
               <a:rPr lang="en-US" altLang="zh-CN" dirty="0"/>
-              <a:t>, and R4 and R5 instantaneously recognize and recompute their routes. </a:t>
-            </a:r>
-          </a:p>
-          <a:p>
-            <a:r>
-              <a:rPr lang="en-US" altLang="zh-CN" dirty="0"/>
-              <a:t>ANS:  </a:t>
-            </a:r>
-            <a:r>
-              <a:rPr lang="pt-BR" altLang="zh-CN" dirty="0"/>
-              <a:t>A → R1 → R2 → R3 → R2 →R6 → R5 → C</a:t>
-            </a:r>
-          </a:p>
-          <a:p>
-            <a:r>
-              <a:rPr lang="en-US" altLang="zh-CN" dirty="0"/>
-              <a:t>Why does the LSA from R4 also successfully reaches R2 at time 4.5?</a:t>
+              <a:t>?</a:t>
             </a:r>
           </a:p>
           <a:p>

--- a/Exams/CSC175  Sp26 Midterm Sample Questions ANS.pptx
+++ b/Exams/CSC175  Sp26 Midterm Sample Questions ANS.pptx
@@ -150,6 +150,193 @@
     </p:ext>
   </p:extLst>
 </p:presentation>
+</file>
+
+<file path=ppt/revisionInfo.xml><?xml version="1.0" encoding="utf-8"?>
+<p1510:revInfo xmlns:a="http://schemas.openxmlformats.org/drawingml/2006/main" xmlns:r="http://schemas.openxmlformats.org/officeDocument/2006/relationships" xmlns:p1510="http://schemas.microsoft.com/office/powerpoint/2015/10/main">
+  <p1510:revLst>
+    <p1510:client id="{01306D86-5A7C-4D89-AFE7-0B4843AD8E55}" v="41" dt="2026-03-31T21:08:57.892"/>
+  </p1510:revLst>
+</p1510:revInfo>
+</file>
+
+<file path=ppt/changesInfos/changesInfo1.xml><?xml version="1.0" encoding="utf-8"?>
+<pc:chgInfo xmlns:a="http://schemas.openxmlformats.org/drawingml/2006/main" xmlns:r="http://schemas.openxmlformats.org/officeDocument/2006/relationships" xmlns:ac="http://schemas.microsoft.com/office/drawing/2013/main/command" xmlns:pc="http://schemas.microsoft.com/office/powerpoint/2013/main/command">
+  <pc:docChgLst>
+    <pc:chgData name="Zonghua Gu" userId="9a7e1853e1951ef5" providerId="LiveId" clId="{CF1FAA12-072C-4ED5-BA76-0FFFAEFDB88A}"/>
+    <pc:docChg chg="custSel modSld">
+      <pc:chgData name="Zonghua Gu" userId="9a7e1853e1951ef5" providerId="LiveId" clId="{CF1FAA12-072C-4ED5-BA76-0FFFAEFDB88A}" dt="2026-03-31T21:10:47.130" v="697" actId="20577"/>
+      <pc:docMkLst>
+        <pc:docMk/>
+      </pc:docMkLst>
+      <pc:sldChg chg="modSp mod">
+        <pc:chgData name="Zonghua Gu" userId="9a7e1853e1951ef5" providerId="LiveId" clId="{CF1FAA12-072C-4ED5-BA76-0FFFAEFDB88A}" dt="2026-03-31T19:16:59.261" v="282" actId="20577"/>
+        <pc:sldMkLst>
+          <pc:docMk/>
+          <pc:sldMk cId="2010822840" sldId="258"/>
+        </pc:sldMkLst>
+        <pc:spChg chg="mod">
+          <ac:chgData name="Zonghua Gu" userId="9a7e1853e1951ef5" providerId="LiveId" clId="{CF1FAA12-072C-4ED5-BA76-0FFFAEFDB88A}" dt="2026-03-31T19:16:59.261" v="282" actId="20577"/>
+          <ac:spMkLst>
+            <pc:docMk/>
+            <pc:sldMk cId="2010822840" sldId="258"/>
+            <ac:spMk id="4" creationId="{8FEE1D6E-BDD8-543E-5201-693D655D1834}"/>
+          </ac:spMkLst>
+        </pc:spChg>
+      </pc:sldChg>
+      <pc:sldChg chg="modSp mod">
+        <pc:chgData name="Zonghua Gu" userId="9a7e1853e1951ef5" providerId="LiveId" clId="{CF1FAA12-072C-4ED5-BA76-0FFFAEFDB88A}" dt="2026-03-31T21:07:12.091" v="666" actId="20577"/>
+        <pc:sldMkLst>
+          <pc:docMk/>
+          <pc:sldMk cId="2761831774" sldId="261"/>
+        </pc:sldMkLst>
+        <pc:spChg chg="mod">
+          <ac:chgData name="Zonghua Gu" userId="9a7e1853e1951ef5" providerId="LiveId" clId="{CF1FAA12-072C-4ED5-BA76-0FFFAEFDB88A}" dt="2026-03-31T21:07:12.091" v="666" actId="20577"/>
+          <ac:spMkLst>
+            <pc:docMk/>
+            <pc:sldMk cId="2761831774" sldId="261"/>
+            <ac:spMk id="4" creationId="{E77568DA-E2BD-B325-7077-1F2E3BCCADD6}"/>
+          </ac:spMkLst>
+        </pc:spChg>
+      </pc:sldChg>
+      <pc:sldChg chg="modSp mod">
+        <pc:chgData name="Zonghua Gu" userId="9a7e1853e1951ef5" providerId="LiveId" clId="{CF1FAA12-072C-4ED5-BA76-0FFFAEFDB88A}" dt="2026-03-31T19:26:58.632" v="342" actId="20577"/>
+        <pc:sldMkLst>
+          <pc:docMk/>
+          <pc:sldMk cId="1591002154" sldId="262"/>
+        </pc:sldMkLst>
+        <pc:spChg chg="mod">
+          <ac:chgData name="Zonghua Gu" userId="9a7e1853e1951ef5" providerId="LiveId" clId="{CF1FAA12-072C-4ED5-BA76-0FFFAEFDB88A}" dt="2026-03-31T19:26:58.632" v="342" actId="20577"/>
+          <ac:spMkLst>
+            <pc:docMk/>
+            <pc:sldMk cId="1591002154" sldId="262"/>
+            <ac:spMk id="4" creationId="{FE6122BC-562C-CABB-6BF5-4C1CC4E4D457}"/>
+          </ac:spMkLst>
+        </pc:spChg>
+      </pc:sldChg>
+      <pc:sldChg chg="modSp mod">
+        <pc:chgData name="Zonghua Gu" userId="9a7e1853e1951ef5" providerId="LiveId" clId="{CF1FAA12-072C-4ED5-BA76-0FFFAEFDB88A}" dt="2026-03-31T19:42:07.720" v="505" actId="167"/>
+        <pc:sldMkLst>
+          <pc:docMk/>
+          <pc:sldMk cId="2090142393" sldId="263"/>
+        </pc:sldMkLst>
+        <pc:picChg chg="ord">
+          <ac:chgData name="Zonghua Gu" userId="9a7e1853e1951ef5" providerId="LiveId" clId="{CF1FAA12-072C-4ED5-BA76-0FFFAEFDB88A}" dt="2026-03-31T19:42:07.720" v="505" actId="167"/>
+          <ac:picMkLst>
+            <pc:docMk/>
+            <pc:sldMk cId="2090142393" sldId="263"/>
+            <ac:picMk id="8" creationId="{BE24FF79-9676-1C0C-7C30-8DFA1574D644}"/>
+          </ac:picMkLst>
+        </pc:picChg>
+      </pc:sldChg>
+      <pc:sldChg chg="modSp mod">
+        <pc:chgData name="Zonghua Gu" userId="9a7e1853e1951ef5" providerId="LiveId" clId="{CF1FAA12-072C-4ED5-BA76-0FFFAEFDB88A}" dt="2026-03-31T19:52:57.859" v="661" actId="6549"/>
+        <pc:sldMkLst>
+          <pc:docMk/>
+          <pc:sldMk cId="1959821232" sldId="264"/>
+        </pc:sldMkLst>
+        <pc:spChg chg="mod">
+          <ac:chgData name="Zonghua Gu" userId="9a7e1853e1951ef5" providerId="LiveId" clId="{CF1FAA12-072C-4ED5-BA76-0FFFAEFDB88A}" dt="2026-03-31T19:52:57.859" v="661" actId="6549"/>
+          <ac:spMkLst>
+            <pc:docMk/>
+            <pc:sldMk cId="1959821232" sldId="264"/>
+            <ac:spMk id="4" creationId="{7898589E-5174-DA30-FFC3-3F4F89F16945}"/>
+          </ac:spMkLst>
+        </pc:spChg>
+      </pc:sldChg>
+      <pc:sldChg chg="modSp mod">
+        <pc:chgData name="Zonghua Gu" userId="9a7e1853e1951ef5" providerId="LiveId" clId="{CF1FAA12-072C-4ED5-BA76-0FFFAEFDB88A}" dt="2026-03-31T19:10:14.134" v="229" actId="20577"/>
+        <pc:sldMkLst>
+          <pc:docMk/>
+          <pc:sldMk cId="1668167279" sldId="271"/>
+        </pc:sldMkLst>
+        <pc:spChg chg="mod">
+          <ac:chgData name="Zonghua Gu" userId="9a7e1853e1951ef5" providerId="LiveId" clId="{CF1FAA12-072C-4ED5-BA76-0FFFAEFDB88A}" dt="2026-03-31T19:10:14.134" v="229" actId="20577"/>
+          <ac:spMkLst>
+            <pc:docMk/>
+            <pc:sldMk cId="1668167279" sldId="271"/>
+            <ac:spMk id="4" creationId="{D795F35A-217B-7B69-815F-06D41DA22B42}"/>
+          </ac:spMkLst>
+        </pc:spChg>
+      </pc:sldChg>
+      <pc:sldChg chg="modSp mod">
+        <pc:chgData name="Zonghua Gu" userId="9a7e1853e1951ef5" providerId="LiveId" clId="{CF1FAA12-072C-4ED5-BA76-0FFFAEFDB88A}" dt="2026-03-31T19:13:23.338" v="246" actId="20577"/>
+        <pc:sldMkLst>
+          <pc:docMk/>
+          <pc:sldMk cId="1189736278" sldId="272"/>
+        </pc:sldMkLst>
+        <pc:spChg chg="mod">
+          <ac:chgData name="Zonghua Gu" userId="9a7e1853e1951ef5" providerId="LiveId" clId="{CF1FAA12-072C-4ED5-BA76-0FFFAEFDB88A}" dt="2026-03-31T19:13:23.338" v="246" actId="20577"/>
+          <ac:spMkLst>
+            <pc:docMk/>
+            <pc:sldMk cId="1189736278" sldId="272"/>
+            <ac:spMk id="4" creationId="{B8CE7E34-8C98-108D-1EF2-1A32D66D64C8}"/>
+          </ac:spMkLst>
+        </pc:spChg>
+      </pc:sldChg>
+      <pc:sldChg chg="modSp mod">
+        <pc:chgData name="Zonghua Gu" userId="9a7e1853e1951ef5" providerId="LiveId" clId="{CF1FAA12-072C-4ED5-BA76-0FFFAEFDB88A}" dt="2026-03-31T19:54:47.759" v="663" actId="207"/>
+        <pc:sldMkLst>
+          <pc:docMk/>
+          <pc:sldMk cId="291201338" sldId="273"/>
+        </pc:sldMkLst>
+        <pc:spChg chg="mod">
+          <ac:chgData name="Zonghua Gu" userId="9a7e1853e1951ef5" providerId="LiveId" clId="{CF1FAA12-072C-4ED5-BA76-0FFFAEFDB88A}" dt="2026-03-31T19:54:47.759" v="663" actId="207"/>
+          <ac:spMkLst>
+            <pc:docMk/>
+            <pc:sldMk cId="291201338" sldId="273"/>
+            <ac:spMk id="4" creationId="{47270AD2-072F-B3D6-BBA9-F8977A6EEED1}"/>
+          </ac:spMkLst>
+        </pc:spChg>
+      </pc:sldChg>
+      <pc:sldChg chg="modSp mod">
+        <pc:chgData name="Zonghua Gu" userId="9a7e1853e1951ef5" providerId="LiveId" clId="{CF1FAA12-072C-4ED5-BA76-0FFFAEFDB88A}" dt="2026-03-31T19:57:03.509" v="665" actId="207"/>
+        <pc:sldMkLst>
+          <pc:docMk/>
+          <pc:sldMk cId="1816582539" sldId="276"/>
+        </pc:sldMkLst>
+        <pc:spChg chg="mod">
+          <ac:chgData name="Zonghua Gu" userId="9a7e1853e1951ef5" providerId="LiveId" clId="{CF1FAA12-072C-4ED5-BA76-0FFFAEFDB88A}" dt="2026-03-31T19:57:03.509" v="665" actId="207"/>
+          <ac:spMkLst>
+            <pc:docMk/>
+            <pc:sldMk cId="1816582539" sldId="276"/>
+            <ac:spMk id="4" creationId="{AA668573-5006-3407-8DE1-C0206091C6A2}"/>
+          </ac:spMkLst>
+        </pc:spChg>
+      </pc:sldChg>
+      <pc:sldChg chg="modSp mod">
+        <pc:chgData name="Zonghua Gu" userId="9a7e1853e1951ef5" providerId="LiveId" clId="{CF1FAA12-072C-4ED5-BA76-0FFFAEFDB88A}" dt="2026-03-31T21:10:18.960" v="683" actId="20577"/>
+        <pc:sldMkLst>
+          <pc:docMk/>
+          <pc:sldMk cId="635324677" sldId="286"/>
+        </pc:sldMkLst>
+        <pc:spChg chg="mod">
+          <ac:chgData name="Zonghua Gu" userId="9a7e1853e1951ef5" providerId="LiveId" clId="{CF1FAA12-072C-4ED5-BA76-0FFFAEFDB88A}" dt="2026-03-31T21:10:18.960" v="683" actId="20577"/>
+          <ac:spMkLst>
+            <pc:docMk/>
+            <pc:sldMk cId="635324677" sldId="286"/>
+            <ac:spMk id="4" creationId="{5D55CEFE-07C0-C1C0-0DB2-A53E29C3DCE1}"/>
+          </ac:spMkLst>
+        </pc:spChg>
+      </pc:sldChg>
+      <pc:sldChg chg="modSp mod">
+        <pc:chgData name="Zonghua Gu" userId="9a7e1853e1951ef5" providerId="LiveId" clId="{CF1FAA12-072C-4ED5-BA76-0FFFAEFDB88A}" dt="2026-03-31T21:10:47.130" v="697" actId="20577"/>
+        <pc:sldMkLst>
+          <pc:docMk/>
+          <pc:sldMk cId="1456145964" sldId="287"/>
+        </pc:sldMkLst>
+        <pc:spChg chg="mod">
+          <ac:chgData name="Zonghua Gu" userId="9a7e1853e1951ef5" providerId="LiveId" clId="{CF1FAA12-072C-4ED5-BA76-0FFFAEFDB88A}" dt="2026-03-31T21:10:47.130" v="697" actId="20577"/>
+          <ac:spMkLst>
+            <pc:docMk/>
+            <pc:sldMk cId="1456145964" sldId="287"/>
+            <ac:spMk id="4" creationId="{E9F7465E-E24A-8171-F25B-76E56F0677E8}"/>
+          </ac:spMkLst>
+        </pc:spChg>
+      </pc:sldChg>
+    </pc:docChg>
+  </pc:docChgLst>
+</pc:chgInfo>
 </file>
 
 <file path=ppt/notesMasters/notesMaster1.xml><?xml version="1.0" encoding="utf-8"?>
@@ -5315,7 +5502,15 @@
           <a:p>
             <a:r>
               <a:rPr lang="en-US" altLang="zh-CN" sz="1400" dirty="0"/>
-              <a:t>t = 3.0s. Packet Location: Arrives at R3. LSA Status: By this time (2.5 seconds after the failure), the LSA originating from R4 has successfully arrived at R3. R3 processes it instantaneously and updates its routing table. Action: R3 recalculates its shortest path to C because it now knows the R4-R5 link is down. The new shortest path routes back through R2. R3 forwards the packet back to R2, which takes another 2 seconds.</a:t>
+              <a:t>t = 3.0s. Packet Location: Arrives at R3. LSA Status: By this time, the LSA originating from R4 has successfully arrived at R3 (at time 2.5s). R3 processes it instantaneously and updates its routing table. Action: R3 recalculates its shortest path to C because it now knows the R4-R5 link is down. The new shortest path routes back through R2 (R3</a:t>
+            </a:r>
+            <a:r>
+              <a:rPr lang="pt-BR" altLang="zh-CN" sz="1400" dirty="0"/>
+              <a:t> → R2 → R6 → R5 → C</a:t>
+            </a:r>
+            <a:r>
+              <a:rPr lang="en-US" altLang="zh-CN" sz="1400" dirty="0"/>
+              <a:t>). R3 forwards the packet back to R2, which takes another 2 seconds.</a:t>
             </a:r>
           </a:p>
           <a:p>
@@ -5329,7 +5524,7 @@
                   <a:srgbClr val="C00000"/>
                 </a:solidFill>
               </a:rPr>
-              <a:t>the LSA from R4 successfully reaches R2 at time 4.5</a:t>
+              <a:t>the LSA from R4 reaches R2 at time 4.5s</a:t>
             </a:r>
             <a:r>
               <a:rPr lang="en-US" altLang="zh-CN" sz="1400" dirty="0"/>
@@ -5339,7 +5534,15 @@
           <a:p>
             <a:r>
               <a:rPr lang="en-US" altLang="zh-CN" sz="1400" dirty="0"/>
-              <a:t>t = 5.0s. Packet Location: Arrives back at R2. LSA Status: R2 is now fully aware of the R4-R5 link failure. Action: R2 recalculates its next-best path to C. With the old route invalidated, R2 determines the new optimal route is via R6. R2 forwards the packet to R6.</a:t>
+              <a:t>t = 5.0s. Packet Location: Arrives back at R2. LSA Status: R2 is now fully aware of the R4-R5 link failure. Action: R2 recalculates its next-best path to C. With the old route invalidated, R2 determines the new optimal route is via R6 (</a:t>
+            </a:r>
+            <a:r>
+              <a:rPr lang="pt-BR" altLang="zh-CN" sz="1400" dirty="0"/>
+              <a:t>R2 → R6 → R5 → C</a:t>
+            </a:r>
+            <a:r>
+              <a:rPr lang="en-US" altLang="zh-CN" sz="1400" dirty="0"/>
+              <a:t>). R2 forwards the packet to R6.</a:t>
             </a:r>
           </a:p>
           <a:p>
@@ -5513,7 +5716,7 @@
                   <a:srgbClr val="C00000"/>
                 </a:solidFill>
               </a:rPr>
-              <a:t>the LSA from R4 successfully reaches R2 at time 4.5</a:t>
+              <a:t>the LSA from R4 reach R2 at time 4.5s</a:t>
             </a:r>
             <a:r>
               <a:rPr lang="en-US" altLang="zh-CN" dirty="0"/>
@@ -5534,7 +5737,7 @@
             </a:r>
             <a:r>
               <a:rPr lang="pt-BR" altLang="zh-CN" dirty="0"/>
-              <a:t>→ R3 → R2: LSA arrives at R2 at time 4.5.</a:t>
+              <a:t>→ R3 → R2: LSA arrives at R2 at time 4.5s.</a:t>
             </a:r>
           </a:p>
           <a:p>
@@ -5545,7 +5748,7 @@
             </a:r>
             <a:r>
               <a:rPr lang="pt-BR" altLang="zh-CN" dirty="0"/>
-              <a:t>→ R2: LSA arrives at R2 at time 5.5.</a:t>
+              <a:t>→ R2: LSA arrives at R2 at time 5.5s.</a:t>
             </a:r>
           </a:p>
           <a:p>
@@ -5556,7 +5759,7 @@
             </a:r>
             <a:r>
               <a:rPr lang="pt-BR" altLang="zh-CN" dirty="0"/>
-              <a:t>→ R6 → R2: LSA arrives at R2 at time 10.5.</a:t>
+              <a:t>→ R6 → R2: LSA arrives at R2 at time 10.5s.</a:t>
             </a:r>
           </a:p>
           <a:p>
@@ -5566,7 +5769,7 @@
             </a:r>
             <a:r>
               <a:rPr lang="en-US" altLang="zh-CN" dirty="0"/>
-              <a:t>LSA from R4 reaches R2 is at time 4.5, making R2 aware that the R4-R5 link is dead, and allowing it to correctly recalculate the route and forward the packet to R6.</a:t>
+              <a:t>LSA from R4 reaches R2 is at time 4.5s, making R2 aware that the R4-R5 link is dead, and allowing it to correctly recalculate the route and forward the packet to R6.</a:t>
             </a:r>
             <a:endParaRPr lang="pt-BR" altLang="zh-CN" dirty="0"/>
           </a:p>
@@ -6215,7 +6418,7 @@
         <p:spPr/>
         <p:txBody>
           <a:bodyPr>
-            <a:normAutofit fontScale="92500" lnSpcReduction="20000"/>
+            <a:normAutofit fontScale="85000" lnSpcReduction="20000"/>
           </a:bodyPr>
           <a:lstStyle/>
           <a:p>
@@ -6269,6 +6472,29 @@
             <a:r>
               <a:rPr lang="en-US" altLang="zh-CN" dirty="0"/>
               <a:t> </a:t>
+            </a:r>
+          </a:p>
+          <a:p>
+            <a:pPr lvl="1"/>
+            <a:r>
+              <a:rPr lang="en-US" altLang="zh-CN"/>
+              <a:t>Binary</a:t>
+            </a:r>
+            <a:r>
+              <a:rPr lang="en-US" altLang="zh-CN" dirty="0"/>
+              <a:t>: </a:t>
+            </a:r>
+            <a:r>
+              <a:rPr lang="en-US" altLang="zh-CN" dirty="0">
+                <a:solidFill>
+                  <a:srgbClr val="C00000"/>
+                </a:solidFill>
+              </a:rPr>
+              <a:t>11000110 . 00110011 . 11</a:t>
+            </a:r>
+            <a:r>
+              <a:rPr lang="en-US" altLang="zh-CN" dirty="0"/>
+              <a:t> 000000 . 00000000</a:t>
             </a:r>
           </a:p>
           <a:p>
@@ -7138,7 +7364,12 @@
             <p:ph sz="quarter" idx="1"/>
           </p:nvPr>
         </p:nvSpPr>
-        <p:spPr/>
+        <p:spPr>
+          <a:xfrm>
+            <a:off x="609600" y="1219200"/>
+            <a:ext cx="10972800" cy="5029200"/>
+          </a:xfrm>
+        </p:spPr>
         <p:txBody>
           <a:bodyPr>
             <a:normAutofit fontScale="85000" lnSpcReduction="20000"/>
@@ -7154,7 +7385,7 @@
             <a:pPr lvl="1"/>
             <a:r>
               <a:rPr lang="en-US" altLang="zh-CN" dirty="0"/>
-              <a:t>Need at least 90 addresses. Smallest power of 2 that is ≥ 90 is: 128 = 2^7. So the prefix length is: 32 - 7 = /25.  The unused block is:</a:t>
+              <a:t>Need at least 90 addresses. Smallest power of 2 that is ≥ 90 is: 128 = 2^7. So the network prefix length is: 32 - 7 = /25.  The unused block is:</a:t>
             </a:r>
           </a:p>
           <a:p>
@@ -7199,7 +7430,7 @@
             <a:pPr lvl="1"/>
             <a:r>
               <a:rPr lang="en-US" altLang="zh-CN" dirty="0"/>
-              <a:t>This gives 128 addresses, which is enough for 90 students. (You can use arbitrary bits for bits 19-25)</a:t>
+              <a:t>This gives 128 addresses, which is enough for 90 students. (You can use arbitrary bits for bits 19-25.)</a:t>
             </a:r>
           </a:p>
           <a:p>
@@ -7211,7 +7442,7 @@
           <a:p>
             <a:r>
               <a:rPr lang="en-US" altLang="zh-CN" dirty="0"/>
-              <a:t>Need at least 30 addresses. Smallest power of 2 that is ≥ 30 is 32 = 2^5. So the prefix length is: 32 - 5 = /27</a:t>
+              <a:t>Need at least 30 addresses. Smallest power of 2 that is ≥ 30 is 32 = 2^5. So the network prefix length is: 32 - 5 = /27</a:t>
             </a:r>
           </a:p>
           <a:p>
@@ -7245,9 +7476,10 @@
             </a:r>
           </a:p>
           <a:p>
+            <a:pPr lvl="1"/>
             <a:r>
               <a:rPr lang="en-US" altLang="zh-CN" dirty="0"/>
-              <a:t>That is a valid unused prefix and does not overlap any existing assignment.</a:t>
+              <a:t>That is a valid unused prefix and does not overlap any existing assignment. (The last octet can be 1xx00000, as long as it starts with a 1 (xx can be arbitrary bits).)</a:t>
             </a:r>
           </a:p>
           <a:p>
@@ -7289,6 +7521,36 @@
           <a:chExt cx="0" cy="0"/>
         </a:xfrm>
       </p:grpSpPr>
+      <p:pic>
+        <p:nvPicPr>
+          <p:cNvPr id="8" name="Picture 7" descr="The image is a table presenting the number of routes advertised at different ports, with columns for the port number, IP address range, and the number of routes.&#10;&#10;AI-generated content may be incorrect.">
+            <a:extLst>
+              <a:ext uri="{FF2B5EF4-FFF2-40B4-BE49-F238E27FC236}">
+                <a16:creationId xmlns:a16="http://schemas.microsoft.com/office/drawing/2014/main" id="{BE24FF79-9676-1C0C-7C30-8DFA1574D644}"/>
+              </a:ext>
+            </a:extLst>
+          </p:cNvPr>
+          <p:cNvPicPr>
+            <a:picLocks noChangeAspect="1"/>
+          </p:cNvPicPr>
+          <p:nvPr/>
+        </p:nvPicPr>
+        <p:blipFill>
+          <a:blip r:embed="rId2"/>
+          <a:stretch>
+            <a:fillRect/>
+          </a:stretch>
+        </p:blipFill>
+        <p:spPr>
+          <a:xfrm>
+            <a:off x="6324600" y="1296645"/>
+            <a:ext cx="3343742" cy="4906060"/>
+          </a:xfrm>
+          <a:prstGeom prst="rect">
+            <a:avLst/>
+          </a:prstGeom>
+        </p:spPr>
+      </p:pic>
       <p:sp>
         <p:nvSpPr>
           <p:cNvPr id="2" name="Title 1">
@@ -7465,7 +7727,7 @@
           <p:nvPr/>
         </p:nvPicPr>
         <p:blipFill>
-          <a:blip r:embed="rId2">
+          <a:blip r:embed="rId3">
             <a:extLst>
               <a:ext uri="{28A0092B-C50C-407E-A947-70E740481C1C}">
                 <a14:useLocalDpi xmlns:a14="http://schemas.microsoft.com/office/drawing/2010/main" val="0"/>
@@ -7479,36 +7741,6 @@
           <a:xfrm>
             <a:off x="9601200" y="2286000"/>
             <a:ext cx="2489468" cy="2567965"/>
-          </a:xfrm>
-          <a:prstGeom prst="rect">
-            <a:avLst/>
-          </a:prstGeom>
-        </p:spPr>
-      </p:pic>
-      <p:pic>
-        <p:nvPicPr>
-          <p:cNvPr id="8" name="Picture 7" descr="The image is a table presenting the number of routes advertised at different ports, with columns for the port number, IP address range, and the number of routes.&#10;&#10;AI-generated content may be incorrect.">
-            <a:extLst>
-              <a:ext uri="{FF2B5EF4-FFF2-40B4-BE49-F238E27FC236}">
-                <a16:creationId xmlns:a16="http://schemas.microsoft.com/office/drawing/2014/main" id="{BE24FF79-9676-1C0C-7C30-8DFA1574D644}"/>
-              </a:ext>
-            </a:extLst>
-          </p:cNvPr>
-          <p:cNvPicPr>
-            <a:picLocks noChangeAspect="1"/>
-          </p:cNvPicPr>
-          <p:nvPr/>
-        </p:nvPicPr>
-        <p:blipFill>
-          <a:blip r:embed="rId3"/>
-          <a:stretch>
-            <a:fillRect/>
-          </a:stretch>
-        </p:blipFill>
-        <p:spPr>
-          <a:xfrm>
-            <a:off x="6324600" y="1296645"/>
-            <a:ext cx="3343742" cy="4906060"/>
           </a:xfrm>
           <a:prstGeom prst="rect">
             <a:avLst/>
@@ -7634,7 +7866,7 @@
         </p:spPr>
         <p:txBody>
           <a:bodyPr>
-            <a:normAutofit fontScale="92500" lnSpcReduction="10000"/>
+            <a:normAutofit fontScale="92500" lnSpcReduction="20000"/>
           </a:bodyPr>
           <a:lstStyle/>
           <a:p>
@@ -7733,7 +7965,7 @@
             </a:r>
             <a:r>
               <a:rPr lang="nl-NL" altLang="zh-CN" sz="1400" dirty="0"/>
-              <a:t>. </a:t>
+              <a:t>.  (Such duplicate routing entries should not exist in a real router, since the higher cost route will never be taken.)</a:t>
             </a:r>
           </a:p>
           <a:p>
@@ -7803,7 +8035,7 @@
             </a:r>
             <a:r>
               <a:rPr lang="nl-NL" altLang="zh-CN" sz="1400" dirty="0"/>
-              <a:t> 204 (11001100) matches two /20 subnets:, 2.2.192.0/20, 2.2.204.0/20, since they all have 1101 in the 3rd octet. Among Port 1 (Cost 12) and Port 3 (Cost 13), Port 1 wins via </a:t>
+              <a:t> 204 (11001100) matches two /20 subnets:, 2.2.192.0/20, 2.2.204.0/20, since they all have 1100 in the 3rd octet. Among Port 1 (Cost 12) and Port 3 (Cost 13), Port 1 wins via </a:t>
             </a:r>
             <a:r>
               <a:rPr lang="nl-NL" altLang="zh-CN" sz="1400" b="1" dirty="0"/>
@@ -7837,7 +8069,7 @@
             </a:r>
             <a:r>
               <a:rPr lang="nl-NL" altLang="zh-CN" sz="1400" dirty="0"/>
-              <a:t> tie-breaker.</a:t>
+              <a:t> tie-breaker. .  (Such duplicate routing entries should not exist in a real router.)</a:t>
             </a:r>
           </a:p>
           <a:p>
@@ -9168,15 +9400,31 @@
           <a:p>
             <a:r>
               <a:rPr lang="en-US" altLang="zh-CN" dirty="0"/>
-              <a:t>Second row</a:t>
-            </a:r>
-            <a:r>
-              <a:rPr lang="en-US" altLang="zh-CN"/>
-              <a:t>:  We </a:t>
+              <a:t>Second row:  We want to use a prefix that allows for both IP prefixes 128.1.1.0/24 and 128.1.2.0/24 to map to port 2. We see that bits 17 to 24 (3rd octet from the left) for both prefixes are </a:t>
+            </a:r>
+            <a:r>
+              <a:rPr lang="en-US" altLang="zh-CN" dirty="0">
+                <a:solidFill>
+                  <a:srgbClr val="C00000"/>
+                </a:solidFill>
+              </a:rPr>
+              <a:t>000000</a:t>
             </a:r>
             <a:r>
               <a:rPr lang="en-US" altLang="zh-CN" dirty="0"/>
-              <a:t>want to use a prefix that allows for both IP prefixes 128.1.1.0/24 and 128.1.2.0/24 to map to port 2. We see that bits 17 to 24 (3rd octet from the left) for both prefixes are 00000001 and 0000010, respectively. Therefore, bits 1 to 22 are the same for the two IP addresses, so we can have the IP prefix 128.1.0.0/22.</a:t>
+              <a:t>01 and </a:t>
+            </a:r>
+            <a:r>
+              <a:rPr lang="en-US" altLang="zh-CN" dirty="0">
+                <a:solidFill>
+                  <a:srgbClr val="C00000"/>
+                </a:solidFill>
+              </a:rPr>
+              <a:t>00000</a:t>
+            </a:r>
+            <a:r>
+              <a:rPr lang="en-US" altLang="zh-CN" dirty="0"/>
+              <a:t>10, respectively. Therefore, bits 1 to 22 are the same for the two IP addresses, so we can have the IP prefix 128.1.0.0/22.</a:t>
             </a:r>
           </a:p>
           <a:p>
@@ -10306,7 +10554,31 @@
           <a:p>
             <a:r>
               <a:rPr lang="en-US" altLang="zh-CN" dirty="0"/>
-              <a:t>Convert first octet to binary: 17 = 00010001, 18 = 00010010.  They share the first 6 bits, then split at the 7th bit. </a:t>
+              <a:t>Convert first octet to binary: 17 = </a:t>
+            </a:r>
+            <a:r>
+              <a:rPr lang="en-US" altLang="zh-CN" dirty="0">
+                <a:solidFill>
+                  <a:srgbClr val="C00000"/>
+                </a:solidFill>
+              </a:rPr>
+              <a:t>000100</a:t>
+            </a:r>
+            <a:r>
+              <a:rPr lang="en-US" altLang="zh-CN" dirty="0"/>
+              <a:t>01, 18 = </a:t>
+            </a:r>
+            <a:r>
+              <a:rPr lang="en-US" altLang="zh-CN" dirty="0">
+                <a:solidFill>
+                  <a:srgbClr val="C00000"/>
+                </a:solidFill>
+              </a:rPr>
+              <a:t>000100</a:t>
+            </a:r>
+            <a:r>
+              <a:rPr lang="en-US" altLang="zh-CN" dirty="0"/>
+              <a:t>10.  They share the first 6 bits, then split at the 7th bit. </a:t>
             </a:r>
           </a:p>
           <a:p>
@@ -22527,7 +22799,7 @@
         </p:spPr>
         <p:txBody>
           <a:bodyPr>
-            <a:normAutofit fontScale="70000" lnSpcReduction="20000"/>
+            <a:normAutofit fontScale="62500" lnSpcReduction="20000"/>
           </a:bodyPr>
           <a:lstStyle/>
           <a:p>
@@ -22595,21 +22867,21 @@
             </a:r>
             <a:r>
               <a:rPr lang="en-US" altLang="zh-CN" dirty="0"/>
-              <a:t>= 0.</a:t>
+              <a:t>= 0. (Simplifying assumption assuming synchronized clocks for all routers.)</a:t>
             </a:r>
           </a:p>
           <a:p>
             <a:pPr lvl="1"/>
             <a:r>
               <a:rPr lang="en-US" altLang="zh-CN" dirty="0"/>
-              <a:t>Routing table entries expire after 10 seconds of receiving no advertisements.</a:t>
+              <a:t>Routing table entries expire after TTL=10 seconds of receiving no advertisements.</a:t>
             </a:r>
           </a:p>
           <a:p>
             <a:pPr lvl="1"/>
             <a:r>
               <a:rPr lang="en-US" altLang="zh-CN" dirty="0"/>
-              <a:t>Every second, each router (1) expires routes, then (2) processes advertisements and updates its table, then (3) sends out advertisements if </a:t>
+              <a:t>Every second, each router (1) expires routes based on TTL, then (2) processes advertisements and updates its table, then (3) sends out advertisements if </a:t>
             </a:r>
             <a:r>
               <a:rPr lang="zh-CN" altLang="en-US" dirty="0"/>
@@ -22617,7 +22889,7 @@
             </a:r>
             <a:r>
               <a:rPr lang="en-US" altLang="zh-CN" dirty="0"/>
-              <a:t>is even.</a:t>
+              <a:t>is even (every 2 seconds).</a:t>
             </a:r>
           </a:p>
           <a:p>
@@ -22636,7 +22908,7 @@
           <a:p>
             <a:r>
               <a:rPr lang="en-US" altLang="zh-CN" dirty="0"/>
-              <a:t>After the network converges, the R1 - R2 link is broken, and split horizon is enabled on all routers.</a:t>
+              <a:t>After the network converges, the R1 - R2 link is broken, and split horizon is enabled on all routers. (not route poisoning.)</a:t>
             </a:r>
           </a:p>
           <a:p>
@@ -22828,64 +23100,88 @@
         </p:nvSpPr>
         <p:spPr>
           <a:xfrm>
-            <a:off x="609600" y="1219198"/>
-            <a:ext cx="10972800" cy="2349690"/>
+            <a:off x="609600" y="1142998"/>
+            <a:ext cx="10972800" cy="2514602"/>
           </a:xfrm>
         </p:spPr>
         <p:txBody>
           <a:bodyPr>
-            <a:normAutofit fontScale="62500" lnSpcReduction="20000"/>
+            <a:normAutofit fontScale="92500" lnSpcReduction="20000"/>
           </a:bodyPr>
           <a:lstStyle/>
           <a:p>
             <a:r>
-              <a:rPr lang="en-US" altLang="zh-CN" dirty="0"/>
-              <a:t>Q1 Fill in R1’s table at steady state. If a host is directly connected, the next hop is “Direct”  (table on left)</a:t>
-            </a:r>
-          </a:p>
-          <a:p>
-            <a:r>
-              <a:rPr lang="en-US" altLang="zh-CN" dirty="0"/>
+              <a:rPr lang="en-US" altLang="zh-CN" sz="1600" dirty="0"/>
+              <a:t>Q1 Fill in </a:t>
+            </a:r>
+            <a:r>
+              <a:rPr lang="en-US" altLang="zh-CN" sz="1600" dirty="0">
+                <a:solidFill>
+                  <a:srgbClr val="C00000"/>
+                </a:solidFill>
+              </a:rPr>
+              <a:t>R1’s table </a:t>
+            </a:r>
+            <a:r>
+              <a:rPr lang="en-US" altLang="zh-CN" sz="1600" dirty="0"/>
+              <a:t>at steady state. If a host is directly connected, the next hop is “Direct”  (table on left)</a:t>
+            </a:r>
+          </a:p>
+          <a:p>
+            <a:r>
+              <a:rPr lang="en-US" altLang="zh-CN" sz="1600" dirty="0"/>
               <a:t>After the network converges, the R1 - R2 link is broken, and split horizon is enabled on all routers.</a:t>
             </a:r>
           </a:p>
           <a:p>
             <a:r>
-              <a:rPr lang="en-US" altLang="zh-CN" dirty="0"/>
-              <a:t>Q2 Fill in R1’s table at the new steady state after the R1 - R2 link is broken. (table on right)</a:t>
-            </a:r>
-          </a:p>
-          <a:p>
-            <a:r>
-              <a:rPr lang="en-US" altLang="zh-CN" dirty="0"/>
+              <a:rPr lang="en-US" altLang="zh-CN" sz="1600" dirty="0"/>
+              <a:t>Q2 Fill in </a:t>
+            </a:r>
+            <a:r>
+              <a:rPr lang="en-US" altLang="zh-CN" sz="1600" dirty="0">
+                <a:solidFill>
+                  <a:srgbClr val="C00000"/>
+                </a:solidFill>
+              </a:rPr>
+              <a:t>R1’s table</a:t>
+            </a:r>
+            <a:r>
+              <a:rPr lang="en-US" altLang="zh-CN" sz="1600" dirty="0"/>
+              <a:t> at the new steady state after the R1 - R2 link is broken. (table on right)</a:t>
+            </a:r>
+          </a:p>
+          <a:p>
+            <a:r>
+              <a:rPr lang="en-US" altLang="zh-CN" sz="1600" dirty="0"/>
               <a:t>Q3 Suppose R1’s original table entry for destination </a:t>
             </a:r>
             <a:r>
-              <a:rPr lang="zh-CN" altLang="en-US" dirty="0"/>
+              <a:rPr lang="zh-CN" altLang="en-US" sz="1600" dirty="0"/>
               <a:t>𝐶 </a:t>
             </a:r>
             <a:r>
-              <a:rPr lang="en-US" altLang="zh-CN" dirty="0"/>
+              <a:rPr lang="en-US" altLang="zh-CN" sz="1600" dirty="0"/>
               <a:t>expires at </a:t>
             </a:r>
             <a:r>
-              <a:rPr lang="zh-CN" altLang="en-US" dirty="0"/>
+              <a:rPr lang="zh-CN" altLang="en-US" sz="1600" dirty="0"/>
               <a:t>𝑡 </a:t>
             </a:r>
             <a:r>
-              <a:rPr lang="en-US" altLang="zh-CN" dirty="0"/>
-              <a:t>= 20. At what time step does R1’s table reach the new steady state in Q3.4? </a:t>
-            </a:r>
-          </a:p>
-          <a:p>
-            <a:r>
-              <a:rPr lang="en-US" altLang="zh-CN" dirty="0"/>
-              <a:t>ANS: The route to C is the only route that changes for R1. R1′s route for C expires at t=20, this means that the last possible advertisement was sent from R1 to R3 at t=18.  (After t=20, R1 cannot advertise the old route anymore; it must wait for a new usable route to come back from R3.) It reaches R3 after 2 seconds at t=20. R3′s route to C will then expire at t=30 at the earliest when it will accept new route from R2. Then R3 advertises back to R1 (2 seconds) to reach steady state at t=32.</a:t>
+              <a:rPr lang="en-US" altLang="zh-CN" sz="1600" dirty="0"/>
+              <a:t>= 20. At what time step does R1’s table reach the new steady state in Q2? </a:t>
+            </a:r>
+          </a:p>
+          <a:p>
+            <a:r>
+              <a:rPr lang="en-US" altLang="zh-CN" sz="1600" dirty="0"/>
+              <a:t>ANS: The route to C is the only route that changes for R1.  R1′s route to C expires at t=20, this means that the last possible advertisement for the route to C was sent from R1 to R3 at t=18.  (After t=20, R1 cannot advertise the old route to C anymore; it must wait for a new usable route to come back from R3.) It reaches R3 after 2 seconds at t=20. R3 had a route to C via R1 (R3 – R2 – R2 - C), which will expire at t=20+TTL=30 at the earliest when it will accept new route to C via R2 from R2.  Then R3 advertises back to R1 (2 seconds) to reach steady state at t=32.</a:t>
             </a:r>
             <a:br>
-              <a:rPr lang="en-US" altLang="zh-CN" dirty="0"/>
+              <a:rPr lang="en-US" altLang="zh-CN" sz="1600" dirty="0"/>
             </a:br>
-            <a:endParaRPr lang="en-US" altLang="zh-CN" dirty="0"/>
+            <a:endParaRPr lang="en-US" altLang="zh-CN" sz="1600" dirty="0"/>
           </a:p>
         </p:txBody>
       </p:sp>
@@ -23321,7 +23617,7 @@
         </p:spPr>
         <p:txBody>
           <a:bodyPr>
-            <a:normAutofit fontScale="70000" lnSpcReduction="20000"/>
+            <a:normAutofit fontScale="62500" lnSpcReduction="20000"/>
           </a:bodyPr>
           <a:lstStyle/>
           <a:p>
@@ -23367,7 +23663,15 @@
           <a:p>
             <a:r>
               <a:rPr lang="en-US" altLang="zh-CN" dirty="0"/>
-              <a:t>Explanation: Because R3 and R4 have not yet sent their Link-State Advertisements (LSAs), R1 and R2 are unaware of the failure and continue forwarding the packet toward R3, assuming it is the shortest path. However, R3 knows its link to R4 is down, so it has locally recomputed its next-best path to C, which happens to go back through R2. This creates a temporary routing loop until R1 and R2 receive the updates</a:t>
+              <a:t>Explanation: Because R3 and R4 have not yet sent their Link-State Advertisements (LSAs), R1 and R2 are unaware of the failure and continue forwarding the packet toward R3, assuming it is the shortest path. However, R3 knows its link to R4 is down, so it has locally recomputed its next-best path to C, which happens to go back through R2 (R3</a:t>
+            </a:r>
+            <a:r>
+              <a:rPr lang="pt-BR" altLang="zh-CN" dirty="0"/>
+              <a:t> → R2 → R4 → R5 → C</a:t>
+            </a:r>
+            <a:r>
+              <a:rPr lang="en-US" altLang="zh-CN" dirty="0"/>
+              <a:t>).  This creates a temporary routing loop until R1 and R2 receive the updates</a:t>
             </a:r>
           </a:p>
           <a:p>

--- a/Exams/CSC175  Sp26 Midterm Sample Questions ANS.pptx
+++ b/Exams/CSC175  Sp26 Midterm Sample Questions ANS.pptx
@@ -5,7 +5,7 @@
     <p:sldMasterId id="2147483660" r:id="rId1"/>
   </p:sldMasterIdLst>
   <p:notesMasterIdLst>
-    <p:notesMasterId r:id="rId29"/>
+    <p:notesMasterId r:id="rId30"/>
   </p:notesMasterIdLst>
   <p:sldIdLst>
     <p:sldId id="256" r:id="rId2"/>
@@ -15,26 +15,27 @@
     <p:sldId id="281" r:id="rId6"/>
     <p:sldId id="271" r:id="rId7"/>
     <p:sldId id="272" r:id="rId8"/>
-    <p:sldId id="257" r:id="rId9"/>
-    <p:sldId id="258" r:id="rId10"/>
-    <p:sldId id="260" r:id="rId11"/>
-    <p:sldId id="261" r:id="rId12"/>
-    <p:sldId id="262" r:id="rId13"/>
-    <p:sldId id="284" r:id="rId14"/>
-    <p:sldId id="287" r:id="rId15"/>
-    <p:sldId id="285" r:id="rId16"/>
-    <p:sldId id="286" r:id="rId17"/>
-    <p:sldId id="263" r:id="rId18"/>
-    <p:sldId id="264" r:id="rId19"/>
-    <p:sldId id="283" r:id="rId20"/>
-    <p:sldId id="282" r:id="rId21"/>
-    <p:sldId id="273" r:id="rId22"/>
-    <p:sldId id="274" r:id="rId23"/>
-    <p:sldId id="275" r:id="rId24"/>
-    <p:sldId id="276" r:id="rId25"/>
-    <p:sldId id="259" r:id="rId26"/>
-    <p:sldId id="269" r:id="rId27"/>
-    <p:sldId id="270" r:id="rId28"/>
+    <p:sldId id="288" r:id="rId9"/>
+    <p:sldId id="257" r:id="rId10"/>
+    <p:sldId id="258" r:id="rId11"/>
+    <p:sldId id="260" r:id="rId12"/>
+    <p:sldId id="261" r:id="rId13"/>
+    <p:sldId id="262" r:id="rId14"/>
+    <p:sldId id="284" r:id="rId15"/>
+    <p:sldId id="287" r:id="rId16"/>
+    <p:sldId id="285" r:id="rId17"/>
+    <p:sldId id="286" r:id="rId18"/>
+    <p:sldId id="263" r:id="rId19"/>
+    <p:sldId id="264" r:id="rId20"/>
+    <p:sldId id="283" r:id="rId21"/>
+    <p:sldId id="282" r:id="rId22"/>
+    <p:sldId id="273" r:id="rId23"/>
+    <p:sldId id="274" r:id="rId24"/>
+    <p:sldId id="275" r:id="rId25"/>
+    <p:sldId id="276" r:id="rId26"/>
+    <p:sldId id="259" r:id="rId27"/>
+    <p:sldId id="269" r:id="rId28"/>
+    <p:sldId id="270" r:id="rId29"/>
   </p:sldIdLst>
   <p:sldSz cx="12192000" cy="6858000"/>
   <p:notesSz cx="6950075" cy="9236075"/>
@@ -422,7 +423,7 @@
             <a:fld id="{2AEAFE1F-9E52-45C8-9793-E819F0044A1C}" type="datetimeFigureOut">
               <a:rPr lang="en-US" smtClean="0"/>
               <a:pPr/>
-              <a:t>3/31/2026</a:t>
+              <a:t>4/6/2026</a:t>
             </a:fld>
             <a:endParaRPr lang="en-US"/>
           </a:p>
@@ -943,7 +944,13 @@
   <p:cSld>
     <p:spTree>
       <p:nvGrpSpPr>
-        <p:cNvPr id="1" name=""/>
+        <p:cNvPr id="1" name="">
+          <a:extLst>
+            <a:ext uri="{FF2B5EF4-FFF2-40B4-BE49-F238E27FC236}">
+              <a16:creationId xmlns:a16="http://schemas.microsoft.com/office/drawing/2014/main" id="{5AAB41BE-F96C-70C6-A546-37B056B69B70}"/>
+            </a:ext>
+          </a:extLst>
+        </p:cNvPr>
         <p:cNvGrpSpPr/>
         <p:nvPr/>
       </p:nvGrpSpPr>
@@ -957,7 +964,13 @@
       </p:grpSpPr>
       <p:sp>
         <p:nvSpPr>
-          <p:cNvPr id="2" name="Slide Image Placeholder 1"/>
+          <p:cNvPr id="2" name="Slide Image Placeholder 1">
+            <a:extLst>
+              <a:ext uri="{FF2B5EF4-FFF2-40B4-BE49-F238E27FC236}">
+                <a16:creationId xmlns:a16="http://schemas.microsoft.com/office/drawing/2014/main" id="{AEEE0339-1BC5-ACCE-8E6B-FA68128D14BB}"/>
+              </a:ext>
+            </a:extLst>
+          </p:cNvPr>
           <p:cNvSpPr>
             <a:spLocks noGrp="1" noRot="1" noChangeAspect="1"/>
           </p:cNvSpPr>
@@ -969,7 +982,13 @@
       </p:sp>
       <p:sp>
         <p:nvSpPr>
-          <p:cNvPr id="3" name="Notes Placeholder 2"/>
+          <p:cNvPr id="3" name="Notes Placeholder 2">
+            <a:extLst>
+              <a:ext uri="{FF2B5EF4-FFF2-40B4-BE49-F238E27FC236}">
+                <a16:creationId xmlns:a16="http://schemas.microsoft.com/office/drawing/2014/main" id="{DCAFF362-B33D-3563-39E9-24D6B7E7E473}"/>
+              </a:ext>
+            </a:extLst>
+          </p:cNvPr>
           <p:cNvSpPr>
             <a:spLocks noGrp="1"/>
           </p:cNvSpPr>
@@ -982,195 +1001,31 @@
           <a:bodyPr/>
           <a:lstStyle/>
           <a:p>
+            <a:pPr marL="0" marR="0" lvl="0" indent="0" algn="l" defTabSz="914400" rtl="0" eaLnBrk="1" fontAlgn="auto" latinLnBrk="0" hangingPunct="1">
+              <a:lnSpc>
+                <a:spcPct val="100000"/>
+              </a:lnSpc>
+              <a:spcBef>
+                <a:spcPts val="0"/>
+              </a:spcBef>
+              <a:spcAft>
+                <a:spcPts val="0"/>
+              </a:spcAft>
+              <a:buClrTx/>
+              <a:buSzTx/>
+              <a:buFontTx/>
+              <a:buNone/>
+              <a:tabLst/>
+              <a:defRPr/>
+            </a:pPr>
             <a:r>
               <a:rPr lang="en-US" altLang="zh-CN" dirty="0"/>
-              <a:t>Math is assigned:</a:t>
-            </a:r>
-          </a:p>
-          <a:p>
-            <a:pPr rtl="0"/>
-            <a:r>
-              <a:rPr lang="en-US" altLang="zh-CN" sz="1200" kern="1200" dirty="0">
-                <a:solidFill>
-                  <a:schemeClr val="tx1"/>
-                </a:solidFill>
-                <a:latin typeface="+mn-lt"/>
-                <a:ea typeface="+mn-ea"/>
-                <a:cs typeface="+mn-cs"/>
-              </a:rPr>
-              <a:t>198.51.128.0/18</a:t>
+              <a:t>• Poisoned reverse, split horizon, and route poisoning are disabled. </a:t>
             </a:r>
             <a:br>
-              <a:rPr lang="en-US" altLang="zh-CN" sz="1200" kern="1200" dirty="0">
-                <a:solidFill>
-                  <a:schemeClr val="tx1"/>
-                </a:solidFill>
-                <a:latin typeface="+mn-lt"/>
-                <a:ea typeface="+mn-ea"/>
-                <a:cs typeface="+mn-cs"/>
-              </a:rPr>
+              <a:rPr lang="en-US" altLang="zh-CN" dirty="0"/>
             </a:br>
-            <a:r>
-              <a:rPr lang="en-US" altLang="zh-CN" sz="1200" kern="1200" dirty="0">
-                <a:solidFill>
-                  <a:schemeClr val="tx1"/>
-                </a:solidFill>
-                <a:latin typeface="+mn-lt"/>
-                <a:ea typeface="+mn-ea"/>
-                <a:cs typeface="+mn-cs"/>
-              </a:rPr>
-              <a:t>= 11000110 . 00110011 . 10 000000 . 00000000</a:t>
-            </a:r>
-          </a:p>
-          <a:p>
-            <a:r>
-              <a:rPr lang="en-US" altLang="zh-CN" b="1" dirty="0"/>
-              <a:t>Range</a:t>
-            </a:r>
-          </a:p>
-          <a:p>
-            <a:r>
-              <a:rPr lang="en-US" altLang="zh-CN" dirty="0"/>
-              <a:t>Since a </a:t>
-            </a:r>
-            <a:r>
-              <a:rPr lang="en-US" altLang="zh-CN" sz="1200" kern="1200" dirty="0">
-                <a:solidFill>
-                  <a:schemeClr val="tx1"/>
-                </a:solidFill>
-                <a:latin typeface="+mn-lt"/>
-                <a:ea typeface="+mn-ea"/>
-                <a:cs typeface="+mn-cs"/>
-              </a:rPr>
-              <a:t>/18</a:t>
-            </a:r>
-            <a:r>
-              <a:rPr lang="en-US" altLang="zh-CN" dirty="0"/>
-              <a:t> fixes the first 18 bits, the host bits are the remaining 14 bits.</a:t>
-            </a:r>
-          </a:p>
-          <a:p>
-            <a:r>
-              <a:rPr lang="en-US" altLang="zh-CN" dirty="0"/>
-              <a:t>So the address range is:</a:t>
-            </a:r>
-          </a:p>
-          <a:p>
-            <a:pPr rtl="0"/>
-            <a:r>
-              <a:rPr lang="en-US" altLang="zh-CN" sz="1200" kern="1200" dirty="0">
-                <a:solidFill>
-                  <a:schemeClr val="tx1"/>
-                </a:solidFill>
-                <a:latin typeface="+mn-lt"/>
-                <a:ea typeface="+mn-ea"/>
-                <a:cs typeface="+mn-cs"/>
-              </a:rPr>
-              <a:t>11000110 . 00110011 . 10 000000 . 00000000</a:t>
-            </a:r>
-            <a:br>
-              <a:rPr lang="en-US" altLang="zh-CN" sz="1200" kern="1200" dirty="0">
-                <a:solidFill>
-                  <a:schemeClr val="tx1"/>
-                </a:solidFill>
-                <a:latin typeface="+mn-lt"/>
-                <a:ea typeface="+mn-ea"/>
-                <a:cs typeface="+mn-cs"/>
-              </a:rPr>
-            </a:br>
-            <a:r>
-              <a:rPr lang="en-US" altLang="zh-CN" sz="1200" kern="1200" dirty="0">
-                <a:solidFill>
-                  <a:schemeClr val="tx1"/>
-                </a:solidFill>
-                <a:latin typeface="+mn-lt"/>
-                <a:ea typeface="+mn-ea"/>
-                <a:cs typeface="+mn-cs"/>
-              </a:rPr>
-              <a:t>through</a:t>
-            </a:r>
-            <a:br>
-              <a:rPr lang="en-US" altLang="zh-CN" sz="1200" kern="1200" dirty="0">
-                <a:solidFill>
-                  <a:schemeClr val="tx1"/>
-                </a:solidFill>
-                <a:latin typeface="+mn-lt"/>
-                <a:ea typeface="+mn-ea"/>
-                <a:cs typeface="+mn-cs"/>
-              </a:rPr>
-            </a:br>
-            <a:r>
-              <a:rPr lang="en-US" altLang="zh-CN" sz="1200" kern="1200" dirty="0">
-                <a:solidFill>
-                  <a:schemeClr val="tx1"/>
-                </a:solidFill>
-                <a:latin typeface="+mn-lt"/>
-                <a:ea typeface="+mn-ea"/>
-                <a:cs typeface="+mn-cs"/>
-              </a:rPr>
-              <a:t>11000110 . 00110011 . 10 111111 . 11111111</a:t>
-            </a:r>
-          </a:p>
-          <a:p>
-            <a:r>
-              <a:rPr lang="en-US" altLang="zh-CN" dirty="0"/>
-              <a:t>In decimal:</a:t>
-            </a:r>
-          </a:p>
-          <a:p>
-            <a:pPr rtl="0"/>
-            <a:r>
-              <a:rPr lang="en-US" altLang="zh-CN" sz="1200" kern="1200" dirty="0">
-                <a:solidFill>
-                  <a:schemeClr val="tx1"/>
-                </a:solidFill>
-                <a:latin typeface="+mn-lt"/>
-                <a:ea typeface="+mn-ea"/>
-                <a:cs typeface="+mn-cs"/>
-              </a:rPr>
-              <a:t>198.51.128.0  through  198.51.191.255</a:t>
-            </a:r>
-          </a:p>
-          <a:p>
-            <a:r>
-              <a:rPr lang="en-US" altLang="zh-CN" b="1" dirty="0"/>
-              <a:t>Number of addresses</a:t>
-            </a:r>
-          </a:p>
-          <a:p>
-            <a:r>
-              <a:rPr lang="en-US" altLang="zh-CN" dirty="0"/>
-              <a:t>A </a:t>
-            </a:r>
-            <a:r>
-              <a:rPr lang="en-US" altLang="zh-CN" sz="1200" kern="1200" dirty="0">
-                <a:solidFill>
-                  <a:schemeClr val="tx1"/>
-                </a:solidFill>
-                <a:latin typeface="+mn-lt"/>
-                <a:ea typeface="+mn-ea"/>
-                <a:cs typeface="+mn-cs"/>
-              </a:rPr>
-              <a:t>/18</a:t>
-            </a:r>
-            <a:r>
-              <a:rPr lang="en-US" altLang="zh-CN" dirty="0"/>
-              <a:t> has:</a:t>
-            </a:r>
-          </a:p>
-          <a:p>
-            <a:pPr rtl="0"/>
-            <a:r>
-              <a:rPr lang="en-US" altLang="zh-CN" sz="1200" kern="1200" dirty="0">
-                <a:solidFill>
-                  <a:schemeClr val="tx1"/>
-                </a:solidFill>
-                <a:latin typeface="+mn-lt"/>
-                <a:ea typeface="+mn-ea"/>
-                <a:cs typeface="+mn-cs"/>
-              </a:rPr>
-              <a:t>2^(32 - 18) = 2^14 = 16384</a:t>
-            </a:r>
+            <a:endParaRPr lang="zh-CN" altLang="en-US" dirty="0"/>
           </a:p>
           <a:p>
             <a:endParaRPr lang="zh-CN" altLang="en-US" dirty="0"/>
@@ -1179,7 +1034,13 @@
       </p:sp>
       <p:sp>
         <p:nvSpPr>
-          <p:cNvPr id="4" name="Slide Number Placeholder 3"/>
+          <p:cNvPr id="4" name="Slide Number Placeholder 3">
+            <a:extLst>
+              <a:ext uri="{FF2B5EF4-FFF2-40B4-BE49-F238E27FC236}">
+                <a16:creationId xmlns:a16="http://schemas.microsoft.com/office/drawing/2014/main" id="{DF7C4628-05FF-1B1E-9D35-0D6371EEBB36}"/>
+              </a:ext>
+            </a:extLst>
+          </p:cNvPr>
           <p:cNvSpPr>
             <a:spLocks noGrp="1"/>
           </p:cNvSpPr>
@@ -1195,7 +1056,7 @@
             <a:fld id="{2D71AD5F-E36F-46B9-A99B-7B025244359D}" type="slidenum">
               <a:rPr lang="en-US" smtClean="0"/>
               <a:pPr/>
-              <a:t>15</a:t>
+              <a:t>8</a:t>
             </a:fld>
             <a:endParaRPr lang="en-US"/>
           </a:p>
@@ -1204,7 +1065,7 @@
     </p:spTree>
     <p:extLst>
       <p:ext uri="{BB962C8B-B14F-4D97-AF65-F5344CB8AC3E}">
-        <p14:creationId xmlns:p14="http://schemas.microsoft.com/office/powerpoint/2010/main" val="410959444"/>
+        <p14:creationId xmlns:p14="http://schemas.microsoft.com/office/powerpoint/2010/main" val="804821735"/>
       </p:ext>
     </p:extLst>
   </p:cSld>
@@ -1258,6 +1119,197 @@
           <a:bodyPr/>
           <a:lstStyle/>
           <a:p>
+            <a:r>
+              <a:rPr lang="en-US" altLang="zh-CN" dirty="0"/>
+              <a:t>Math is assigned:</a:t>
+            </a:r>
+          </a:p>
+          <a:p>
+            <a:pPr rtl="0"/>
+            <a:r>
+              <a:rPr lang="en-US" altLang="zh-CN" sz="1200" kern="1200" dirty="0">
+                <a:solidFill>
+                  <a:schemeClr val="tx1"/>
+                </a:solidFill>
+                <a:latin typeface="+mn-lt"/>
+                <a:ea typeface="+mn-ea"/>
+                <a:cs typeface="+mn-cs"/>
+              </a:rPr>
+              <a:t>198.51.128.0/18</a:t>
+            </a:r>
+            <a:br>
+              <a:rPr lang="en-US" altLang="zh-CN" sz="1200" kern="1200" dirty="0">
+                <a:solidFill>
+                  <a:schemeClr val="tx1"/>
+                </a:solidFill>
+                <a:latin typeface="+mn-lt"/>
+                <a:ea typeface="+mn-ea"/>
+                <a:cs typeface="+mn-cs"/>
+              </a:rPr>
+            </a:br>
+            <a:r>
+              <a:rPr lang="en-US" altLang="zh-CN" sz="1200" kern="1200" dirty="0">
+                <a:solidFill>
+                  <a:schemeClr val="tx1"/>
+                </a:solidFill>
+                <a:latin typeface="+mn-lt"/>
+                <a:ea typeface="+mn-ea"/>
+                <a:cs typeface="+mn-cs"/>
+              </a:rPr>
+              <a:t>= 11000110 . 00110011 . 10 000000 . 00000000</a:t>
+            </a:r>
+          </a:p>
+          <a:p>
+            <a:r>
+              <a:rPr lang="en-US" altLang="zh-CN" b="1" dirty="0"/>
+              <a:t>Range</a:t>
+            </a:r>
+          </a:p>
+          <a:p>
+            <a:r>
+              <a:rPr lang="en-US" altLang="zh-CN" dirty="0"/>
+              <a:t>Since a </a:t>
+            </a:r>
+            <a:r>
+              <a:rPr lang="en-US" altLang="zh-CN" sz="1200" kern="1200" dirty="0">
+                <a:solidFill>
+                  <a:schemeClr val="tx1"/>
+                </a:solidFill>
+                <a:latin typeface="+mn-lt"/>
+                <a:ea typeface="+mn-ea"/>
+                <a:cs typeface="+mn-cs"/>
+              </a:rPr>
+              <a:t>/18</a:t>
+            </a:r>
+            <a:r>
+              <a:rPr lang="en-US" altLang="zh-CN" dirty="0"/>
+              <a:t> fixes the first 18 bits, the host bits are the remaining 14 bits.</a:t>
+            </a:r>
+          </a:p>
+          <a:p>
+            <a:r>
+              <a:rPr lang="en-US" altLang="zh-CN" dirty="0"/>
+              <a:t>So the address range is:</a:t>
+            </a:r>
+          </a:p>
+          <a:p>
+            <a:pPr rtl="0"/>
+            <a:r>
+              <a:rPr lang="en-US" altLang="zh-CN" sz="1200" kern="1200" dirty="0">
+                <a:solidFill>
+                  <a:schemeClr val="tx1"/>
+                </a:solidFill>
+                <a:latin typeface="+mn-lt"/>
+                <a:ea typeface="+mn-ea"/>
+                <a:cs typeface="+mn-cs"/>
+              </a:rPr>
+              <a:t>11000110 . 00110011 . 10 000000 . 00000000</a:t>
+            </a:r>
+            <a:br>
+              <a:rPr lang="en-US" altLang="zh-CN" sz="1200" kern="1200" dirty="0">
+                <a:solidFill>
+                  <a:schemeClr val="tx1"/>
+                </a:solidFill>
+                <a:latin typeface="+mn-lt"/>
+                <a:ea typeface="+mn-ea"/>
+                <a:cs typeface="+mn-cs"/>
+              </a:rPr>
+            </a:br>
+            <a:r>
+              <a:rPr lang="en-US" altLang="zh-CN" sz="1200" kern="1200" dirty="0">
+                <a:solidFill>
+                  <a:schemeClr val="tx1"/>
+                </a:solidFill>
+                <a:latin typeface="+mn-lt"/>
+                <a:ea typeface="+mn-ea"/>
+                <a:cs typeface="+mn-cs"/>
+              </a:rPr>
+              <a:t>through</a:t>
+            </a:r>
+            <a:br>
+              <a:rPr lang="en-US" altLang="zh-CN" sz="1200" kern="1200" dirty="0">
+                <a:solidFill>
+                  <a:schemeClr val="tx1"/>
+                </a:solidFill>
+                <a:latin typeface="+mn-lt"/>
+                <a:ea typeface="+mn-ea"/>
+                <a:cs typeface="+mn-cs"/>
+              </a:rPr>
+            </a:br>
+            <a:r>
+              <a:rPr lang="en-US" altLang="zh-CN" sz="1200" kern="1200" dirty="0">
+                <a:solidFill>
+                  <a:schemeClr val="tx1"/>
+                </a:solidFill>
+                <a:latin typeface="+mn-lt"/>
+                <a:ea typeface="+mn-ea"/>
+                <a:cs typeface="+mn-cs"/>
+              </a:rPr>
+              <a:t>11000110 . 00110011 . 10 111111 . 11111111</a:t>
+            </a:r>
+          </a:p>
+          <a:p>
+            <a:r>
+              <a:rPr lang="en-US" altLang="zh-CN" dirty="0"/>
+              <a:t>In decimal:</a:t>
+            </a:r>
+          </a:p>
+          <a:p>
+            <a:pPr rtl="0"/>
+            <a:r>
+              <a:rPr lang="en-US" altLang="zh-CN" sz="1200" kern="1200" dirty="0">
+                <a:solidFill>
+                  <a:schemeClr val="tx1"/>
+                </a:solidFill>
+                <a:latin typeface="+mn-lt"/>
+                <a:ea typeface="+mn-ea"/>
+                <a:cs typeface="+mn-cs"/>
+              </a:rPr>
+              <a:t>198.51.128.0  through  198.51.191.255</a:t>
+            </a:r>
+          </a:p>
+          <a:p>
+            <a:r>
+              <a:rPr lang="en-US" altLang="zh-CN" b="1" dirty="0"/>
+              <a:t>Number of addresses</a:t>
+            </a:r>
+          </a:p>
+          <a:p>
+            <a:r>
+              <a:rPr lang="en-US" altLang="zh-CN" dirty="0"/>
+              <a:t>A </a:t>
+            </a:r>
+            <a:r>
+              <a:rPr lang="en-US" altLang="zh-CN" sz="1200" kern="1200" dirty="0">
+                <a:solidFill>
+                  <a:schemeClr val="tx1"/>
+                </a:solidFill>
+                <a:latin typeface="+mn-lt"/>
+                <a:ea typeface="+mn-ea"/>
+                <a:cs typeface="+mn-cs"/>
+              </a:rPr>
+              <a:t>/18</a:t>
+            </a:r>
+            <a:r>
+              <a:rPr lang="en-US" altLang="zh-CN" dirty="0"/>
+              <a:t> has:</a:t>
+            </a:r>
+          </a:p>
+          <a:p>
+            <a:pPr rtl="0"/>
+            <a:r>
+              <a:rPr lang="en-US" altLang="zh-CN" sz="1200" kern="1200" dirty="0">
+                <a:solidFill>
+                  <a:schemeClr val="tx1"/>
+                </a:solidFill>
+                <a:latin typeface="+mn-lt"/>
+                <a:ea typeface="+mn-ea"/>
+                <a:cs typeface="+mn-cs"/>
+              </a:rPr>
+              <a:t>2^(32 - 18) = 2^14 = 16384</a:t>
+            </a:r>
+          </a:p>
+          <a:p>
             <a:endParaRPr lang="zh-CN" altLang="en-US" dirty="0"/>
           </a:p>
         </p:txBody>
@@ -1280,7 +1332,92 @@
             <a:fld id="{2D71AD5F-E36F-46B9-A99B-7B025244359D}" type="slidenum">
               <a:rPr lang="en-US" smtClean="0"/>
               <a:pPr/>
-              <a:t>18</a:t>
+              <a:t>16</a:t>
+            </a:fld>
+            <a:endParaRPr lang="en-US"/>
+          </a:p>
+        </p:txBody>
+      </p:sp>
+    </p:spTree>
+    <p:extLst>
+      <p:ext uri="{BB962C8B-B14F-4D97-AF65-F5344CB8AC3E}">
+        <p14:creationId xmlns:p14="http://schemas.microsoft.com/office/powerpoint/2010/main" val="410959444"/>
+      </p:ext>
+    </p:extLst>
+  </p:cSld>
+  <p:clrMapOvr>
+    <a:masterClrMapping/>
+  </p:clrMapOvr>
+</p:notes>
+</file>
+
+<file path=ppt/notesSlides/notesSlide5.xml><?xml version="1.0" encoding="utf-8"?>
+<p:notes xmlns:a="http://schemas.openxmlformats.org/drawingml/2006/main" xmlns:r="http://schemas.openxmlformats.org/officeDocument/2006/relationships" xmlns:p="http://schemas.openxmlformats.org/presentationml/2006/main">
+  <p:cSld>
+    <p:spTree>
+      <p:nvGrpSpPr>
+        <p:cNvPr id="1" name=""/>
+        <p:cNvGrpSpPr/>
+        <p:nvPr/>
+      </p:nvGrpSpPr>
+      <p:grpSpPr>
+        <a:xfrm>
+          <a:off x="0" y="0"/>
+          <a:ext cx="0" cy="0"/>
+          <a:chOff x="0" y="0"/>
+          <a:chExt cx="0" cy="0"/>
+        </a:xfrm>
+      </p:grpSpPr>
+      <p:sp>
+        <p:nvSpPr>
+          <p:cNvPr id="2" name="Slide Image Placeholder 1"/>
+          <p:cNvSpPr>
+            <a:spLocks noGrp="1" noRot="1" noChangeAspect="1"/>
+          </p:cNvSpPr>
+          <p:nvPr>
+            <p:ph type="sldImg"/>
+          </p:nvPr>
+        </p:nvSpPr>
+        <p:spPr/>
+      </p:sp>
+      <p:sp>
+        <p:nvSpPr>
+          <p:cNvPr id="3" name="Notes Placeholder 2"/>
+          <p:cNvSpPr>
+            <a:spLocks noGrp="1"/>
+          </p:cNvSpPr>
+          <p:nvPr>
+            <p:ph type="body" idx="1"/>
+          </p:nvPr>
+        </p:nvSpPr>
+        <p:spPr/>
+        <p:txBody>
+          <a:bodyPr/>
+          <a:lstStyle/>
+          <a:p>
+            <a:endParaRPr lang="zh-CN" altLang="en-US" dirty="0"/>
+          </a:p>
+        </p:txBody>
+      </p:sp>
+      <p:sp>
+        <p:nvSpPr>
+          <p:cNvPr id="4" name="Slide Number Placeholder 3"/>
+          <p:cNvSpPr>
+            <a:spLocks noGrp="1"/>
+          </p:cNvSpPr>
+          <p:nvPr>
+            <p:ph type="sldNum" sz="quarter" idx="5"/>
+          </p:nvPr>
+        </p:nvSpPr>
+        <p:spPr/>
+        <p:txBody>
+          <a:bodyPr/>
+          <a:lstStyle/>
+          <a:p>
+            <a:fld id="{2D71AD5F-E36F-46B9-A99B-7B025244359D}" type="slidenum">
+              <a:rPr lang="en-US" smtClean="0"/>
+              <a:pPr/>
+              <a:t>19</a:t>
             </a:fld>
             <a:endParaRPr lang="en-US"/>
           </a:p>
@@ -1442,7 +1579,7 @@
             <a:fld id="{2E26774B-6488-4259-9342-6CBDB2BFD4E4}" type="datetime1">
               <a:rPr lang="en-US" smtClean="0"/>
               <a:pPr eaLnBrk="1" latinLnBrk="0" hangingPunct="1"/>
-              <a:t>3/31/2026</a:t>
+              <a:t>4/6/2026</a:t>
             </a:fld>
             <a:endParaRPr lang="en-US" sz="1600" dirty="0"/>
           </a:p>
@@ -1803,7 +1940,7 @@
             <a:fld id="{9B2E7711-0BE3-4AFC-959B-CB5C31A7AE48}" type="datetime1">
               <a:rPr lang="en-US" smtClean="0"/>
               <a:pPr eaLnBrk="1" latinLnBrk="0" hangingPunct="1"/>
-              <a:t>3/31/2026</a:t>
+              <a:t>4/6/2026</a:t>
             </a:fld>
             <a:endParaRPr lang="en-US"/>
           </a:p>
@@ -1980,7 +2117,7 @@
             <a:fld id="{825AAB62-A572-4E37-B772-B4A75ADE0B18}" type="datetime1">
               <a:rPr lang="en-US" smtClean="0"/>
               <a:pPr eaLnBrk="1" latinLnBrk="0" hangingPunct="1"/>
-              <a:t>3/31/2026</a:t>
+              <a:t>4/6/2026</a:t>
             </a:fld>
             <a:endParaRPr lang="en-US"/>
           </a:p>
@@ -2217,7 +2354,7 @@
             <a:fld id="{B0F52420-10F8-488E-969A-A9BE388BE9C4}" type="datetime1">
               <a:rPr lang="en-US" smtClean="0"/>
               <a:pPr eaLnBrk="1" latinLnBrk="0" hangingPunct="1"/>
-              <a:t>3/31/2026</a:t>
+              <a:t>4/6/2026</a:t>
             </a:fld>
             <a:endParaRPr lang="en-US" dirty="0"/>
           </a:p>
@@ -2488,7 +2625,7 @@
             <a:fld id="{96E96F24-58CF-47DA-907C-A9CD6353E425}" type="datetime1">
               <a:rPr lang="en-US" smtClean="0"/>
               <a:pPr eaLnBrk="1" latinLnBrk="0" hangingPunct="1"/>
-              <a:t>3/31/2026</a:t>
+              <a:t>4/6/2026</a:t>
             </a:fld>
             <a:endParaRPr lang="en-US" dirty="0"/>
           </a:p>
@@ -2710,7 +2847,7 @@
             <a:fld id="{53AE4463-726A-4A35-9F46-98893432A3F9}" type="datetime1">
               <a:rPr lang="en-US" smtClean="0"/>
               <a:pPr eaLnBrk="1" latinLnBrk="0" hangingPunct="1"/>
-              <a:t>3/31/2026</a:t>
+              <a:t>4/6/2026</a:t>
             </a:fld>
             <a:endParaRPr lang="en-US"/>
           </a:p>
@@ -3064,7 +3201,7 @@
             <a:fld id="{FDF404D0-E306-4E90-90E3-E44D26246FFC}" type="datetime1">
               <a:rPr lang="en-US" smtClean="0"/>
               <a:pPr eaLnBrk="1" latinLnBrk="0" hangingPunct="1"/>
-              <a:t>3/31/2026</a:t>
+              <a:t>4/6/2026</a:t>
             </a:fld>
             <a:endParaRPr lang="en-US"/>
           </a:p>
@@ -3298,7 +3435,7 @@
             <a:fld id="{1485DA14-76F0-4D93-83FB-7878C79A1986}" type="datetime1">
               <a:rPr lang="en-US" smtClean="0"/>
               <a:pPr eaLnBrk="1" latinLnBrk="0" hangingPunct="1"/>
-              <a:t>3/31/2026</a:t>
+              <a:t>4/6/2026</a:t>
             </a:fld>
             <a:endParaRPr lang="en-US"/>
           </a:p>
@@ -3441,7 +3578,7 @@
             <a:fld id="{A15E552D-49E1-496B-B79C-E100986B8B5F}" type="datetime1">
               <a:rPr lang="en-US" smtClean="0"/>
               <a:pPr eaLnBrk="1" latinLnBrk="0" hangingPunct="1"/>
-              <a:t>3/31/2026</a:t>
+              <a:t>4/6/2026</a:t>
             </a:fld>
             <a:endParaRPr lang="en-US"/>
           </a:p>
@@ -3720,7 +3857,7 @@
             <a:fld id="{CEC72505-1551-4A98-97CD-F520B07184AD}" type="datetime1">
               <a:rPr lang="en-US" smtClean="0"/>
               <a:pPr eaLnBrk="1" latinLnBrk="0" hangingPunct="1"/>
-              <a:t>3/31/2026</a:t>
+              <a:t>4/6/2026</a:t>
             </a:fld>
             <a:endParaRPr lang="en-US"/>
           </a:p>
@@ -4129,7 +4266,7 @@
             <a:fld id="{7218F47B-BA16-4F20-B5BA-73F598D94B51}" type="datetime1">
               <a:rPr lang="en-US" smtClean="0"/>
               <a:pPr eaLnBrk="1" latinLnBrk="0" hangingPunct="1"/>
-              <a:t>3/31/2026</a:t>
+              <a:t>4/6/2026</a:t>
             </a:fld>
             <a:endParaRPr lang="en-US"/>
           </a:p>
@@ -4468,7 +4605,7 @@
             <a:fld id="{4F3CB514-9CA6-4E48-9463-A430D31CFDE3}" type="datetime1">
               <a:rPr lang="en-US" smtClean="0"/>
               <a:pPr eaLnBrk="1" latinLnBrk="0" hangingPunct="1"/>
-              <a:t>3/31/2026</a:t>
+              <a:t>4/6/2026</a:t>
             </a:fld>
             <a:endParaRPr lang="en-US" sz="1400" dirty="0">
               <a:solidFill>
@@ -5141,6 +5278,575 @@
         <p:cNvPr id="1" name="">
           <a:extLst>
             <a:ext uri="{FF2B5EF4-FFF2-40B4-BE49-F238E27FC236}">
+              <a16:creationId xmlns:a16="http://schemas.microsoft.com/office/drawing/2014/main" id="{CADCD358-DCD5-5D54-466E-ACFF98743B3E}"/>
+            </a:ext>
+          </a:extLst>
+        </p:cNvPr>
+        <p:cNvGrpSpPr/>
+        <p:nvPr/>
+      </p:nvGrpSpPr>
+      <p:grpSpPr>
+        <a:xfrm>
+          <a:off x="0" y="0"/>
+          <a:ext cx="0" cy="0"/>
+          <a:chOff x="0" y="0"/>
+          <a:chExt cx="0" cy="0"/>
+        </a:xfrm>
+      </p:grpSpPr>
+      <p:sp>
+        <p:nvSpPr>
+          <p:cNvPr id="2" name="Title 1">
+            <a:extLst>
+              <a:ext uri="{FF2B5EF4-FFF2-40B4-BE49-F238E27FC236}">
+                <a16:creationId xmlns:a16="http://schemas.microsoft.com/office/drawing/2014/main" id="{32833A3F-6964-20F1-79E8-FCFE8C1AEBFE}"/>
+              </a:ext>
+            </a:extLst>
+          </p:cNvPr>
+          <p:cNvSpPr>
+            <a:spLocks noGrp="1"/>
+          </p:cNvSpPr>
+          <p:nvPr>
+            <p:ph type="title"/>
+          </p:nvPr>
+        </p:nvSpPr>
+        <p:spPr/>
+        <p:txBody>
+          <a:bodyPr/>
+          <a:lstStyle/>
+          <a:p>
+            <a:r>
+              <a:rPr lang="nl-NL" altLang="zh-CN" dirty="0"/>
+              <a:t>Lecture 5.3 - Link-State ANS</a:t>
+            </a:r>
+            <a:endParaRPr lang="zh-CN" altLang="en-US" dirty="0"/>
+          </a:p>
+        </p:txBody>
+      </p:sp>
+      <p:sp>
+        <p:nvSpPr>
+          <p:cNvPr id="3" name="Slide Number Placeholder 2">
+            <a:extLst>
+              <a:ext uri="{FF2B5EF4-FFF2-40B4-BE49-F238E27FC236}">
+                <a16:creationId xmlns:a16="http://schemas.microsoft.com/office/drawing/2014/main" id="{8D106DA5-B39E-00EE-ADEA-C0F073DBB350}"/>
+              </a:ext>
+            </a:extLst>
+          </p:cNvPr>
+          <p:cNvSpPr>
+            <a:spLocks noGrp="1"/>
+          </p:cNvSpPr>
+          <p:nvPr>
+            <p:ph type="sldNum" sz="quarter" idx="12"/>
+          </p:nvPr>
+        </p:nvSpPr>
+        <p:spPr/>
+        <p:txBody>
+          <a:bodyPr/>
+          <a:lstStyle/>
+          <a:p>
+            <a:fld id="{EA7C8D44-3667-46F6-9772-CC52308E2A7F}" type="slidenum">
+              <a:rPr kumimoji="0" lang="en-US" smtClean="0"/>
+              <a:pPr/>
+              <a:t>10</a:t>
+            </a:fld>
+            <a:endParaRPr kumimoji="0" lang="en-US" dirty="0"/>
+          </a:p>
+        </p:txBody>
+      </p:sp>
+      <p:sp>
+        <p:nvSpPr>
+          <p:cNvPr id="4" name="Content Placeholder 3">
+            <a:extLst>
+              <a:ext uri="{FF2B5EF4-FFF2-40B4-BE49-F238E27FC236}">
+                <a16:creationId xmlns:a16="http://schemas.microsoft.com/office/drawing/2014/main" id="{8FEE1D6E-BDD8-543E-5201-693D655D1834}"/>
+              </a:ext>
+            </a:extLst>
+          </p:cNvPr>
+          <p:cNvSpPr>
+            <a:spLocks noGrp="1"/>
+          </p:cNvSpPr>
+          <p:nvPr>
+            <p:ph sz="quarter" idx="1"/>
+          </p:nvPr>
+        </p:nvSpPr>
+        <p:spPr>
+          <a:xfrm>
+            <a:off x="609600" y="1219200"/>
+            <a:ext cx="6260578" cy="5137150"/>
+          </a:xfrm>
+        </p:spPr>
+        <p:txBody>
+          <a:bodyPr>
+            <a:normAutofit fontScale="62500" lnSpcReduction="20000"/>
+          </a:bodyPr>
+          <a:lstStyle/>
+          <a:p>
+            <a:r>
+              <a:rPr lang="en-US" altLang="zh-CN" dirty="0"/>
+              <a:t>Q1. Suppose that </a:t>
+            </a:r>
+            <a:r>
+              <a:rPr lang="en-US" altLang="zh-CN" dirty="0">
+                <a:solidFill>
+                  <a:srgbClr val="C00000"/>
+                </a:solidFill>
+              </a:rPr>
+              <a:t>the</a:t>
+            </a:r>
+            <a:r>
+              <a:rPr lang="en-US" altLang="zh-CN" dirty="0"/>
+              <a:t> </a:t>
+            </a:r>
+            <a:r>
+              <a:rPr lang="en-US" altLang="zh-CN" dirty="0">
+                <a:solidFill>
+                  <a:srgbClr val="C00000"/>
+                </a:solidFill>
+              </a:rPr>
+              <a:t>link between R3 and R4 goes down</a:t>
+            </a:r>
+            <a:r>
+              <a:rPr lang="en-US" altLang="zh-CN" dirty="0"/>
+              <a:t>. R3 and R4 have recomputed their routes, but they have not yet sent updates. What route will a packet from A to C take?</a:t>
+            </a:r>
+          </a:p>
+          <a:p>
+            <a:r>
+              <a:rPr lang="en-US" altLang="zh-CN" dirty="0"/>
+              <a:t>ANS: </a:t>
+            </a:r>
+            <a:r>
+              <a:rPr lang="pt-BR" altLang="zh-CN" dirty="0"/>
+              <a:t> A → R1 → R2 → R3 → R2 → R3 (loop)</a:t>
+            </a:r>
+          </a:p>
+          <a:p>
+            <a:r>
+              <a:rPr lang="en-US" altLang="zh-CN" dirty="0"/>
+              <a:t>Explanation: Because R3 and R4 have not yet sent their Link-State Advertisements (LSAs), R1 and R2 are unaware of the failure and continue forwarding the packet toward R3, assuming it is the shortest path. However, R3 knows its link to R4 is down, so it has locally recomputed its next-best path to C, which happens to go back through R2 (R3</a:t>
+            </a:r>
+            <a:r>
+              <a:rPr lang="pt-BR" altLang="zh-CN" dirty="0"/>
+              <a:t> → R2 → R4 → R5 → C</a:t>
+            </a:r>
+            <a:r>
+              <a:rPr lang="en-US" altLang="zh-CN" dirty="0"/>
+              <a:t>).  This creates a temporary routing loop until R1 and R2 receive the updates</a:t>
+            </a:r>
+          </a:p>
+          <a:p>
+            <a:r>
+              <a:rPr lang="en-US" altLang="zh-CN" dirty="0"/>
+              <a:t>Q2. Suppose that </a:t>
+            </a:r>
+            <a:r>
+              <a:rPr lang="en-US" altLang="zh-CN" dirty="0">
+                <a:solidFill>
+                  <a:srgbClr val="C00000"/>
+                </a:solidFill>
+              </a:rPr>
+              <a:t>the link between R2 and R3 goes down</a:t>
+            </a:r>
+            <a:r>
+              <a:rPr lang="en-US" altLang="zh-CN" dirty="0"/>
+              <a:t>. R2 and R3 have recomputed their routes, but have not yet sent updates.  What route will a packet from A to C take? </a:t>
+            </a:r>
+          </a:p>
+          <a:p>
+            <a:r>
+              <a:rPr lang="en-US" altLang="zh-CN" dirty="0"/>
+              <a:t>ANS:  </a:t>
+            </a:r>
+            <a:r>
+              <a:rPr lang="pt-BR" altLang="zh-CN" dirty="0"/>
+              <a:t>A → R1 → R2 → R4 → R5 → C </a:t>
+            </a:r>
+          </a:p>
+          <a:p>
+            <a:r>
+              <a:rPr lang="en-US" altLang="zh-CN" dirty="0"/>
+              <a:t>Explanation: R1 is unaware of the failure and sends the packet to R2. However, R2 is aware that its link to R3 is down. R2 locally recalculates an alternate route to C via R4 and R5. Because this new path does not bounce back to an uninformed router that points back to R2, the packet successfully reaches its destination without looping.</a:t>
+            </a:r>
+            <a:endParaRPr lang="zh-CN" altLang="en-US" dirty="0"/>
+          </a:p>
+        </p:txBody>
+      </p:sp>
+      <p:pic>
+        <p:nvPicPr>
+          <p:cNvPr id="5" name="Picture 4">
+            <a:extLst>
+              <a:ext uri="{FF2B5EF4-FFF2-40B4-BE49-F238E27FC236}">
+                <a16:creationId xmlns:a16="http://schemas.microsoft.com/office/drawing/2014/main" id="{02D6FFA8-8915-83EB-E55C-9F4A48412A9A}"/>
+              </a:ext>
+            </a:extLst>
+          </p:cNvPr>
+          <p:cNvPicPr>
+            <a:picLocks noChangeAspect="1"/>
+          </p:cNvPicPr>
+          <p:nvPr/>
+        </p:nvPicPr>
+        <p:blipFill>
+          <a:blip r:embed="rId2"/>
+          <a:srcRect/>
+          <a:stretch/>
+        </p:blipFill>
+        <p:spPr>
+          <a:xfrm>
+            <a:off x="6870178" y="1752601"/>
+            <a:ext cx="5243053" cy="2743200"/>
+          </a:xfrm>
+          <a:prstGeom prst="rect">
+            <a:avLst/>
+          </a:prstGeom>
+        </p:spPr>
+      </p:pic>
+    </p:spTree>
+    <p:extLst>
+      <p:ext uri="{BB962C8B-B14F-4D97-AF65-F5344CB8AC3E}">
+        <p14:creationId xmlns:p14="http://schemas.microsoft.com/office/powerpoint/2010/main" val="2010822840"/>
+      </p:ext>
+    </p:extLst>
+  </p:cSld>
+  <p:clrMapOvr>
+    <a:masterClrMapping/>
+  </p:clrMapOvr>
+  <p:timing>
+    <p:tnLst>
+      <p:par>
+        <p:cTn id="1" dur="indefinite" restart="never" nodeType="tmRoot">
+          <p:childTnLst>
+            <p:seq concurrent="1" nextAc="seek">
+              <p:cTn id="2" dur="indefinite" nodeType="mainSeq">
+                <p:childTnLst>
+                  <p:par>
+                    <p:cTn id="3" fill="hold">
+                      <p:stCondLst>
+                        <p:cond delay="indefinite"/>
+                      </p:stCondLst>
+                      <p:childTnLst>
+                        <p:par>
+                          <p:cTn id="4" fill="hold">
+                            <p:stCondLst>
+                              <p:cond delay="0"/>
+                            </p:stCondLst>
+                            <p:childTnLst>
+                              <p:par>
+                                <p:cTn id="5" presetID="1" presetClass="entr" presetSubtype="0" fill="hold" grpId="0" nodeType="clickEffect">
+                                  <p:stCondLst>
+                                    <p:cond delay="0"/>
+                                  </p:stCondLst>
+                                  <p:childTnLst>
+                                    <p:set>
+                                      <p:cBhvr>
+                                        <p:cTn id="6" dur="1" fill="hold">
+                                          <p:stCondLst>
+                                            <p:cond delay="0"/>
+                                          </p:stCondLst>
+                                        </p:cTn>
+                                        <p:tgtEl>
+                                          <p:spTgt spid="4">
+                                            <p:txEl>
+                                              <p:pRg st="0" end="0"/>
+                                            </p:txEl>
+                                          </p:spTgt>
+                                        </p:tgtEl>
+                                        <p:attrNameLst>
+                                          <p:attrName>style.visibility</p:attrName>
+                                        </p:attrNameLst>
+                                      </p:cBhvr>
+                                      <p:to>
+                                        <p:strVal val="visible"/>
+                                      </p:to>
+                                    </p:set>
+                                  </p:childTnLst>
+                                </p:cTn>
+                              </p:par>
+                            </p:childTnLst>
+                          </p:cTn>
+                        </p:par>
+                      </p:childTnLst>
+                    </p:cTn>
+                  </p:par>
+                  <p:par>
+                    <p:cTn id="7" fill="hold">
+                      <p:stCondLst>
+                        <p:cond delay="indefinite"/>
+                      </p:stCondLst>
+                      <p:childTnLst>
+                        <p:par>
+                          <p:cTn id="8" fill="hold">
+                            <p:stCondLst>
+                              <p:cond delay="0"/>
+                            </p:stCondLst>
+                            <p:childTnLst>
+                              <p:par>
+                                <p:cTn id="9" presetID="1" presetClass="entr" presetSubtype="0" fill="hold" grpId="0" nodeType="clickEffect">
+                                  <p:stCondLst>
+                                    <p:cond delay="0"/>
+                                  </p:stCondLst>
+                                  <p:childTnLst>
+                                    <p:set>
+                                      <p:cBhvr>
+                                        <p:cTn id="10" dur="1" fill="hold">
+                                          <p:stCondLst>
+                                            <p:cond delay="0"/>
+                                          </p:stCondLst>
+                                        </p:cTn>
+                                        <p:tgtEl>
+                                          <p:spTgt spid="4">
+                                            <p:txEl>
+                                              <p:pRg st="1" end="1"/>
+                                            </p:txEl>
+                                          </p:spTgt>
+                                        </p:tgtEl>
+                                        <p:attrNameLst>
+                                          <p:attrName>style.visibility</p:attrName>
+                                        </p:attrNameLst>
+                                      </p:cBhvr>
+                                      <p:to>
+                                        <p:strVal val="visible"/>
+                                      </p:to>
+                                    </p:set>
+                                  </p:childTnLst>
+                                </p:cTn>
+                              </p:par>
+                            </p:childTnLst>
+                          </p:cTn>
+                        </p:par>
+                      </p:childTnLst>
+                    </p:cTn>
+                  </p:par>
+                  <p:par>
+                    <p:cTn id="11" fill="hold">
+                      <p:stCondLst>
+                        <p:cond delay="indefinite"/>
+                      </p:stCondLst>
+                      <p:childTnLst>
+                        <p:par>
+                          <p:cTn id="12" fill="hold">
+                            <p:stCondLst>
+                              <p:cond delay="0"/>
+                            </p:stCondLst>
+                            <p:childTnLst>
+                              <p:par>
+                                <p:cTn id="13" presetID="1" presetClass="entr" presetSubtype="0" fill="hold" grpId="0" nodeType="clickEffect">
+                                  <p:stCondLst>
+                                    <p:cond delay="0"/>
+                                  </p:stCondLst>
+                                  <p:childTnLst>
+                                    <p:set>
+                                      <p:cBhvr>
+                                        <p:cTn id="14" dur="1" fill="hold">
+                                          <p:stCondLst>
+                                            <p:cond delay="0"/>
+                                          </p:stCondLst>
+                                        </p:cTn>
+                                        <p:tgtEl>
+                                          <p:spTgt spid="4">
+                                            <p:txEl>
+                                              <p:pRg st="2" end="2"/>
+                                            </p:txEl>
+                                          </p:spTgt>
+                                        </p:tgtEl>
+                                        <p:attrNameLst>
+                                          <p:attrName>style.visibility</p:attrName>
+                                        </p:attrNameLst>
+                                      </p:cBhvr>
+                                      <p:to>
+                                        <p:strVal val="visible"/>
+                                      </p:to>
+                                    </p:set>
+                                  </p:childTnLst>
+                                </p:cTn>
+                              </p:par>
+                            </p:childTnLst>
+                          </p:cTn>
+                        </p:par>
+                      </p:childTnLst>
+                    </p:cTn>
+                  </p:par>
+                  <p:par>
+                    <p:cTn id="15" fill="hold">
+                      <p:stCondLst>
+                        <p:cond delay="indefinite"/>
+                      </p:stCondLst>
+                      <p:childTnLst>
+                        <p:par>
+                          <p:cTn id="16" fill="hold">
+                            <p:stCondLst>
+                              <p:cond delay="0"/>
+                            </p:stCondLst>
+                            <p:childTnLst>
+                              <p:par>
+                                <p:cTn id="17" presetID="1" presetClass="entr" presetSubtype="0" fill="hold" grpId="0" nodeType="clickEffect">
+                                  <p:stCondLst>
+                                    <p:cond delay="0"/>
+                                  </p:stCondLst>
+                                  <p:childTnLst>
+                                    <p:set>
+                                      <p:cBhvr>
+                                        <p:cTn id="18" dur="1" fill="hold">
+                                          <p:stCondLst>
+                                            <p:cond delay="0"/>
+                                          </p:stCondLst>
+                                        </p:cTn>
+                                        <p:tgtEl>
+                                          <p:spTgt spid="4">
+                                            <p:txEl>
+                                              <p:pRg st="3" end="3"/>
+                                            </p:txEl>
+                                          </p:spTgt>
+                                        </p:tgtEl>
+                                        <p:attrNameLst>
+                                          <p:attrName>style.visibility</p:attrName>
+                                        </p:attrNameLst>
+                                      </p:cBhvr>
+                                      <p:to>
+                                        <p:strVal val="visible"/>
+                                      </p:to>
+                                    </p:set>
+                                  </p:childTnLst>
+                                </p:cTn>
+                              </p:par>
+                            </p:childTnLst>
+                          </p:cTn>
+                        </p:par>
+                      </p:childTnLst>
+                    </p:cTn>
+                  </p:par>
+                  <p:par>
+                    <p:cTn id="19" fill="hold">
+                      <p:stCondLst>
+                        <p:cond delay="indefinite"/>
+                      </p:stCondLst>
+                      <p:childTnLst>
+                        <p:par>
+                          <p:cTn id="20" fill="hold">
+                            <p:stCondLst>
+                              <p:cond delay="0"/>
+                            </p:stCondLst>
+                            <p:childTnLst>
+                              <p:par>
+                                <p:cTn id="21" presetID="1" presetClass="entr" presetSubtype="0" fill="hold" grpId="0" nodeType="clickEffect">
+                                  <p:stCondLst>
+                                    <p:cond delay="0"/>
+                                  </p:stCondLst>
+                                  <p:childTnLst>
+                                    <p:set>
+                                      <p:cBhvr>
+                                        <p:cTn id="22" dur="1" fill="hold">
+                                          <p:stCondLst>
+                                            <p:cond delay="0"/>
+                                          </p:stCondLst>
+                                        </p:cTn>
+                                        <p:tgtEl>
+                                          <p:spTgt spid="4">
+                                            <p:txEl>
+                                              <p:pRg st="4" end="4"/>
+                                            </p:txEl>
+                                          </p:spTgt>
+                                        </p:tgtEl>
+                                        <p:attrNameLst>
+                                          <p:attrName>style.visibility</p:attrName>
+                                        </p:attrNameLst>
+                                      </p:cBhvr>
+                                      <p:to>
+                                        <p:strVal val="visible"/>
+                                      </p:to>
+                                    </p:set>
+                                  </p:childTnLst>
+                                </p:cTn>
+                              </p:par>
+                            </p:childTnLst>
+                          </p:cTn>
+                        </p:par>
+                      </p:childTnLst>
+                    </p:cTn>
+                  </p:par>
+                  <p:par>
+                    <p:cTn id="23" fill="hold">
+                      <p:stCondLst>
+                        <p:cond delay="indefinite"/>
+                      </p:stCondLst>
+                      <p:childTnLst>
+                        <p:par>
+                          <p:cTn id="24" fill="hold">
+                            <p:stCondLst>
+                              <p:cond delay="0"/>
+                            </p:stCondLst>
+                            <p:childTnLst>
+                              <p:par>
+                                <p:cTn id="25" presetID="1" presetClass="entr" presetSubtype="0" fill="hold" grpId="0" nodeType="clickEffect">
+                                  <p:stCondLst>
+                                    <p:cond delay="0"/>
+                                  </p:stCondLst>
+                                  <p:childTnLst>
+                                    <p:set>
+                                      <p:cBhvr>
+                                        <p:cTn id="26" dur="1" fill="hold">
+                                          <p:stCondLst>
+                                            <p:cond delay="0"/>
+                                          </p:stCondLst>
+                                        </p:cTn>
+                                        <p:tgtEl>
+                                          <p:spTgt spid="4">
+                                            <p:txEl>
+                                              <p:pRg st="5" end="5"/>
+                                            </p:txEl>
+                                          </p:spTgt>
+                                        </p:tgtEl>
+                                        <p:attrNameLst>
+                                          <p:attrName>style.visibility</p:attrName>
+                                        </p:attrNameLst>
+                                      </p:cBhvr>
+                                      <p:to>
+                                        <p:strVal val="visible"/>
+                                      </p:to>
+                                    </p:set>
+                                  </p:childTnLst>
+                                </p:cTn>
+                              </p:par>
+                            </p:childTnLst>
+                          </p:cTn>
+                        </p:par>
+                      </p:childTnLst>
+                    </p:cTn>
+                  </p:par>
+                </p:childTnLst>
+              </p:cTn>
+              <p:prevCondLst>
+                <p:cond evt="onPrev" delay="0">
+                  <p:tgtEl>
+                    <p:sldTgt/>
+                  </p:tgtEl>
+                </p:cond>
+              </p:prevCondLst>
+              <p:nextCondLst>
+                <p:cond evt="onNext" delay="0">
+                  <p:tgtEl>
+                    <p:sldTgt/>
+                  </p:tgtEl>
+                </p:cond>
+              </p:nextCondLst>
+            </p:seq>
+          </p:childTnLst>
+        </p:cTn>
+      </p:par>
+    </p:tnLst>
+    <p:bldLst>
+      <p:bldP spid="4" grpId="0" build="p"/>
+    </p:bldLst>
+  </p:timing>
+</p:sld>
+</file>
+
+<file path=ppt/slides/slide11.xml><?xml version="1.0" encoding="utf-8"?>
+<p:sld xmlns:a="http://schemas.openxmlformats.org/drawingml/2006/main" xmlns:r="http://schemas.openxmlformats.org/officeDocument/2006/relationships" xmlns:p="http://schemas.openxmlformats.org/presentationml/2006/main">
+  <p:cSld>
+    <p:spTree>
+      <p:nvGrpSpPr>
+        <p:cNvPr id="1" name="">
+          <a:extLst>
+            <a:ext uri="{FF2B5EF4-FFF2-40B4-BE49-F238E27FC236}">
               <a16:creationId xmlns:a16="http://schemas.microsoft.com/office/drawing/2014/main" id="{DD616761-7955-ADA3-105C-B6EAC4E460FA}"/>
             </a:ext>
           </a:extLst>
@@ -5209,7 +5915,7 @@
             <a:fld id="{EA7C8D44-3667-46F6-9772-CC52308E2A7F}" type="slidenum">
               <a:rPr kumimoji="0" lang="en-US" smtClean="0"/>
               <a:pPr/>
-              <a:t>10</a:t>
+              <a:t>11</a:t>
             </a:fld>
             <a:endParaRPr kumimoji="0" lang="en-US" dirty="0"/>
           </a:p>
@@ -5239,31 +5945,13 @@
         </p:spPr>
         <p:txBody>
           <a:bodyPr>
-            <a:normAutofit fontScale="70000" lnSpcReduction="20000"/>
+            <a:normAutofit fontScale="92500" lnSpcReduction="10000"/>
           </a:bodyPr>
           <a:lstStyle/>
           <a:p>
             <a:r>
               <a:rPr lang="en-US" altLang="zh-CN" dirty="0"/>
-              <a:t>Q3.  Assume that at time t=0,  A sends a packet to C.  At t=0.5 seconds, </a:t>
-            </a:r>
-            <a:r>
-              <a:rPr lang="en-US" altLang="zh-CN" dirty="0">
-                <a:solidFill>
-                  <a:srgbClr val="C00000"/>
-                </a:solidFill>
-              </a:rPr>
-              <a:t>the link between R4 and R5 goes down</a:t>
-            </a:r>
-            <a:r>
-              <a:rPr lang="en-US" altLang="zh-CN" dirty="0"/>
-              <a:t>, and R4 and R5 instantaneously recognize and recompute their routes.  Assume that LSAs are processed and propagated instantaneously.  A link’s propagation delay is equal to the link costs in the diagram (in seconds), i.e. R1 - R2 has a 1-second delay).  You can ignore all processing and queuing delays. Does the packet reach its destination? If so, write down the route the packet from A to C takes.</a:t>
-            </a:r>
-          </a:p>
-          <a:p>
-            <a:r>
-              <a:rPr lang="en-US" altLang="zh-CN" dirty="0"/>
-              <a:t>ANS:  </a:t>
+              <a:t>Q3.  ANS:  </a:t>
             </a:r>
             <a:r>
               <a:rPr lang="pt-BR" altLang="zh-CN" dirty="0"/>
@@ -5329,7 +6017,7 @@
 </p:sld>
 </file>
 
-<file path=ppt/slides/slide11.xml><?xml version="1.0" encoding="utf-8"?>
+<file path=ppt/slides/slide12.xml><?xml version="1.0" encoding="utf-8"?>
 <p:sld xmlns:a="http://schemas.openxmlformats.org/drawingml/2006/main" xmlns:r="http://schemas.openxmlformats.org/officeDocument/2006/relationships" xmlns:p="http://schemas.openxmlformats.org/presentationml/2006/main">
   <p:cSld>
     <p:spTree>
@@ -5405,7 +6093,7 @@
             <a:fld id="{EA7C8D44-3667-46F6-9772-CC52308E2A7F}" type="slidenum">
               <a:rPr kumimoji="0" lang="en-US" smtClean="0"/>
               <a:pPr/>
-              <a:t>11</a:t>
+              <a:t>12</a:t>
             </a:fld>
             <a:endParaRPr kumimoji="0" lang="en-US" dirty="0"/>
           </a:p>
@@ -5444,7 +6132,7 @@
           <a:p>
             <a:r>
               <a:rPr lang="en-US" altLang="zh-CN" sz="1400" dirty="0"/>
-              <a:t>Q3. in detail. Assume that at time t=0,  A sends a packet to C.  At t=0.5 seconds, </a:t>
+              <a:t>Q3. in detail. Assume that A sends a packet to C, and at</a:t>
             </a:r>
             <a:r>
               <a:rPr lang="en-US" altLang="zh-CN" sz="1400" dirty="0">
@@ -5452,11 +6140,23 @@
                   <a:srgbClr val="C00000"/>
                 </a:solidFill>
               </a:rPr>
-              <a:t>the link between R4 and R5 goes down</a:t>
+              <a:t> time t=0, it arrives at R1</a:t>
             </a:r>
             <a:r>
               <a:rPr lang="en-US" altLang="zh-CN" sz="1400" dirty="0"/>
-              <a:t>, and R4 and R5 instantaneously recognize and recompute their routes. </a:t>
+              <a:t>. At </a:t>
+            </a:r>
+            <a:r>
+              <a:rPr lang="en-US" altLang="zh-CN" sz="1400" dirty="0">
+                <a:solidFill>
+                  <a:srgbClr val="C00000"/>
+                </a:solidFill>
+              </a:rPr>
+              <a:t>t=0.5s</a:t>
+            </a:r>
+            <a:r>
+              <a:rPr lang="en-US" altLang="zh-CN" sz="1400" dirty="0"/>
+              <a:t>, the link between R4 and R5 goes down.</a:t>
             </a:r>
           </a:p>
           <a:p>
@@ -5478,7 +6178,7 @@
           <a:p>
             <a:r>
               <a:rPr lang="en-US" altLang="zh-CN" sz="1400" dirty="0"/>
-              <a:t>t = 0.0s. Host A sends the packet toward Host C. The packet arrives at R1, and R1 forwards it to R2. The propagation delay for the R1-R2 link is 1 second.</a:t>
+              <a:t>t = 0.0s.  Packet from host A toward Host C arrives at R1, and R1 forwards it to R2. The propagation delay for the R1-R2 link is 1 second.</a:t>
             </a:r>
           </a:p>
           <a:p>
@@ -5490,7 +6190,7 @@
           <a:p>
             <a:r>
               <a:rPr lang="en-US" altLang="zh-CN" sz="1400" dirty="0"/>
-              <a:t>t = 1.0s. Packet Location: Arrives at R2. LSA Status: The failure LSA from R4 has not yet reached R2 because it has only been propagating for 0.5 seconds, and the delay (cost) from R4 to R2 is longer than that. Action: Because R2 is unaware of the broken link, its routing table still indicates that the shortest path to C is via R3. R2 forwards the packet to R3. The delay for the R2-R3 link is 2 seconds.</a:t>
+              <a:t>t = 1.0s. Packet arrives at R2. LSA Status: The failure LSA from R4 has not yet reached R2 because it has only been propagating for 0.5 seconds, and the delay (cost) from R4 to R2 is longer than that. Action: Because R2 is unaware of the broken link, its routing table still indicates that the shortest path to C is via R3. R2 forwards the packet to R3. The delay for the R2-R3 link is 2 seconds.</a:t>
             </a:r>
           </a:p>
           <a:p>
@@ -5502,7 +6202,19 @@
           <a:p>
             <a:r>
               <a:rPr lang="en-US" altLang="zh-CN" sz="1400" dirty="0"/>
-              <a:t>t = 3.0s. Packet Location: Arrives at R3. LSA Status: By this time, the LSA originating from R4 has successfully arrived at R3 (at time 2.5s). R3 processes it instantaneously and updates its routing table. Action: R3 recalculates its shortest path to C because it now knows the R4-R5 link is down. The new shortest path routes back through R2 (R3</a:t>
+              <a:t>t = 3.0s. Packet arrives at R3. LSA Status: By this time, </a:t>
+            </a:r>
+            <a:r>
+              <a:rPr lang="en-US" altLang="zh-CN" sz="1400" dirty="0">
+                <a:solidFill>
+                  <a:srgbClr val="C00000"/>
+                </a:solidFill>
+              </a:rPr>
+              <a:t>the LSA from R4 reaches R3 at time 2.5s</a:t>
+            </a:r>
+            <a:r>
+              <a:rPr lang="en-US" altLang="zh-CN" sz="1400" dirty="0"/>
+              <a:t>. R3 processes it instantaneously and updates its routing table.  Action: R3 recalculates its shortest path to C because it now knows the R4-R5 link is down. The new shortest path routes back through R2 (R3</a:t>
             </a:r>
             <a:r>
               <a:rPr lang="pt-BR" altLang="zh-CN" sz="1400" dirty="0"/>
@@ -5534,7 +6246,7 @@
           <a:p>
             <a:r>
               <a:rPr lang="en-US" altLang="zh-CN" sz="1400" dirty="0"/>
-              <a:t>t = 5.0s. Packet Location: Arrives back at R2. LSA Status: R2 is now fully aware of the R4-R5 link failure. Action: R2 recalculates its next-best path to C. With the old route invalidated, R2 determines the new optimal route is via R6 (</a:t>
+              <a:t>t = 5.0s. Packet arrives back at R2. LSA Status: R2 is now fully aware of the R4-R5 link failure. Action: R2 recalculates its next-best path to C. With the old route invalidated, R2 determines the new optimal route is via R6 (</a:t>
             </a:r>
             <a:r>
               <a:rPr lang="pt-BR" altLang="zh-CN" sz="1400" dirty="0"/>
@@ -5575,7 +6287,7 @@
         </p:blipFill>
         <p:spPr>
           <a:xfrm>
-            <a:off x="7467599" y="1752601"/>
+            <a:off x="7391399" y="135802"/>
             <a:ext cx="4645631" cy="2430625"/>
           </a:xfrm>
           <a:prstGeom prst="rect">
@@ -5583,6 +6295,590 @@
           </a:prstGeom>
         </p:spPr>
       </p:pic>
+      <p:graphicFrame>
+        <p:nvGraphicFramePr>
+          <p:cNvPr id="6" name="Table 5">
+            <a:extLst>
+              <a:ext uri="{FF2B5EF4-FFF2-40B4-BE49-F238E27FC236}">
+                <a16:creationId xmlns:a16="http://schemas.microsoft.com/office/drawing/2014/main" id="{543D12B9-B3E7-175A-A2F1-7AF5F497DBA5}"/>
+              </a:ext>
+            </a:extLst>
+          </p:cNvPr>
+          <p:cNvGraphicFramePr>
+            <a:graphicFrameLocks noGrp="1"/>
+          </p:cNvGraphicFramePr>
+          <p:nvPr>
+            <p:extLst>
+              <p:ext uri="{D42A27DB-BD31-4B8C-83A1-F6EECF244321}">
+                <p14:modId xmlns:p14="http://schemas.microsoft.com/office/powerpoint/2010/main" val="2005901178"/>
+              </p:ext>
+            </p:extLst>
+          </p:nvPr>
+        </p:nvGraphicFramePr>
+        <p:xfrm>
+          <a:off x="8305800" y="2589815"/>
+          <a:ext cx="2594572" cy="4206240"/>
+        </p:xfrm>
+        <a:graphic>
+          <a:graphicData uri="http://schemas.openxmlformats.org/drawingml/2006/table">
+            <a:tbl>
+              <a:tblPr firstRow="1" bandRow="1">
+                <a:tableStyleId>{5940675A-B579-460E-94D1-54222C63F5DA}</a:tableStyleId>
+              </a:tblPr>
+              <a:tblGrid>
+                <a:gridCol w="493676">
+                  <a:extLst>
+                    <a:ext uri="{9D8B030D-6E8A-4147-A177-3AD203B41FA5}">
+                      <a16:colId xmlns:a16="http://schemas.microsoft.com/office/drawing/2014/main" val="3073761005"/>
+                    </a:ext>
+                  </a:extLst>
+                </a:gridCol>
+                <a:gridCol w="2100896">
+                  <a:extLst>
+                    <a:ext uri="{9D8B030D-6E8A-4147-A177-3AD203B41FA5}">
+                      <a16:colId xmlns:a16="http://schemas.microsoft.com/office/drawing/2014/main" val="1818550232"/>
+                    </a:ext>
+                  </a:extLst>
+                </a:gridCol>
+              </a:tblGrid>
+              <a:tr h="296308">
+                <a:tc>
+                  <a:txBody>
+                    <a:bodyPr/>
+                    <a:lstStyle/>
+                    <a:p>
+                      <a:pPr algn="ctr"/>
+                      <a:r>
+                        <a:rPr lang="en-US" altLang="zh-CN" sz="1400" b="1" dirty="0"/>
+                        <a:t>t (s)</a:t>
+                      </a:r>
+                      <a:endParaRPr lang="zh-CN" altLang="en-US" sz="1400" b="1" dirty="0"/>
+                    </a:p>
+                  </a:txBody>
+                  <a:tcPr/>
+                </a:tc>
+                <a:tc>
+                  <a:txBody>
+                    <a:bodyPr/>
+                    <a:lstStyle/>
+                    <a:p>
+                      <a:pPr algn="ctr"/>
+                      <a:r>
+                        <a:rPr lang="en-US" altLang="zh-CN" sz="1400" b="1" dirty="0"/>
+                        <a:t>Event</a:t>
+                      </a:r>
+                      <a:endParaRPr lang="zh-CN" altLang="en-US" sz="1400" b="1" dirty="0"/>
+                    </a:p>
+                  </a:txBody>
+                  <a:tcPr/>
+                </a:tc>
+                <a:extLst>
+                  <a:ext uri="{0D108BD9-81ED-4DB2-BD59-A6C34878D82A}">
+                    <a16:rowId xmlns:a16="http://schemas.microsoft.com/office/drawing/2014/main" val="3899441003"/>
+                  </a:ext>
+                </a:extLst>
+              </a:tr>
+              <a:tr h="289520">
+                <a:tc>
+                  <a:txBody>
+                    <a:bodyPr/>
+                    <a:lstStyle/>
+                    <a:p>
+                      <a:pPr algn="ctr"/>
+                      <a:r>
+                        <a:rPr lang="en-US" altLang="zh-CN" sz="1400" dirty="0"/>
+                        <a:t>0</a:t>
+                      </a:r>
+                      <a:endParaRPr lang="zh-CN" altLang="en-US" sz="1400" dirty="0"/>
+                    </a:p>
+                  </a:txBody>
+                  <a:tcPr/>
+                </a:tc>
+                <a:tc>
+                  <a:txBody>
+                    <a:bodyPr/>
+                    <a:lstStyle/>
+                    <a:p>
+                      <a:pPr algn="ctr"/>
+                      <a:r>
+                        <a:rPr lang="nl-NL" altLang="zh-CN" sz="1400" dirty="0"/>
+                        <a:t>Packet arrives at R1 </a:t>
+                      </a:r>
+                      <a:endParaRPr lang="zh-CN" altLang="en-US" sz="1400" dirty="0"/>
+                    </a:p>
+                  </a:txBody>
+                  <a:tcPr/>
+                </a:tc>
+                <a:extLst>
+                  <a:ext uri="{0D108BD9-81ED-4DB2-BD59-A6C34878D82A}">
+                    <a16:rowId xmlns:a16="http://schemas.microsoft.com/office/drawing/2014/main" val="2806193906"/>
+                  </a:ext>
+                </a:extLst>
+              </a:tr>
+              <a:tr h="289520">
+                <a:tc>
+                  <a:txBody>
+                    <a:bodyPr/>
+                    <a:lstStyle/>
+                    <a:p>
+                      <a:pPr algn="ctr"/>
+                      <a:r>
+                        <a:rPr lang="en-US" altLang="zh-CN" sz="1400" dirty="0"/>
+                        <a:t>0.5</a:t>
+                      </a:r>
+                      <a:endParaRPr lang="zh-CN" altLang="en-US" sz="1400" dirty="0"/>
+                    </a:p>
+                  </a:txBody>
+                  <a:tcPr/>
+                </a:tc>
+                <a:tc>
+                  <a:txBody>
+                    <a:bodyPr/>
+                    <a:lstStyle/>
+                    <a:p>
+                      <a:pPr algn="ctr"/>
+                      <a:r>
+                        <a:rPr lang="nl-NL" altLang="zh-CN" sz="1400" dirty="0"/>
+                        <a:t>R4-R5 link breaks</a:t>
+                      </a:r>
+                      <a:endParaRPr lang="zh-CN" altLang="en-US" sz="1400" dirty="0"/>
+                    </a:p>
+                  </a:txBody>
+                  <a:tcPr/>
+                </a:tc>
+                <a:extLst>
+                  <a:ext uri="{0D108BD9-81ED-4DB2-BD59-A6C34878D82A}">
+                    <a16:rowId xmlns:a16="http://schemas.microsoft.com/office/drawing/2014/main" val="2713977589"/>
+                  </a:ext>
+                </a:extLst>
+              </a:tr>
+              <a:tr h="289520">
+                <a:tc>
+                  <a:txBody>
+                    <a:bodyPr/>
+                    <a:lstStyle/>
+                    <a:p>
+                      <a:pPr algn="ctr"/>
+                      <a:r>
+                        <a:rPr lang="en-US" altLang="zh-CN" sz="1400" dirty="0"/>
+                        <a:t>1</a:t>
+                      </a:r>
+                      <a:endParaRPr lang="zh-CN" altLang="en-US" sz="1400" dirty="0"/>
+                    </a:p>
+                  </a:txBody>
+                  <a:tcPr/>
+                </a:tc>
+                <a:tc>
+                  <a:txBody>
+                    <a:bodyPr/>
+                    <a:lstStyle/>
+                    <a:p>
+                      <a:pPr marL="0" marR="0" lvl="0" indent="0" algn="ctr" defTabSz="914400" rtl="0" eaLnBrk="1" fontAlgn="auto" latinLnBrk="0" hangingPunct="1">
+                        <a:lnSpc>
+                          <a:spcPct val="100000"/>
+                        </a:lnSpc>
+                        <a:spcBef>
+                          <a:spcPts val="0"/>
+                        </a:spcBef>
+                        <a:spcAft>
+                          <a:spcPts val="0"/>
+                        </a:spcAft>
+                        <a:buClrTx/>
+                        <a:buSzTx/>
+                        <a:buFontTx/>
+                        <a:buNone/>
+                        <a:tabLst/>
+                        <a:defRPr/>
+                      </a:pPr>
+                      <a:r>
+                        <a:rPr lang="nl-NL" altLang="zh-CN" sz="1400" dirty="0"/>
+                        <a:t>Packet arrives at R2</a:t>
+                      </a:r>
+                      <a:endParaRPr lang="zh-CN" altLang="en-US" sz="1400" dirty="0"/>
+                    </a:p>
+                  </a:txBody>
+                  <a:tcPr/>
+                </a:tc>
+                <a:extLst>
+                  <a:ext uri="{0D108BD9-81ED-4DB2-BD59-A6C34878D82A}">
+                    <a16:rowId xmlns:a16="http://schemas.microsoft.com/office/drawing/2014/main" val="983516058"/>
+                  </a:ext>
+                </a:extLst>
+              </a:tr>
+              <a:tr h="289520">
+                <a:tc>
+                  <a:txBody>
+                    <a:bodyPr/>
+                    <a:lstStyle/>
+                    <a:p>
+                      <a:pPr algn="ctr"/>
+                      <a:r>
+                        <a:rPr lang="en-US" altLang="zh-CN" sz="1400" dirty="0"/>
+                        <a:t>2.5</a:t>
+                      </a:r>
+                      <a:endParaRPr lang="zh-CN" altLang="en-US" sz="1400" dirty="0"/>
+                    </a:p>
+                  </a:txBody>
+                  <a:tcPr/>
+                </a:tc>
+                <a:tc>
+                  <a:txBody>
+                    <a:bodyPr/>
+                    <a:lstStyle/>
+                    <a:p>
+                      <a:pPr marL="0" marR="0" lvl="0" indent="0" algn="ctr" defTabSz="914400" rtl="0" eaLnBrk="1" fontAlgn="auto" latinLnBrk="0" hangingPunct="1">
+                        <a:lnSpc>
+                          <a:spcPct val="100000"/>
+                        </a:lnSpc>
+                        <a:spcBef>
+                          <a:spcPts val="0"/>
+                        </a:spcBef>
+                        <a:spcAft>
+                          <a:spcPts val="0"/>
+                        </a:spcAft>
+                        <a:buClrTx/>
+                        <a:buSzTx/>
+                        <a:buFontTx/>
+                        <a:buNone/>
+                        <a:tabLst/>
+                        <a:defRPr/>
+                      </a:pPr>
+                      <a:r>
+                        <a:rPr lang="en-US" altLang="zh-CN" sz="1400" dirty="0"/>
+                        <a:t>LSA from R4 arrives at R3. R3 reconfigures its route to C as R3</a:t>
+                      </a:r>
+                      <a:r>
+                        <a:rPr lang="pt-BR" altLang="zh-CN" sz="1400" dirty="0"/>
+                        <a:t>-R2-R6-R5-C</a:t>
+                      </a:r>
+                      <a:endParaRPr lang="zh-CN" altLang="en-US" sz="1400" dirty="0"/>
+                    </a:p>
+                  </a:txBody>
+                  <a:tcPr/>
+                </a:tc>
+                <a:extLst>
+                  <a:ext uri="{0D108BD9-81ED-4DB2-BD59-A6C34878D82A}">
+                    <a16:rowId xmlns:a16="http://schemas.microsoft.com/office/drawing/2014/main" val="1236498457"/>
+                  </a:ext>
+                </a:extLst>
+              </a:tr>
+              <a:tr h="289520">
+                <a:tc>
+                  <a:txBody>
+                    <a:bodyPr/>
+                    <a:lstStyle/>
+                    <a:p>
+                      <a:pPr algn="ctr"/>
+                      <a:r>
+                        <a:rPr lang="en-US" altLang="zh-CN" sz="1400" dirty="0"/>
+                        <a:t>3</a:t>
+                      </a:r>
+                      <a:endParaRPr lang="zh-CN" altLang="en-US" sz="1400" dirty="0"/>
+                    </a:p>
+                  </a:txBody>
+                  <a:tcPr/>
+                </a:tc>
+                <a:tc>
+                  <a:txBody>
+                    <a:bodyPr/>
+                    <a:lstStyle/>
+                    <a:p>
+                      <a:pPr marL="0" marR="0" lvl="0" indent="0" algn="ctr" defTabSz="914400" rtl="0" eaLnBrk="1" fontAlgn="auto" latinLnBrk="0" hangingPunct="1">
+                        <a:lnSpc>
+                          <a:spcPct val="100000"/>
+                        </a:lnSpc>
+                        <a:spcBef>
+                          <a:spcPts val="0"/>
+                        </a:spcBef>
+                        <a:spcAft>
+                          <a:spcPts val="0"/>
+                        </a:spcAft>
+                        <a:buClrTx/>
+                        <a:buSzTx/>
+                        <a:buFontTx/>
+                        <a:buNone/>
+                        <a:tabLst/>
+                        <a:defRPr/>
+                      </a:pPr>
+                      <a:r>
+                        <a:rPr lang="nl-NL" altLang="zh-CN" sz="1400" dirty="0"/>
+                        <a:t>Packet arrives at R3</a:t>
+                      </a:r>
+                      <a:endParaRPr lang="zh-CN" altLang="en-US" sz="1400" dirty="0"/>
+                    </a:p>
+                  </a:txBody>
+                  <a:tcPr/>
+                </a:tc>
+                <a:extLst>
+                  <a:ext uri="{0D108BD9-81ED-4DB2-BD59-A6C34878D82A}">
+                    <a16:rowId xmlns:a16="http://schemas.microsoft.com/office/drawing/2014/main" val="3215007626"/>
+                  </a:ext>
+                </a:extLst>
+              </a:tr>
+              <a:tr h="296308">
+                <a:tc>
+                  <a:txBody>
+                    <a:bodyPr/>
+                    <a:lstStyle/>
+                    <a:p>
+                      <a:pPr algn="ctr"/>
+                      <a:r>
+                        <a:rPr lang="en-US" altLang="zh-CN" sz="1400" dirty="0"/>
+                        <a:t>4.5</a:t>
+                      </a:r>
+                      <a:endParaRPr lang="zh-CN" altLang="en-US" sz="1400" dirty="0"/>
+                    </a:p>
+                  </a:txBody>
+                  <a:tcPr/>
+                </a:tc>
+                <a:tc>
+                  <a:txBody>
+                    <a:bodyPr/>
+                    <a:lstStyle/>
+                    <a:p>
+                      <a:pPr algn="ctr"/>
+                      <a:r>
+                        <a:rPr lang="en-US" altLang="zh-CN" sz="1400" dirty="0"/>
+                        <a:t>LSA from R4 arrives at R2.</a:t>
+                      </a:r>
+                    </a:p>
+                    <a:p>
+                      <a:pPr algn="ctr"/>
+                      <a:r>
+                        <a:rPr lang="en-US" altLang="zh-CN" sz="1400" dirty="0"/>
+                        <a:t>R2 reconfigures its route to C as </a:t>
+                      </a:r>
+                      <a:r>
+                        <a:rPr lang="pt-BR" altLang="zh-CN" sz="1400" dirty="0"/>
+                        <a:t>R2-R6-R5-C</a:t>
+                      </a:r>
+                      <a:endParaRPr lang="zh-CN" altLang="en-US" sz="1400" dirty="0"/>
+                    </a:p>
+                  </a:txBody>
+                  <a:tcPr/>
+                </a:tc>
+                <a:extLst>
+                  <a:ext uri="{0D108BD9-81ED-4DB2-BD59-A6C34878D82A}">
+                    <a16:rowId xmlns:a16="http://schemas.microsoft.com/office/drawing/2014/main" val="3226813234"/>
+                  </a:ext>
+                </a:extLst>
+              </a:tr>
+              <a:tr h="296308">
+                <a:tc>
+                  <a:txBody>
+                    <a:bodyPr/>
+                    <a:lstStyle/>
+                    <a:p>
+                      <a:pPr algn="ctr"/>
+                      <a:r>
+                        <a:rPr lang="en-US" altLang="zh-CN" sz="1400" dirty="0"/>
+                        <a:t>5</a:t>
+                      </a:r>
+                      <a:endParaRPr lang="zh-CN" altLang="en-US" sz="1400" dirty="0"/>
+                    </a:p>
+                  </a:txBody>
+                  <a:tcPr/>
+                </a:tc>
+                <a:tc>
+                  <a:txBody>
+                    <a:bodyPr/>
+                    <a:lstStyle/>
+                    <a:p>
+                      <a:pPr marL="0" marR="0" lvl="0" indent="0" algn="ctr" defTabSz="914400" rtl="0" eaLnBrk="1" fontAlgn="auto" latinLnBrk="0" hangingPunct="1">
+                        <a:lnSpc>
+                          <a:spcPct val="100000"/>
+                        </a:lnSpc>
+                        <a:spcBef>
+                          <a:spcPts val="0"/>
+                        </a:spcBef>
+                        <a:spcAft>
+                          <a:spcPts val="0"/>
+                        </a:spcAft>
+                        <a:buClrTx/>
+                        <a:buSzTx/>
+                        <a:buFontTx/>
+                        <a:buNone/>
+                        <a:tabLst/>
+                        <a:defRPr/>
+                      </a:pPr>
+                      <a:r>
+                        <a:rPr lang="nl-NL" altLang="zh-CN" sz="1400" dirty="0"/>
+                        <a:t>Packet arrives at R2</a:t>
+                      </a:r>
+                      <a:endParaRPr lang="zh-CN" altLang="en-US" sz="1400" dirty="0"/>
+                    </a:p>
+                  </a:txBody>
+                  <a:tcPr/>
+                </a:tc>
+                <a:extLst>
+                  <a:ext uri="{0D108BD9-81ED-4DB2-BD59-A6C34878D82A}">
+                    <a16:rowId xmlns:a16="http://schemas.microsoft.com/office/drawing/2014/main" val="3652912180"/>
+                  </a:ext>
+                </a:extLst>
+              </a:tr>
+              <a:tr h="296308">
+                <a:tc>
+                  <a:txBody>
+                    <a:bodyPr/>
+                    <a:lstStyle/>
+                    <a:p>
+                      <a:pPr algn="ctr"/>
+                      <a:r>
+                        <a:rPr lang="en-US" altLang="zh-CN" sz="1400" dirty="0"/>
+                        <a:t>7</a:t>
+                      </a:r>
+                      <a:endParaRPr lang="zh-CN" altLang="en-US" sz="1400" dirty="0"/>
+                    </a:p>
+                  </a:txBody>
+                  <a:tcPr/>
+                </a:tc>
+                <a:tc>
+                  <a:txBody>
+                    <a:bodyPr/>
+                    <a:lstStyle/>
+                    <a:p>
+                      <a:pPr marL="0" marR="0" lvl="0" indent="0" algn="ctr" defTabSz="914400" rtl="0" eaLnBrk="1" fontAlgn="auto" latinLnBrk="0" hangingPunct="1">
+                        <a:lnSpc>
+                          <a:spcPct val="100000"/>
+                        </a:lnSpc>
+                        <a:spcBef>
+                          <a:spcPts val="0"/>
+                        </a:spcBef>
+                        <a:spcAft>
+                          <a:spcPts val="0"/>
+                        </a:spcAft>
+                        <a:buClrTx/>
+                        <a:buSzTx/>
+                        <a:buFontTx/>
+                        <a:buNone/>
+                        <a:tabLst/>
+                        <a:defRPr/>
+                      </a:pPr>
+                      <a:r>
+                        <a:rPr lang="nl-NL" altLang="zh-CN" sz="1400" dirty="0"/>
+                        <a:t>Packet arrives at R6</a:t>
+                      </a:r>
+                      <a:endParaRPr lang="zh-CN" altLang="en-US" sz="1400" dirty="0"/>
+                    </a:p>
+                  </a:txBody>
+                  <a:tcPr/>
+                </a:tc>
+                <a:extLst>
+                  <a:ext uri="{0D108BD9-81ED-4DB2-BD59-A6C34878D82A}">
+                    <a16:rowId xmlns:a16="http://schemas.microsoft.com/office/drawing/2014/main" val="2609314645"/>
+                  </a:ext>
+                </a:extLst>
+              </a:tr>
+              <a:tr h="296308">
+                <a:tc>
+                  <a:txBody>
+                    <a:bodyPr/>
+                    <a:lstStyle/>
+                    <a:p>
+                      <a:pPr algn="ctr"/>
+                      <a:r>
+                        <a:rPr lang="en-US" altLang="zh-CN" sz="1400" dirty="0"/>
+                        <a:t>15</a:t>
+                      </a:r>
+                      <a:endParaRPr lang="zh-CN" altLang="en-US" sz="1400" dirty="0"/>
+                    </a:p>
+                  </a:txBody>
+                  <a:tcPr/>
+                </a:tc>
+                <a:tc>
+                  <a:txBody>
+                    <a:bodyPr/>
+                    <a:lstStyle/>
+                    <a:p>
+                      <a:pPr marL="0" marR="0" lvl="0" indent="0" algn="ctr" defTabSz="914400" rtl="0" eaLnBrk="1" fontAlgn="auto" latinLnBrk="0" hangingPunct="1">
+                        <a:lnSpc>
+                          <a:spcPct val="100000"/>
+                        </a:lnSpc>
+                        <a:spcBef>
+                          <a:spcPts val="0"/>
+                        </a:spcBef>
+                        <a:spcAft>
+                          <a:spcPts val="0"/>
+                        </a:spcAft>
+                        <a:buClrTx/>
+                        <a:buSzTx/>
+                        <a:buFontTx/>
+                        <a:buNone/>
+                        <a:tabLst/>
+                        <a:defRPr/>
+                      </a:pPr>
+                      <a:r>
+                        <a:rPr lang="nl-NL" altLang="zh-CN" sz="1400" dirty="0"/>
+                        <a:t>Packet arrives at R5</a:t>
+                      </a:r>
+                      <a:endParaRPr lang="zh-CN" altLang="en-US" sz="1400" dirty="0"/>
+                    </a:p>
+                  </a:txBody>
+                  <a:tcPr/>
+                </a:tc>
+                <a:extLst>
+                  <a:ext uri="{0D108BD9-81ED-4DB2-BD59-A6C34878D82A}">
+                    <a16:rowId xmlns:a16="http://schemas.microsoft.com/office/drawing/2014/main" val="3615509973"/>
+                  </a:ext>
+                </a:extLst>
+              </a:tr>
+              <a:tr h="296308">
+                <a:tc>
+                  <a:txBody>
+                    <a:bodyPr/>
+                    <a:lstStyle/>
+                    <a:p>
+                      <a:pPr algn="ctr"/>
+                      <a:r>
+                        <a:rPr lang="en-US" altLang="zh-CN" sz="1400" dirty="0"/>
+                        <a:t>20</a:t>
+                      </a:r>
+                      <a:endParaRPr lang="zh-CN" altLang="en-US" sz="1400" dirty="0"/>
+                    </a:p>
+                  </a:txBody>
+                  <a:tcPr/>
+                </a:tc>
+                <a:tc>
+                  <a:txBody>
+                    <a:bodyPr/>
+                    <a:lstStyle/>
+                    <a:p>
+                      <a:pPr marL="0" marR="0" lvl="0" indent="0" algn="ctr" defTabSz="914400" rtl="0" eaLnBrk="1" fontAlgn="auto" latinLnBrk="0" hangingPunct="1">
+                        <a:lnSpc>
+                          <a:spcPct val="100000"/>
+                        </a:lnSpc>
+                        <a:spcBef>
+                          <a:spcPts val="0"/>
+                        </a:spcBef>
+                        <a:spcAft>
+                          <a:spcPts val="0"/>
+                        </a:spcAft>
+                        <a:buClrTx/>
+                        <a:buSzTx/>
+                        <a:buFontTx/>
+                        <a:buNone/>
+                        <a:tabLst/>
+                        <a:defRPr/>
+                      </a:pPr>
+                      <a:r>
+                        <a:rPr lang="nl-NL" altLang="zh-CN" sz="1400" dirty="0"/>
+                        <a:t>Packet arrives at C</a:t>
+                      </a:r>
+                      <a:endParaRPr lang="zh-CN" altLang="en-US" sz="1400" dirty="0"/>
+                    </a:p>
+                  </a:txBody>
+                  <a:tcPr/>
+                </a:tc>
+                <a:extLst>
+                  <a:ext uri="{0D108BD9-81ED-4DB2-BD59-A6C34878D82A}">
+                    <a16:rowId xmlns:a16="http://schemas.microsoft.com/office/drawing/2014/main" val="124958879"/>
+                  </a:ext>
+                </a:extLst>
+              </a:tr>
+            </a:tbl>
+          </a:graphicData>
+        </a:graphic>
+      </p:graphicFrame>
     </p:spTree>
     <p:extLst>
       <p:ext uri="{BB962C8B-B14F-4D97-AF65-F5344CB8AC3E}">
@@ -5596,7 +6892,7 @@
 </p:sld>
 </file>
 
-<file path=ppt/slides/slide12.xml><?xml version="1.0" encoding="utf-8"?>
+<file path=ppt/slides/slide13.xml><?xml version="1.0" encoding="utf-8"?>
 <p:sld xmlns:a="http://schemas.openxmlformats.org/drawingml/2006/main" xmlns:r="http://schemas.openxmlformats.org/officeDocument/2006/relationships" xmlns:p="http://schemas.openxmlformats.org/presentationml/2006/main">
   <p:cSld>
     <p:spTree>
@@ -5672,7 +6968,7 @@
             <a:fld id="{EA7C8D44-3667-46F6-9772-CC52308E2A7F}" type="slidenum">
               <a:rPr kumimoji="0" lang="en-US" smtClean="0"/>
               <a:pPr/>
-              <a:t>12</a:t>
+              <a:t>13</a:t>
             </a:fld>
             <a:endParaRPr kumimoji="0" lang="en-US" dirty="0"/>
           </a:p>
@@ -5820,7 +7116,7 @@
 </p:sld>
 </file>
 
-<file path=ppt/slides/slide13.xml><?xml version="1.0" encoding="utf-8"?>
+<file path=ppt/slides/slide14.xml><?xml version="1.0" encoding="utf-8"?>
 <p:sld xmlns:a="http://schemas.openxmlformats.org/drawingml/2006/main" xmlns:r="http://schemas.openxmlformats.org/officeDocument/2006/relationships" xmlns:p="http://schemas.openxmlformats.org/presentationml/2006/main">
   <p:cSld>
     <p:spTree>
@@ -5890,7 +7186,7 @@
             <a:fld id="{EA7C8D44-3667-46F6-9772-CC52308E2A7F}" type="slidenum">
               <a:rPr kumimoji="0" lang="en-US" smtClean="0"/>
               <a:pPr/>
-              <a:t>13</a:t>
+              <a:t>14</a:t>
             </a:fld>
             <a:endParaRPr kumimoji="0" lang="en-US" dirty="0"/>
           </a:p>
@@ -6319,7 +7615,7 @@
 </p:sld>
 </file>
 
-<file path=ppt/slides/slide14.xml><?xml version="1.0" encoding="utf-8"?>
+<file path=ppt/slides/slide15.xml><?xml version="1.0" encoding="utf-8"?>
 <p:sld xmlns:a="http://schemas.openxmlformats.org/drawingml/2006/main" xmlns:r="http://schemas.openxmlformats.org/officeDocument/2006/relationships" xmlns:p="http://schemas.openxmlformats.org/presentationml/2006/main">
   <p:cSld>
     <p:spTree>
@@ -6393,7 +7689,7 @@
             <a:fld id="{EA7C8D44-3667-46F6-9772-CC52308E2A7F}" type="slidenum">
               <a:rPr kumimoji="0" lang="en-US" smtClean="0"/>
               <a:pPr/>
-              <a:t>14</a:t>
+              <a:t>15</a:t>
             </a:fld>
             <a:endParaRPr kumimoji="0" lang="en-US" dirty="0"/>
           </a:p>
@@ -6931,7 +8227,7 @@
 </p:sld>
 </file>
 
-<file path=ppt/slides/slide15.xml><?xml version="1.0" encoding="utf-8"?>
+<file path=ppt/slides/slide16.xml><?xml version="1.0" encoding="utf-8"?>
 <p:sld xmlns:a="http://schemas.openxmlformats.org/drawingml/2006/main" xmlns:r="http://schemas.openxmlformats.org/officeDocument/2006/relationships" xmlns:p="http://schemas.openxmlformats.org/presentationml/2006/main">
   <p:cSld>
     <p:spTree>
@@ -7007,7 +8303,7 @@
             <a:fld id="{EA7C8D44-3667-46F6-9772-CC52308E2A7F}" type="slidenum">
               <a:rPr kumimoji="0" lang="en-US" smtClean="0"/>
               <a:pPr/>
-              <a:t>15</a:t>
+              <a:t>16</a:t>
             </a:fld>
             <a:endParaRPr kumimoji="0" lang="en-US" dirty="0"/>
           </a:p>
@@ -7272,7 +8568,7 @@
 </p:sld>
 </file>
 
-<file path=ppt/slides/slide16.xml><?xml version="1.0" encoding="utf-8"?>
+<file path=ppt/slides/slide17.xml><?xml version="1.0" encoding="utf-8"?>
 <p:sld xmlns:a="http://schemas.openxmlformats.org/drawingml/2006/main" xmlns:r="http://schemas.openxmlformats.org/officeDocument/2006/relationships" xmlns:p="http://schemas.openxmlformats.org/presentationml/2006/main">
   <p:cSld>
     <p:spTree>
@@ -7342,7 +8638,7 @@
             <a:fld id="{EA7C8D44-3667-46F6-9772-CC52308E2A7F}" type="slidenum">
               <a:rPr kumimoji="0" lang="en-US" smtClean="0"/>
               <a:pPr/>
-              <a:t>16</a:t>
+              <a:t>17</a:t>
             </a:fld>
             <a:endParaRPr kumimoji="0" lang="en-US" dirty="0"/>
           </a:p>
@@ -7504,7 +8800,7 @@
 </p:sld>
 </file>
 
-<file path=ppt/slides/slide17.xml><?xml version="1.0" encoding="utf-8"?>
+<file path=ppt/slides/slide18.xml><?xml version="1.0" encoding="utf-8"?>
 <p:sld xmlns:a="http://schemas.openxmlformats.org/drawingml/2006/main" xmlns:r="http://schemas.openxmlformats.org/officeDocument/2006/relationships" xmlns:p="http://schemas.openxmlformats.org/presentationml/2006/main">
   <p:cSld>
     <p:spTree>
@@ -7604,7 +8900,7 @@
             <a:fld id="{EA7C8D44-3667-46F6-9772-CC52308E2A7F}" type="slidenum">
               <a:rPr kumimoji="0" lang="en-US" smtClean="0"/>
               <a:pPr/>
-              <a:t>17</a:t>
+              <a:t>18</a:t>
             </a:fld>
             <a:endParaRPr kumimoji="0" lang="en-US" dirty="0"/>
           </a:p>
@@ -7760,7 +9056,7 @@
 </p:sld>
 </file>
 
-<file path=ppt/slides/slide18.xml><?xml version="1.0" encoding="utf-8"?>
+<file path=ppt/slides/slide19.xml><?xml version="1.0" encoding="utf-8"?>
 <p:sld xmlns:a="http://schemas.openxmlformats.org/drawingml/2006/main" xmlns:r="http://schemas.openxmlformats.org/officeDocument/2006/relationships" xmlns:p="http://schemas.openxmlformats.org/presentationml/2006/main">
   <p:cSld>
     <p:spTree>
@@ -7836,7 +9132,7 @@
             <a:fld id="{EA7C8D44-3667-46F6-9772-CC52308E2A7F}" type="slidenum">
               <a:rPr kumimoji="0" lang="en-US" smtClean="0"/>
               <a:pPr/>
-              <a:t>18</a:t>
+              <a:t>19</a:t>
             </a:fld>
             <a:endParaRPr kumimoji="0" lang="en-US" dirty="0"/>
           </a:p>
@@ -8179,7 +9475,368 @@
 </p:sld>
 </file>
 
-<file path=ppt/slides/slide19.xml><?xml version="1.0" encoding="utf-8"?>
+<file path=ppt/slides/slide2.xml><?xml version="1.0" encoding="utf-8"?>
+<p:sld xmlns:a="http://schemas.openxmlformats.org/drawingml/2006/main" xmlns:r="http://schemas.openxmlformats.org/officeDocument/2006/relationships" xmlns:p="http://schemas.openxmlformats.org/presentationml/2006/main">
+  <p:cSld>
+    <p:spTree>
+      <p:nvGrpSpPr>
+        <p:cNvPr id="1" name=""/>
+        <p:cNvGrpSpPr/>
+        <p:nvPr/>
+      </p:nvGrpSpPr>
+      <p:grpSpPr>
+        <a:xfrm>
+          <a:off x="0" y="0"/>
+          <a:ext cx="0" cy="0"/>
+          <a:chOff x="0" y="0"/>
+          <a:chExt cx="0" cy="0"/>
+        </a:xfrm>
+      </p:grpSpPr>
+      <p:sp>
+        <p:nvSpPr>
+          <p:cNvPr id="2" name="Title 1">
+            <a:extLst>
+              <a:ext uri="{FF2B5EF4-FFF2-40B4-BE49-F238E27FC236}">
+                <a16:creationId xmlns:a16="http://schemas.microsoft.com/office/drawing/2014/main" id="{62306E09-E980-57E2-828D-2010E654FC6A}"/>
+              </a:ext>
+            </a:extLst>
+          </p:cNvPr>
+          <p:cNvSpPr>
+            <a:spLocks noGrp="1"/>
+          </p:cNvSpPr>
+          <p:nvPr>
+            <p:ph type="title"/>
+          </p:nvPr>
+        </p:nvSpPr>
+        <p:spPr/>
+        <p:txBody>
+          <a:bodyPr/>
+          <a:lstStyle/>
+          <a:p>
+            <a:r>
+              <a:rPr lang="en-US" altLang="zh-CN" dirty="0"/>
+              <a:t>Lecture 3 - Links</a:t>
+            </a:r>
+            <a:endParaRPr lang="zh-CN" altLang="en-US" dirty="0"/>
+          </a:p>
+        </p:txBody>
+      </p:sp>
+      <p:sp>
+        <p:nvSpPr>
+          <p:cNvPr id="3" name="Slide Number Placeholder 2">
+            <a:extLst>
+              <a:ext uri="{FF2B5EF4-FFF2-40B4-BE49-F238E27FC236}">
+                <a16:creationId xmlns:a16="http://schemas.microsoft.com/office/drawing/2014/main" id="{4D3DA894-4C1A-9B54-C79B-0408816AD310}"/>
+              </a:ext>
+            </a:extLst>
+          </p:cNvPr>
+          <p:cNvSpPr>
+            <a:spLocks noGrp="1"/>
+          </p:cNvSpPr>
+          <p:nvPr>
+            <p:ph type="sldNum" sz="quarter" idx="12"/>
+          </p:nvPr>
+        </p:nvSpPr>
+        <p:spPr/>
+        <p:txBody>
+          <a:bodyPr/>
+          <a:lstStyle/>
+          <a:p>
+            <a:fld id="{EA7C8D44-3667-46F6-9772-CC52308E2A7F}" type="slidenum">
+              <a:rPr kumimoji="0" lang="en-US" smtClean="0"/>
+              <a:pPr/>
+              <a:t>2</a:t>
+            </a:fld>
+            <a:endParaRPr kumimoji="0" lang="en-US" dirty="0"/>
+          </a:p>
+        </p:txBody>
+      </p:sp>
+      <mc:AlternateContent xmlns:mc="http://schemas.openxmlformats.org/markup-compatibility/2006" xmlns:a14="http://schemas.microsoft.com/office/drawing/2010/main">
+        <mc:Choice Requires="a14">
+          <p:sp>
+            <p:nvSpPr>
+              <p:cNvPr id="4" name="Content Placeholder 3">
+                <a:extLst>
+                  <a:ext uri="{FF2B5EF4-FFF2-40B4-BE49-F238E27FC236}">
+                    <a16:creationId xmlns:a16="http://schemas.microsoft.com/office/drawing/2014/main" id="{5662D83C-81DB-8600-F716-39C04C2C9389}"/>
+                  </a:ext>
+                </a:extLst>
+              </p:cNvPr>
+              <p:cNvSpPr>
+                <a:spLocks noGrp="1"/>
+              </p:cNvSpPr>
+              <p:nvPr>
+                <p:ph sz="quarter" idx="1"/>
+              </p:nvPr>
+            </p:nvSpPr>
+            <p:spPr/>
+            <p:txBody>
+              <a:bodyPr>
+                <a:normAutofit fontScale="85000" lnSpcReduction="20000"/>
+              </a:bodyPr>
+              <a:lstStyle/>
+              <a:p>
+                <a:r>
+                  <a:rPr lang="nl-NL" altLang="zh-CN" dirty="0"/>
+                  <a:t>Consider a network path between a source host (A) and a destination host (B) that passes through two routers (R1 and R2) connected in series. The routers use store-and-forward packet switching. You are given the following network parameters:</a:t>
+                </a:r>
+              </a:p>
+              <a:p>
+                <a:pPr lvl="1"/>
+                <a:r>
+                  <a:rPr lang="nl-NL" altLang="zh-CN" dirty="0"/>
+                  <a:t>Packet size (L): 1,500 bytes</a:t>
+                </a:r>
+              </a:p>
+              <a:p>
+                <a:pPr lvl="1"/>
+                <a:r>
+                  <a:rPr lang="nl-NL" altLang="zh-CN" dirty="0"/>
+                  <a:t>Transmission rate (R): 10 Mbps for all three links</a:t>
+                </a:r>
+              </a:p>
+              <a:p>
+                <a:pPr lvl="1"/>
+                <a:r>
+                  <a:rPr lang="nl-NL" altLang="zh-CN" dirty="0"/>
+                  <a:t>Link lengths (d):</a:t>
+                </a:r>
+              </a:p>
+              <a:p>
+                <a:pPr lvl="2"/>
+                <a:r>
+                  <a:rPr lang="nl-NL" altLang="zh-CN" dirty="0"/>
+                  <a:t>Link 1 (A to R1): 4,000 km</a:t>
+                </a:r>
+              </a:p>
+              <a:p>
+                <a:pPr lvl="2"/>
+                <a:r>
+                  <a:rPr lang="nl-NL" altLang="zh-CN" dirty="0"/>
+                  <a:t>Link 2 (R1 to R2): 2,000 km</a:t>
+                </a:r>
+              </a:p>
+              <a:p>
+                <a:pPr lvl="2"/>
+                <a:r>
+                  <a:rPr lang="nl-NL" altLang="zh-CN" dirty="0"/>
+                  <a:t>Link 3 (R2 to B): 1,000 km</a:t>
+                </a:r>
+              </a:p>
+              <a:p>
+                <a:pPr lvl="1"/>
+                <a:r>
+                  <a:rPr lang="nl-NL" altLang="zh-CN" dirty="0"/>
+                  <a:t>Propagation speed (s): </a:t>
+                </a:r>
+                <a14:m>
+                  <m:oMath xmlns:m="http://schemas.openxmlformats.org/officeDocument/2006/math">
+                    <m:r>
+                      <a:rPr lang="nl-NL" altLang="zh-CN" b="0" i="1" smtClean="0">
+                        <a:latin typeface="Cambria Math" panose="02040503050406030204" pitchFamily="18" charset="0"/>
+                      </a:rPr>
+                      <m:t>2</m:t>
+                    </m:r>
+                    <m:r>
+                      <a:rPr lang="nl-NL" altLang="zh-CN" b="0" smtClean="0">
+                        <a:latin typeface="Cambria Math" panose="02040503050406030204" pitchFamily="18" charset="0"/>
+                      </a:rPr>
+                      <m:t>×</m:t>
+                    </m:r>
+                    <m:sSup>
+                      <m:sSupPr>
+                        <m:ctrlPr>
+                          <a:rPr lang="ar-AE" altLang="zh-CN" i="1">
+                            <a:latin typeface="Cambria Math" panose="02040503050406030204" pitchFamily="18" charset="0"/>
+                          </a:rPr>
+                        </m:ctrlPr>
+                      </m:sSupPr>
+                      <m:e>
+                        <m:r>
+                          <a:rPr lang="ar-AE" altLang="zh-CN" b="0" i="1" smtClean="0">
+                            <a:latin typeface="Cambria Math" panose="02040503050406030204" pitchFamily="18" charset="0"/>
+                          </a:rPr>
+                          <m:t>10</m:t>
+                        </m:r>
+                      </m:e>
+                      <m:sup>
+                        <m:r>
+                          <a:rPr lang="ar-AE" altLang="zh-CN" b="0" i="1" smtClean="0">
+                            <a:latin typeface="Cambria Math" panose="02040503050406030204" pitchFamily="18" charset="0"/>
+                          </a:rPr>
+                          <m:t>8</m:t>
+                        </m:r>
+                      </m:sup>
+                    </m:sSup>
+                  </m:oMath>
+                </a14:m>
+                <a:r>
+                  <a:rPr lang="ar-AE" altLang="zh-CN" dirty="0"/>
+                  <a:t> </a:t>
+                </a:r>
+                <a:r>
+                  <a:rPr lang="nl-NL" altLang="zh-CN" dirty="0"/>
+                  <a:t>m/s for all links</a:t>
+                </a:r>
+              </a:p>
+              <a:p>
+                <a:pPr lvl="1"/>
+                <a:r>
+                  <a:rPr lang="nl-NL" altLang="zh-CN" dirty="0"/>
+                  <a:t>Processing and Queuing delays: Assume both are negligible (0 ms)</a:t>
+                </a:r>
+              </a:p>
+              <a:p>
+                <a:r>
+                  <a:rPr lang="nl-NL" altLang="zh-CN" dirty="0"/>
+                  <a:t>Questions:</a:t>
+                </a:r>
+              </a:p>
+              <a:p>
+                <a:r>
+                  <a:rPr lang="nl-NL" altLang="zh-CN" dirty="0"/>
+                  <a:t>a) What is the transmission delay (</a:t>
+                </a:r>
+                <a14:m>
+                  <m:oMath xmlns:m="http://schemas.openxmlformats.org/officeDocument/2006/math">
+                    <m:sSub>
+                      <m:sSubPr>
+                        <m:ctrlPr>
+                          <a:rPr lang="ar-AE" altLang="zh-CN" i="1">
+                            <a:latin typeface="Cambria Math" panose="02040503050406030204" pitchFamily="18" charset="0"/>
+                          </a:rPr>
+                        </m:ctrlPr>
+                      </m:sSubPr>
+                      <m:e>
+                        <m:r>
+                          <a:rPr lang="zh-CN" altLang="ar-AE" b="0" i="1" smtClean="0">
+                            <a:latin typeface="Cambria Math" panose="02040503050406030204" pitchFamily="18" charset="0"/>
+                          </a:rPr>
+                          <m:t>𝑑</m:t>
+                        </m:r>
+                      </m:e>
+                      <m:sub>
+                        <m:r>
+                          <a:rPr lang="zh-CN" altLang="ar-AE" b="0" i="1" smtClean="0">
+                            <a:latin typeface="Cambria Math" panose="02040503050406030204" pitchFamily="18" charset="0"/>
+                          </a:rPr>
+                          <m:t>𝑡𝑟𝑎𝑛𝑠</m:t>
+                        </m:r>
+                      </m:sub>
+                    </m:sSub>
+                  </m:oMath>
+                </a14:m>
+                <a:r>
+                  <a:rPr lang="nl-NL" altLang="zh-CN" dirty="0"/>
+                  <a:t>) for a single link in milliseconds?</a:t>
+                </a:r>
+              </a:p>
+              <a:p>
+                <a:r>
+                  <a:rPr lang="nl-NL" altLang="zh-CN" dirty="0"/>
+                  <a:t>b) What is the total propagation delay (</a:t>
+                </a:r>
+                <a14:m>
+                  <m:oMath xmlns:m="http://schemas.openxmlformats.org/officeDocument/2006/math">
+                    <m:sSub>
+                      <m:sSubPr>
+                        <m:ctrlPr>
+                          <a:rPr lang="ar-AE" altLang="zh-CN" i="1">
+                            <a:latin typeface="Cambria Math" panose="02040503050406030204" pitchFamily="18" charset="0"/>
+                          </a:rPr>
+                        </m:ctrlPr>
+                      </m:sSubPr>
+                      <m:e>
+                        <m:r>
+                          <a:rPr lang="zh-CN" altLang="ar-AE" b="0" i="1" smtClean="0">
+                            <a:latin typeface="Cambria Math" panose="02040503050406030204" pitchFamily="18" charset="0"/>
+                          </a:rPr>
+                          <m:t>𝑑</m:t>
+                        </m:r>
+                      </m:e>
+                      <m:sub>
+                        <m:r>
+                          <a:rPr lang="zh-CN" altLang="ar-AE" b="0" i="1" smtClean="0">
+                            <a:latin typeface="Cambria Math" panose="02040503050406030204" pitchFamily="18" charset="0"/>
+                          </a:rPr>
+                          <m:t>𝑝𝑟𝑜𝑝</m:t>
+                        </m:r>
+                      </m:sub>
+                    </m:sSub>
+                  </m:oMath>
+                </a14:m>
+                <a:r>
+                  <a:rPr lang="en-US" altLang="zh-CN" dirty="0"/>
+                  <a:t>) </a:t>
+                </a:r>
+                <a:r>
+                  <a:rPr lang="nl-NL" altLang="zh-CN" dirty="0"/>
+                  <a:t>across all three links combined in milliseconds?</a:t>
+                </a:r>
+              </a:p>
+              <a:p>
+                <a:r>
+                  <a:rPr lang="nl-NL" altLang="zh-CN" dirty="0"/>
+                  <a:t>c) Calculate the total end-to-end delay from the moment Host A begins transmitting the first bit until Host B receives the last bit of the packet.</a:t>
+                </a:r>
+              </a:p>
+            </p:txBody>
+          </p:sp>
+        </mc:Choice>
+        <mc:Fallback xmlns="">
+          <p:sp>
+            <p:nvSpPr>
+              <p:cNvPr id="4" name="Content Placeholder 3">
+                <a:extLst>
+                  <a:ext uri="{FF2B5EF4-FFF2-40B4-BE49-F238E27FC236}">
+                    <a16:creationId xmlns:a16="http://schemas.microsoft.com/office/drawing/2014/main" id="{5662D83C-81DB-8600-F716-39C04C2C9389}"/>
+                  </a:ext>
+                </a:extLst>
+              </p:cNvPr>
+              <p:cNvSpPr>
+                <a:spLocks noGrp="1" noRot="1" noChangeAspect="1" noMove="1" noResize="1" noEditPoints="1" noAdjustHandles="1" noChangeArrowheads="1" noChangeShapeType="1" noTextEdit="1"/>
+              </p:cNvSpPr>
+              <p:nvPr>
+                <p:ph sz="quarter" idx="1"/>
+              </p:nvPr>
+            </p:nvSpPr>
+            <p:spPr>
+              <a:blipFill>
+                <a:blip r:embed="rId2"/>
+                <a:stretch>
+                  <a:fillRect l="-278" t="-2222" r="-1611" b="-1975"/>
+                </a:stretch>
+              </a:blipFill>
+            </p:spPr>
+            <p:txBody>
+              <a:bodyPr/>
+              <a:lstStyle/>
+              <a:p>
+                <a:r>
+                  <a:rPr lang="zh-CN" altLang="en-US">
+                    <a:noFill/>
+                  </a:rPr>
+                  <a:t> </a:t>
+                </a:r>
+              </a:p>
+            </p:txBody>
+          </p:sp>
+        </mc:Fallback>
+      </mc:AlternateContent>
+    </p:spTree>
+    <p:extLst>
+      <p:ext uri="{BB962C8B-B14F-4D97-AF65-F5344CB8AC3E}">
+        <p14:creationId xmlns:p14="http://schemas.microsoft.com/office/powerpoint/2010/main" val="3337951022"/>
+      </p:ext>
+    </p:extLst>
+  </p:cSld>
+  <p:clrMapOvr>
+    <a:masterClrMapping/>
+  </p:clrMapOvr>
+</p:sld>
+</file>
+
+<file path=ppt/slides/slide20.xml><?xml version="1.0" encoding="utf-8"?>
 <p:sld xmlns:a="http://schemas.openxmlformats.org/drawingml/2006/main" xmlns:r="http://schemas.openxmlformats.org/officeDocument/2006/relationships" xmlns:p="http://schemas.openxmlformats.org/presentationml/2006/main">
   <p:cSld>
     <p:spTree>
@@ -8255,7 +9912,7 @@
             <a:fld id="{EA7C8D44-3667-46F6-9772-CC52308E2A7F}" type="slidenum">
               <a:rPr kumimoji="0" lang="en-US" smtClean="0"/>
               <a:pPr/>
-              <a:t>19</a:t>
+              <a:t>20</a:t>
             </a:fld>
             <a:endParaRPr kumimoji="0" lang="en-US" dirty="0"/>
           </a:p>
@@ -8297,7 +9954,7 @@
           <a:p>
             <a:r>
               <a:rPr lang="en-US" altLang="zh-CN" dirty="0"/>
-              <a:t>Q1 Given the current routing table, use route aggregation to build a new table, such that both tables produce the same forwarding decisions, and every IPv4 address matches only one prefix. Write one IP prefix per box.</a:t>
+              <a:t>Q1 Given the current routing table, use route aggregation to build a new table, such that both tables produce the same forwarding decisions. Write one IP prefix per box.</a:t>
             </a:r>
           </a:p>
           <a:p>
@@ -8733,368 +10390,7 @@
 </p:sld>
 </file>
 
-<file path=ppt/slides/slide2.xml><?xml version="1.0" encoding="utf-8"?>
-<p:sld xmlns:a="http://schemas.openxmlformats.org/drawingml/2006/main" xmlns:r="http://schemas.openxmlformats.org/officeDocument/2006/relationships" xmlns:p="http://schemas.openxmlformats.org/presentationml/2006/main">
-  <p:cSld>
-    <p:spTree>
-      <p:nvGrpSpPr>
-        <p:cNvPr id="1" name=""/>
-        <p:cNvGrpSpPr/>
-        <p:nvPr/>
-      </p:nvGrpSpPr>
-      <p:grpSpPr>
-        <a:xfrm>
-          <a:off x="0" y="0"/>
-          <a:ext cx="0" cy="0"/>
-          <a:chOff x="0" y="0"/>
-          <a:chExt cx="0" cy="0"/>
-        </a:xfrm>
-      </p:grpSpPr>
-      <p:sp>
-        <p:nvSpPr>
-          <p:cNvPr id="2" name="Title 1">
-            <a:extLst>
-              <a:ext uri="{FF2B5EF4-FFF2-40B4-BE49-F238E27FC236}">
-                <a16:creationId xmlns:a16="http://schemas.microsoft.com/office/drawing/2014/main" id="{62306E09-E980-57E2-828D-2010E654FC6A}"/>
-              </a:ext>
-            </a:extLst>
-          </p:cNvPr>
-          <p:cNvSpPr>
-            <a:spLocks noGrp="1"/>
-          </p:cNvSpPr>
-          <p:nvPr>
-            <p:ph type="title"/>
-          </p:nvPr>
-        </p:nvSpPr>
-        <p:spPr/>
-        <p:txBody>
-          <a:bodyPr/>
-          <a:lstStyle/>
-          <a:p>
-            <a:r>
-              <a:rPr lang="en-US" altLang="zh-CN" dirty="0"/>
-              <a:t>Lecture 3 - Links</a:t>
-            </a:r>
-            <a:endParaRPr lang="zh-CN" altLang="en-US" dirty="0"/>
-          </a:p>
-        </p:txBody>
-      </p:sp>
-      <p:sp>
-        <p:nvSpPr>
-          <p:cNvPr id="3" name="Slide Number Placeholder 2">
-            <a:extLst>
-              <a:ext uri="{FF2B5EF4-FFF2-40B4-BE49-F238E27FC236}">
-                <a16:creationId xmlns:a16="http://schemas.microsoft.com/office/drawing/2014/main" id="{4D3DA894-4C1A-9B54-C79B-0408816AD310}"/>
-              </a:ext>
-            </a:extLst>
-          </p:cNvPr>
-          <p:cNvSpPr>
-            <a:spLocks noGrp="1"/>
-          </p:cNvSpPr>
-          <p:nvPr>
-            <p:ph type="sldNum" sz="quarter" idx="12"/>
-          </p:nvPr>
-        </p:nvSpPr>
-        <p:spPr/>
-        <p:txBody>
-          <a:bodyPr/>
-          <a:lstStyle/>
-          <a:p>
-            <a:fld id="{EA7C8D44-3667-46F6-9772-CC52308E2A7F}" type="slidenum">
-              <a:rPr kumimoji="0" lang="en-US" smtClean="0"/>
-              <a:pPr/>
-              <a:t>2</a:t>
-            </a:fld>
-            <a:endParaRPr kumimoji="0" lang="en-US" dirty="0"/>
-          </a:p>
-        </p:txBody>
-      </p:sp>
-      <mc:AlternateContent xmlns:mc="http://schemas.openxmlformats.org/markup-compatibility/2006" xmlns:a14="http://schemas.microsoft.com/office/drawing/2010/main">
-        <mc:Choice Requires="a14">
-          <p:sp>
-            <p:nvSpPr>
-              <p:cNvPr id="4" name="Content Placeholder 3">
-                <a:extLst>
-                  <a:ext uri="{FF2B5EF4-FFF2-40B4-BE49-F238E27FC236}">
-                    <a16:creationId xmlns:a16="http://schemas.microsoft.com/office/drawing/2014/main" id="{5662D83C-81DB-8600-F716-39C04C2C9389}"/>
-                  </a:ext>
-                </a:extLst>
-              </p:cNvPr>
-              <p:cNvSpPr>
-                <a:spLocks noGrp="1"/>
-              </p:cNvSpPr>
-              <p:nvPr>
-                <p:ph sz="quarter" idx="1"/>
-              </p:nvPr>
-            </p:nvSpPr>
-            <p:spPr/>
-            <p:txBody>
-              <a:bodyPr>
-                <a:normAutofit fontScale="85000" lnSpcReduction="20000"/>
-              </a:bodyPr>
-              <a:lstStyle/>
-              <a:p>
-                <a:r>
-                  <a:rPr lang="nl-NL" altLang="zh-CN" dirty="0"/>
-                  <a:t>Consider a network path between a source host (A) and a destination host (B) that passes through two routers (R1 and R2) connected in series. The routers use store-and-forward packet switching. You are given the following network parameters:</a:t>
-                </a:r>
-              </a:p>
-              <a:p>
-                <a:pPr lvl="1"/>
-                <a:r>
-                  <a:rPr lang="nl-NL" altLang="zh-CN" dirty="0"/>
-                  <a:t>Packet size (L): 1,500 bytes</a:t>
-                </a:r>
-              </a:p>
-              <a:p>
-                <a:pPr lvl="1"/>
-                <a:r>
-                  <a:rPr lang="nl-NL" altLang="zh-CN" dirty="0"/>
-                  <a:t>Transmission rate (R): 10 Mbps for all three links</a:t>
-                </a:r>
-              </a:p>
-              <a:p>
-                <a:pPr lvl="1"/>
-                <a:r>
-                  <a:rPr lang="nl-NL" altLang="zh-CN" dirty="0"/>
-                  <a:t>Link lengths (d):</a:t>
-                </a:r>
-              </a:p>
-              <a:p>
-                <a:pPr lvl="2"/>
-                <a:r>
-                  <a:rPr lang="nl-NL" altLang="zh-CN" dirty="0"/>
-                  <a:t>Link 1 (A to R1): 4,000 km</a:t>
-                </a:r>
-              </a:p>
-              <a:p>
-                <a:pPr lvl="2"/>
-                <a:r>
-                  <a:rPr lang="nl-NL" altLang="zh-CN" dirty="0"/>
-                  <a:t>Link 2 (R1 to R2): 2,000 km</a:t>
-                </a:r>
-              </a:p>
-              <a:p>
-                <a:pPr lvl="2"/>
-                <a:r>
-                  <a:rPr lang="nl-NL" altLang="zh-CN" dirty="0"/>
-                  <a:t>Link 3 (R2 to B): 1,000 km</a:t>
-                </a:r>
-              </a:p>
-              <a:p>
-                <a:pPr lvl="1"/>
-                <a:r>
-                  <a:rPr lang="nl-NL" altLang="zh-CN" dirty="0"/>
-                  <a:t>Propagation speed (s): </a:t>
-                </a:r>
-                <a14:m>
-                  <m:oMath xmlns:m="http://schemas.openxmlformats.org/officeDocument/2006/math">
-                    <m:r>
-                      <a:rPr lang="nl-NL" altLang="zh-CN" b="0" i="1" smtClean="0">
-                        <a:latin typeface="Cambria Math" panose="02040503050406030204" pitchFamily="18" charset="0"/>
-                      </a:rPr>
-                      <m:t>2</m:t>
-                    </m:r>
-                    <m:r>
-                      <a:rPr lang="nl-NL" altLang="zh-CN" b="0" smtClean="0">
-                        <a:latin typeface="Cambria Math" panose="02040503050406030204" pitchFamily="18" charset="0"/>
-                      </a:rPr>
-                      <m:t>×</m:t>
-                    </m:r>
-                    <m:sSup>
-                      <m:sSupPr>
-                        <m:ctrlPr>
-                          <a:rPr lang="ar-AE" altLang="zh-CN" i="1">
-                            <a:latin typeface="Cambria Math" panose="02040503050406030204" pitchFamily="18" charset="0"/>
-                          </a:rPr>
-                        </m:ctrlPr>
-                      </m:sSupPr>
-                      <m:e>
-                        <m:r>
-                          <a:rPr lang="ar-AE" altLang="zh-CN" b="0" i="1" smtClean="0">
-                            <a:latin typeface="Cambria Math" panose="02040503050406030204" pitchFamily="18" charset="0"/>
-                          </a:rPr>
-                          <m:t>10</m:t>
-                        </m:r>
-                      </m:e>
-                      <m:sup>
-                        <m:r>
-                          <a:rPr lang="ar-AE" altLang="zh-CN" b="0" i="1" smtClean="0">
-                            <a:latin typeface="Cambria Math" panose="02040503050406030204" pitchFamily="18" charset="0"/>
-                          </a:rPr>
-                          <m:t>8</m:t>
-                        </m:r>
-                      </m:sup>
-                    </m:sSup>
-                  </m:oMath>
-                </a14:m>
-                <a:r>
-                  <a:rPr lang="ar-AE" altLang="zh-CN" dirty="0"/>
-                  <a:t> </a:t>
-                </a:r>
-                <a:r>
-                  <a:rPr lang="nl-NL" altLang="zh-CN" dirty="0"/>
-                  <a:t>m/s for all links</a:t>
-                </a:r>
-              </a:p>
-              <a:p>
-                <a:pPr lvl="1"/>
-                <a:r>
-                  <a:rPr lang="nl-NL" altLang="zh-CN" dirty="0"/>
-                  <a:t>Processing and Queuing delays: Assume both are negligible (0 ms)</a:t>
-                </a:r>
-              </a:p>
-              <a:p>
-                <a:r>
-                  <a:rPr lang="nl-NL" altLang="zh-CN" dirty="0"/>
-                  <a:t>Questions:</a:t>
-                </a:r>
-              </a:p>
-              <a:p>
-                <a:r>
-                  <a:rPr lang="nl-NL" altLang="zh-CN" dirty="0"/>
-                  <a:t>a) What is the transmission delay (</a:t>
-                </a:r>
-                <a14:m>
-                  <m:oMath xmlns:m="http://schemas.openxmlformats.org/officeDocument/2006/math">
-                    <m:sSub>
-                      <m:sSubPr>
-                        <m:ctrlPr>
-                          <a:rPr lang="ar-AE" altLang="zh-CN" i="1">
-                            <a:latin typeface="Cambria Math" panose="02040503050406030204" pitchFamily="18" charset="0"/>
-                          </a:rPr>
-                        </m:ctrlPr>
-                      </m:sSubPr>
-                      <m:e>
-                        <m:r>
-                          <a:rPr lang="zh-CN" altLang="ar-AE" b="0" i="1" smtClean="0">
-                            <a:latin typeface="Cambria Math" panose="02040503050406030204" pitchFamily="18" charset="0"/>
-                          </a:rPr>
-                          <m:t>𝑑</m:t>
-                        </m:r>
-                      </m:e>
-                      <m:sub>
-                        <m:r>
-                          <a:rPr lang="zh-CN" altLang="ar-AE" b="0" i="1" smtClean="0">
-                            <a:latin typeface="Cambria Math" panose="02040503050406030204" pitchFamily="18" charset="0"/>
-                          </a:rPr>
-                          <m:t>𝑡𝑟𝑎𝑛𝑠</m:t>
-                        </m:r>
-                      </m:sub>
-                    </m:sSub>
-                  </m:oMath>
-                </a14:m>
-                <a:r>
-                  <a:rPr lang="nl-NL" altLang="zh-CN" dirty="0"/>
-                  <a:t>) for a single link in milliseconds?</a:t>
-                </a:r>
-              </a:p>
-              <a:p>
-                <a:r>
-                  <a:rPr lang="nl-NL" altLang="zh-CN" dirty="0"/>
-                  <a:t>b) What is the total propagation delay (</a:t>
-                </a:r>
-                <a14:m>
-                  <m:oMath xmlns:m="http://schemas.openxmlformats.org/officeDocument/2006/math">
-                    <m:sSub>
-                      <m:sSubPr>
-                        <m:ctrlPr>
-                          <a:rPr lang="ar-AE" altLang="zh-CN" i="1">
-                            <a:latin typeface="Cambria Math" panose="02040503050406030204" pitchFamily="18" charset="0"/>
-                          </a:rPr>
-                        </m:ctrlPr>
-                      </m:sSubPr>
-                      <m:e>
-                        <m:r>
-                          <a:rPr lang="zh-CN" altLang="ar-AE" b="0" i="1" smtClean="0">
-                            <a:latin typeface="Cambria Math" panose="02040503050406030204" pitchFamily="18" charset="0"/>
-                          </a:rPr>
-                          <m:t>𝑑</m:t>
-                        </m:r>
-                      </m:e>
-                      <m:sub>
-                        <m:r>
-                          <a:rPr lang="zh-CN" altLang="ar-AE" b="0" i="1" smtClean="0">
-                            <a:latin typeface="Cambria Math" panose="02040503050406030204" pitchFamily="18" charset="0"/>
-                          </a:rPr>
-                          <m:t>𝑝𝑟𝑜𝑝</m:t>
-                        </m:r>
-                      </m:sub>
-                    </m:sSub>
-                  </m:oMath>
-                </a14:m>
-                <a:r>
-                  <a:rPr lang="en-US" altLang="zh-CN" dirty="0"/>
-                  <a:t>) </a:t>
-                </a:r>
-                <a:r>
-                  <a:rPr lang="nl-NL" altLang="zh-CN" dirty="0"/>
-                  <a:t>across all three links combined in milliseconds?</a:t>
-                </a:r>
-              </a:p>
-              <a:p>
-                <a:r>
-                  <a:rPr lang="nl-NL" altLang="zh-CN" dirty="0"/>
-                  <a:t>c) Calculate the total end-to-end delay from the moment Host A begins transmitting the first bit until Host B receives the last bit of the packet.</a:t>
-                </a:r>
-              </a:p>
-            </p:txBody>
-          </p:sp>
-        </mc:Choice>
-        <mc:Fallback xmlns="">
-          <p:sp>
-            <p:nvSpPr>
-              <p:cNvPr id="4" name="Content Placeholder 3">
-                <a:extLst>
-                  <a:ext uri="{FF2B5EF4-FFF2-40B4-BE49-F238E27FC236}">
-                    <a16:creationId xmlns:a16="http://schemas.microsoft.com/office/drawing/2014/main" id="{5662D83C-81DB-8600-F716-39C04C2C9389}"/>
-                  </a:ext>
-                </a:extLst>
-              </p:cNvPr>
-              <p:cNvSpPr>
-                <a:spLocks noGrp="1" noRot="1" noChangeAspect="1" noMove="1" noResize="1" noEditPoints="1" noAdjustHandles="1" noChangeArrowheads="1" noChangeShapeType="1" noTextEdit="1"/>
-              </p:cNvSpPr>
-              <p:nvPr>
-                <p:ph sz="quarter" idx="1"/>
-              </p:nvPr>
-            </p:nvSpPr>
-            <p:spPr>
-              <a:blipFill>
-                <a:blip r:embed="rId2"/>
-                <a:stretch>
-                  <a:fillRect l="-278" t="-2222" r="-1611" b="-1975"/>
-                </a:stretch>
-              </a:blipFill>
-            </p:spPr>
-            <p:txBody>
-              <a:bodyPr/>
-              <a:lstStyle/>
-              <a:p>
-                <a:r>
-                  <a:rPr lang="zh-CN" altLang="en-US">
-                    <a:noFill/>
-                  </a:rPr>
-                  <a:t> </a:t>
-                </a:r>
-              </a:p>
-            </p:txBody>
-          </p:sp>
-        </mc:Fallback>
-      </mc:AlternateContent>
-    </p:spTree>
-    <p:extLst>
-      <p:ext uri="{BB962C8B-B14F-4D97-AF65-F5344CB8AC3E}">
-        <p14:creationId xmlns:p14="http://schemas.microsoft.com/office/powerpoint/2010/main" val="3337951022"/>
-      </p:ext>
-    </p:extLst>
-  </p:cSld>
-  <p:clrMapOvr>
-    <a:masterClrMapping/>
-  </p:clrMapOvr>
-</p:sld>
-</file>
-
-<file path=ppt/slides/slide20.xml><?xml version="1.0" encoding="utf-8"?>
+<file path=ppt/slides/slide21.xml><?xml version="1.0" encoding="utf-8"?>
 <p:sld xmlns:a="http://schemas.openxmlformats.org/drawingml/2006/main" xmlns:r="http://schemas.openxmlformats.org/officeDocument/2006/relationships" xmlns:p="http://schemas.openxmlformats.org/presentationml/2006/main">
   <p:cSld>
     <p:spTree>
@@ -9170,7 +10466,7 @@
             <a:fld id="{EA7C8D44-3667-46F6-9772-CC52308E2A7F}" type="slidenum">
               <a:rPr kumimoji="0" lang="en-US" smtClean="0"/>
               <a:pPr/>
-              <a:t>20</a:t>
+              <a:t>21</a:t>
             </a:fld>
             <a:endParaRPr kumimoji="0" lang="en-US" dirty="0"/>
           </a:p>
@@ -9276,7 +10572,7 @@
 </p:sld>
 </file>
 
-<file path=ppt/slides/slide21.xml><?xml version="1.0" encoding="utf-8"?>
+<file path=ppt/slides/slide22.xml><?xml version="1.0" encoding="utf-8"?>
 <p:sld xmlns:a="http://schemas.openxmlformats.org/drawingml/2006/main" xmlns:r="http://schemas.openxmlformats.org/officeDocument/2006/relationships" xmlns:p="http://schemas.openxmlformats.org/presentationml/2006/main">
   <p:cSld>
     <p:spTree>
@@ -9346,7 +10642,7 @@
             <a:fld id="{EA7C8D44-3667-46F6-9772-CC52308E2A7F}" type="slidenum">
               <a:rPr kumimoji="0" lang="en-US" smtClean="0"/>
               <a:pPr/>
-              <a:t>21</a:t>
+              <a:t>22</a:t>
             </a:fld>
             <a:endParaRPr kumimoji="0" lang="en-US" dirty="0"/>
           </a:p>
@@ -9899,7 +11195,7 @@
 </p:sld>
 </file>
 
-<file path=ppt/slides/slide22.xml><?xml version="1.0" encoding="utf-8"?>
+<file path=ppt/slides/slide23.xml><?xml version="1.0" encoding="utf-8"?>
 <p:sld xmlns:a="http://schemas.openxmlformats.org/drawingml/2006/main" xmlns:r="http://schemas.openxmlformats.org/officeDocument/2006/relationships" xmlns:p="http://schemas.openxmlformats.org/presentationml/2006/main">
   <p:cSld>
     <p:spTree>
@@ -9969,7 +11265,7 @@
             <a:fld id="{EA7C8D44-3667-46F6-9772-CC52308E2A7F}" type="slidenum">
               <a:rPr kumimoji="0" lang="en-US" smtClean="0"/>
               <a:pPr/>
-              <a:t>22</a:t>
+              <a:t>23</a:t>
             </a:fld>
             <a:endParaRPr kumimoji="0" lang="en-US" dirty="0"/>
           </a:p>
@@ -10157,7 +11453,7 @@
 </p:sld>
 </file>
 
-<file path=ppt/slides/slide23.xml><?xml version="1.0" encoding="utf-8"?>
+<file path=ppt/slides/slide24.xml><?xml version="1.0" encoding="utf-8"?>
 <p:sld xmlns:a="http://schemas.openxmlformats.org/drawingml/2006/main" xmlns:r="http://schemas.openxmlformats.org/officeDocument/2006/relationships" xmlns:p="http://schemas.openxmlformats.org/presentationml/2006/main">
   <p:cSld>
     <p:spTree>
@@ -10227,7 +11523,7 @@
             <a:fld id="{EA7C8D44-3667-46F6-9772-CC52308E2A7F}" type="slidenum">
               <a:rPr kumimoji="0" lang="en-US" smtClean="0"/>
               <a:pPr/>
-              <a:t>23</a:t>
+              <a:t>24</a:t>
             </a:fld>
             <a:endParaRPr kumimoji="0" lang="en-US" dirty="0"/>
           </a:p>
@@ -10412,7 +11708,7 @@
 </p:sld>
 </file>
 
-<file path=ppt/slides/slide24.xml><?xml version="1.0" encoding="utf-8"?>
+<file path=ppt/slides/slide25.xml><?xml version="1.0" encoding="utf-8"?>
 <p:sld xmlns:a="http://schemas.openxmlformats.org/drawingml/2006/main" xmlns:r="http://schemas.openxmlformats.org/officeDocument/2006/relationships" xmlns:p="http://schemas.openxmlformats.org/presentationml/2006/main">
   <p:cSld>
     <p:spTree>
@@ -10482,7 +11778,7 @@
             <a:fld id="{EA7C8D44-3667-46F6-9772-CC52308E2A7F}" type="slidenum">
               <a:rPr kumimoji="0" lang="en-US" smtClean="0"/>
               <a:pPr/>
-              <a:t>24</a:t>
+              <a:t>25</a:t>
             </a:fld>
             <a:endParaRPr kumimoji="0" lang="en-US" dirty="0"/>
           </a:p>
@@ -10612,7 +11908,7 @@
 </p:sld>
 </file>
 
-<file path=ppt/slides/slide25.xml><?xml version="1.0" encoding="utf-8"?>
+<file path=ppt/slides/slide26.xml><?xml version="1.0" encoding="utf-8"?>
 <p:sld xmlns:a="http://schemas.openxmlformats.org/drawingml/2006/main" xmlns:r="http://schemas.openxmlformats.org/officeDocument/2006/relationships" xmlns:p="http://schemas.openxmlformats.org/presentationml/2006/main">
   <p:cSld>
     <p:spTree>
@@ -10684,7 +11980,7 @@
             <a:fld id="{EA7C8D44-3667-46F6-9772-CC52308E2A7F}" type="slidenum">
               <a:rPr kumimoji="0" lang="en-US" smtClean="0"/>
               <a:pPr/>
-              <a:t>25</a:t>
+              <a:t>26</a:t>
             </a:fld>
             <a:endParaRPr kumimoji="0" lang="en-US" dirty="0"/>
           </a:p>
@@ -12654,7 +13950,7 @@
 </p:sld>
 </file>
 
-<file path=ppt/slides/slide26.xml><?xml version="1.0" encoding="utf-8"?>
+<file path=ppt/slides/slide27.xml><?xml version="1.0" encoding="utf-8"?>
 <p:sld xmlns:a="http://schemas.openxmlformats.org/drawingml/2006/main" xmlns:r="http://schemas.openxmlformats.org/officeDocument/2006/relationships" xmlns:p="http://schemas.openxmlformats.org/presentationml/2006/main">
   <p:cSld>
     <p:spTree>
@@ -12732,7 +14028,7 @@
             <a:fld id="{EA7C8D44-3667-46F6-9772-CC52308E2A7F}" type="slidenum">
               <a:rPr kumimoji="0" lang="en-US" smtClean="0"/>
               <a:pPr/>
-              <a:t>26</a:t>
+              <a:t>27</a:t>
             </a:fld>
             <a:endParaRPr kumimoji="0" lang="en-US" dirty="0"/>
           </a:p>
@@ -14800,7 +16096,7 @@
 </p:sld>
 </file>
 
-<file path=ppt/slides/slide27.xml><?xml version="1.0" encoding="utf-8"?>
+<file path=ppt/slides/slide28.xml><?xml version="1.0" encoding="utf-8"?>
 <p:sld xmlns:a="http://schemas.openxmlformats.org/drawingml/2006/main" xmlns:r="http://schemas.openxmlformats.org/officeDocument/2006/relationships" xmlns:p="http://schemas.openxmlformats.org/presentationml/2006/main">
   <p:cSld>
     <p:spTree>
@@ -14878,7 +16174,7 @@
             <a:fld id="{EA7C8D44-3667-46F6-9772-CC52308E2A7F}" type="slidenum">
               <a:rPr kumimoji="0" lang="en-US" smtClean="0"/>
               <a:pPr/>
-              <a:t>27</a:t>
+              <a:t>28</a:t>
             </a:fld>
             <a:endParaRPr kumimoji="0" lang="en-US" dirty="0"/>
           </a:p>
@@ -18204,8 +19500,6 @@
               <a:rPr lang="en-US" altLang="zh-CN" dirty="0"/>
               <a:t> the old value and write the new one.</a:t>
             </a:r>
-          </a:p>
-          <a:p>
             <a:endParaRPr lang="zh-CN" altLang="en-US" dirty="0"/>
           </a:p>
         </p:txBody>
@@ -22794,12 +24088,12 @@
         <p:spPr>
           <a:xfrm>
             <a:off x="609600" y="1219200"/>
-            <a:ext cx="10972800" cy="3154680"/>
+            <a:ext cx="10972800" cy="3302274"/>
           </a:xfrm>
         </p:spPr>
         <p:txBody>
           <a:bodyPr>
-            <a:normAutofit fontScale="62500" lnSpcReduction="20000"/>
+            <a:normAutofit fontScale="55000" lnSpcReduction="20000"/>
           </a:bodyPr>
           <a:lstStyle/>
           <a:p>
@@ -22908,7 +24202,7 @@
           <a:p>
             <a:r>
               <a:rPr lang="en-US" altLang="zh-CN" dirty="0"/>
-              <a:t>After the network converges, the R1 - R2 link is broken, and split horizon is enabled on all routers. (not route poisoning.)</a:t>
+              <a:t>After the network converges, the R1 - R2 link is broken, and split horizon is enabled on all routers. </a:t>
             </a:r>
           </a:p>
           <a:p>
@@ -22916,10 +24210,34 @@
               <a:rPr lang="en-US" altLang="zh-CN" dirty="0"/>
               <a:t>Q2 Fill in R1’s table at the new steady state after the R1 - R2 link is broken.</a:t>
             </a:r>
-            <a:br>
-              <a:rPr lang="en-US" altLang="zh-CN" dirty="0"/>
-            </a:br>
-            <a:endParaRPr lang="en-US" altLang="zh-CN" dirty="0"/>
+          </a:p>
+          <a:p>
+            <a:r>
+              <a:rPr lang="en-US" altLang="zh-CN" sz="2800" dirty="0"/>
+              <a:t>Q3 Suppose R1’s original table entry for destination </a:t>
+            </a:r>
+            <a:r>
+              <a:rPr lang="zh-CN" altLang="en-US" sz="2800" dirty="0"/>
+              <a:t>𝐶 </a:t>
+            </a:r>
+            <a:r>
+              <a:rPr lang="en-US" altLang="zh-CN" sz="2800" dirty="0"/>
+              <a:t>expires at </a:t>
+            </a:r>
+            <a:r>
+              <a:rPr lang="zh-CN" altLang="en-US" sz="2800" dirty="0"/>
+              <a:t>𝑡 </a:t>
+            </a:r>
+            <a:r>
+              <a:rPr lang="en-US" altLang="zh-CN" sz="2800" dirty="0"/>
+              <a:t>= 20. At what time step does R1’s table reach the new steady state in Q2? Assume split horizon but no route poisoning.</a:t>
+            </a:r>
+          </a:p>
+          <a:p>
+            <a:r>
+              <a:rPr lang="en-US" altLang="zh-CN" sz="2700" dirty="0"/>
+              <a:t>Q4 Redo Q3 assuming both split horizon and route poisoning</a:t>
+            </a:r>
           </a:p>
         </p:txBody>
       </p:sp>
@@ -23162,21 +24480,13 @@
             </a:r>
             <a:r>
               <a:rPr lang="en-US" altLang="zh-CN" sz="1600" dirty="0"/>
-              <a:t>expires at </a:t>
-            </a:r>
-            <a:r>
-              <a:rPr lang="zh-CN" altLang="en-US" sz="1600" dirty="0"/>
-              <a:t>𝑡 </a:t>
-            </a:r>
+              <a:t>expires at t = 20. At what time step does R1’s table reach the new steady state in Q2? </a:t>
+            </a:r>
+          </a:p>
+          <a:p>
             <a:r>
               <a:rPr lang="en-US" altLang="zh-CN" sz="1600" dirty="0"/>
-              <a:t>= 20. At what time step does R1’s table reach the new steady state in Q2? </a:t>
-            </a:r>
-          </a:p>
-          <a:p>
-            <a:r>
-              <a:rPr lang="en-US" altLang="zh-CN" sz="1600" dirty="0"/>
-              <a:t>ANS: The route to C is the only route that changes for R1.  R1′s route to C expires at t=20, this means that the last possible advertisement for the route to C was sent from R1 to R3 at t=18.  (After t=20, R1 cannot advertise the old route to C anymore; it must wait for a new usable route to come back from R3.) It reaches R3 after 2 seconds at t=20. R3 had a route to C via R1 (R3 – R2 – R2 - C), which will expire at t=20+TTL=30 at the earliest when it will accept new route to C via R2 from R2.  Then R3 advertises back to R1 (2 seconds) to reach steady state at t=32.</a:t>
+              <a:t>ANS: The route to C is the only route that changes for R1.  R1′s route to C expires at t = 20, this means that the last possible advertisement for the route to C was sent from R1 to R3 at t = 18.  (After t = 20, R1 cannot advertise the old route to C anymore; it must wait for a new usable route to come back from R3.) It reaches R3 after 2 seconds at t = 20. R3 had a route to C via R1 (R3 – R2 – R2 - C), which will expire at t = 20 + TTL = 30 at the earliest when it will accept new route to C via R2 from R2.  Then R3 advertises back to R1 (2 seconds) to reach steady state at t = 32.</a:t>
             </a:r>
             <a:br>
               <a:rPr lang="en-US" altLang="zh-CN" sz="1600" dirty="0"/>
@@ -23323,6 +24633,317 @@
   <p:cSld>
     <p:spTree>
       <p:nvGrpSpPr>
+        <p:cNvPr id="1" name="">
+          <a:extLst>
+            <a:ext uri="{FF2B5EF4-FFF2-40B4-BE49-F238E27FC236}">
+              <a16:creationId xmlns:a16="http://schemas.microsoft.com/office/drawing/2014/main" id="{FE016637-EDA4-33F8-4B7E-A9EABA162CA9}"/>
+            </a:ext>
+          </a:extLst>
+        </p:cNvPr>
+        <p:cNvGrpSpPr/>
+        <p:nvPr/>
+      </p:nvGrpSpPr>
+      <p:grpSpPr>
+        <a:xfrm>
+          <a:off x="0" y="0"/>
+          <a:ext cx="0" cy="0"/>
+          <a:chOff x="0" y="0"/>
+          <a:chExt cx="0" cy="0"/>
+        </a:xfrm>
+      </p:grpSpPr>
+      <p:sp>
+        <p:nvSpPr>
+          <p:cNvPr id="2" name="Title 1">
+            <a:extLst>
+              <a:ext uri="{FF2B5EF4-FFF2-40B4-BE49-F238E27FC236}">
+                <a16:creationId xmlns:a16="http://schemas.microsoft.com/office/drawing/2014/main" id="{AEF78994-FF8C-EE30-6F7A-EB8D1B120150}"/>
+              </a:ext>
+            </a:extLst>
+          </p:cNvPr>
+          <p:cNvSpPr>
+            <a:spLocks noGrp="1"/>
+          </p:cNvSpPr>
+          <p:nvPr>
+            <p:ph type="title"/>
+          </p:nvPr>
+        </p:nvSpPr>
+        <p:spPr/>
+        <p:txBody>
+          <a:bodyPr/>
+          <a:lstStyle/>
+          <a:p>
+            <a:r>
+              <a:rPr lang="nl-NL" altLang="zh-CN" dirty="0"/>
+              <a:t>Lecture 5.2 - Distance-Vector </a:t>
+            </a:r>
+            <a:r>
+              <a:rPr lang="en-US" altLang="zh-CN" dirty="0"/>
+              <a:t>ANS</a:t>
+            </a:r>
+            <a:endParaRPr lang="zh-CN" altLang="en-US" dirty="0"/>
+          </a:p>
+        </p:txBody>
+      </p:sp>
+      <p:sp>
+        <p:nvSpPr>
+          <p:cNvPr id="3" name="Slide Number Placeholder 2">
+            <a:extLst>
+              <a:ext uri="{FF2B5EF4-FFF2-40B4-BE49-F238E27FC236}">
+                <a16:creationId xmlns:a16="http://schemas.microsoft.com/office/drawing/2014/main" id="{3E46BCE3-B9CC-3297-7295-242D25E68D83}"/>
+              </a:ext>
+            </a:extLst>
+          </p:cNvPr>
+          <p:cNvSpPr>
+            <a:spLocks noGrp="1"/>
+          </p:cNvSpPr>
+          <p:nvPr>
+            <p:ph type="sldNum" sz="quarter" idx="12"/>
+          </p:nvPr>
+        </p:nvSpPr>
+        <p:spPr/>
+        <p:txBody>
+          <a:bodyPr/>
+          <a:lstStyle/>
+          <a:p>
+            <a:fld id="{EA7C8D44-3667-46F6-9772-CC52308E2A7F}" type="slidenum">
+              <a:rPr kumimoji="0" lang="en-US" smtClean="0"/>
+              <a:pPr/>
+              <a:t>8</a:t>
+            </a:fld>
+            <a:endParaRPr kumimoji="0" lang="en-US" dirty="0"/>
+          </a:p>
+        </p:txBody>
+      </p:sp>
+      <p:sp>
+        <p:nvSpPr>
+          <p:cNvPr id="4" name="Content Placeholder 3">
+            <a:extLst>
+              <a:ext uri="{FF2B5EF4-FFF2-40B4-BE49-F238E27FC236}">
+                <a16:creationId xmlns:a16="http://schemas.microsoft.com/office/drawing/2014/main" id="{6AA40899-FF31-2E52-7845-946790403B61}"/>
+              </a:ext>
+            </a:extLst>
+          </p:cNvPr>
+          <p:cNvSpPr>
+            <a:spLocks noGrp="1"/>
+          </p:cNvSpPr>
+          <p:nvPr>
+            <p:ph sz="quarter" idx="1"/>
+          </p:nvPr>
+        </p:nvSpPr>
+        <p:spPr>
+          <a:xfrm>
+            <a:off x="609600" y="1142998"/>
+            <a:ext cx="10972800" cy="2514602"/>
+          </a:xfrm>
+        </p:spPr>
+        <p:txBody>
+          <a:bodyPr>
+            <a:normAutofit lnSpcReduction="10000"/>
+          </a:bodyPr>
+          <a:lstStyle/>
+          <a:p>
+            <a:r>
+              <a:rPr lang="en-US" altLang="zh-CN" sz="1700" dirty="0"/>
+              <a:t>Q4 Redo Q3 assuming both split horizon and route poisoning</a:t>
+            </a:r>
+          </a:p>
+          <a:p>
+            <a:r>
+              <a:rPr lang="en-US" altLang="zh-CN" sz="1500" dirty="0"/>
+              <a:t>ANS: </a:t>
+            </a:r>
+            <a:r>
+              <a:rPr lang="en-US" altLang="zh-CN" sz="1700" dirty="0"/>
+              <a:t>For </a:t>
+            </a:r>
+            <a:r>
+              <a:rPr lang="en-US" altLang="zh-CN" sz="1700" b="1" dirty="0"/>
+              <a:t>split horizon + route poisoning</a:t>
+            </a:r>
+            <a:r>
+              <a:rPr lang="en-US" altLang="zh-CN" sz="1700" dirty="0"/>
+              <a:t>, R1 does </a:t>
+            </a:r>
+            <a:r>
+              <a:rPr lang="en-US" altLang="zh-CN" sz="1700" b="1" dirty="0"/>
+              <a:t>not</a:t>
+            </a:r>
+            <a:r>
+              <a:rPr lang="en-US" altLang="zh-CN" sz="1700" dirty="0"/>
+              <a:t> need to wait until R3’s old route to C times out at t = 30. The update happens sooner:</a:t>
+            </a:r>
+          </a:p>
+          <a:p>
+            <a:pPr lvl="1"/>
+            <a:r>
+              <a:rPr lang="en-US" altLang="zh-CN" sz="1500" dirty="0"/>
+              <a:t>t = 20: R1’s route to C expires, and R1 advertises C as unreachable. </a:t>
+            </a:r>
+          </a:p>
+          <a:p>
+            <a:pPr lvl="1"/>
+            <a:r>
+              <a:rPr lang="en-US" altLang="zh-CN" sz="1500" dirty="0"/>
+              <a:t>t = 22: R3 receives that poison from R1, and also still has the valid C advertisement from R2.  R3 switches to C via R2 with cost 5 and advertises it to R1. </a:t>
+            </a:r>
+          </a:p>
+          <a:p>
+            <a:pPr lvl="1"/>
+            <a:r>
+              <a:rPr lang="en-US" altLang="zh-CN" sz="1500" dirty="0"/>
+              <a:t>t = 24: R1 receives that update from R3 and installs C via R3 with cost 7. </a:t>
+            </a:r>
+          </a:p>
+          <a:p>
+            <a:r>
+              <a:rPr lang="en-US" altLang="zh-CN" sz="1700" dirty="0"/>
+              <a:t>So R1 reaches the new steady state at t = 24, not t = 32.</a:t>
+            </a:r>
+            <a:br>
+              <a:rPr lang="en-US" altLang="zh-CN" sz="1600" dirty="0"/>
+            </a:br>
+            <a:endParaRPr lang="en-US" altLang="zh-CN" sz="1600" dirty="0"/>
+          </a:p>
+        </p:txBody>
+      </p:sp>
+      <p:pic>
+        <p:nvPicPr>
+          <p:cNvPr id="6" name="Picture 5" descr="This diagram appears to represent a flowchart or network diagram with nodes labeled as A, R1, R2, C, B, and R3, and connections or branches between them, possibly indicating a sequence or process.&#10;&#10;AI-generated content may be incorrect.">
+            <a:extLst>
+              <a:ext uri="{FF2B5EF4-FFF2-40B4-BE49-F238E27FC236}">
+                <a16:creationId xmlns:a16="http://schemas.microsoft.com/office/drawing/2014/main" id="{AB76A4EE-E85C-2817-84A3-0454593BFF7C}"/>
+              </a:ext>
+            </a:extLst>
+          </p:cNvPr>
+          <p:cNvPicPr>
+            <a:picLocks noChangeAspect="1"/>
+          </p:cNvPicPr>
+          <p:nvPr/>
+        </p:nvPicPr>
+        <p:blipFill>
+          <a:blip r:embed="rId3"/>
+          <a:stretch>
+            <a:fillRect/>
+          </a:stretch>
+        </p:blipFill>
+        <p:spPr>
+          <a:xfrm>
+            <a:off x="76199" y="5200376"/>
+            <a:ext cx="5872765" cy="1581424"/>
+          </a:xfrm>
+          <a:prstGeom prst="rect">
+            <a:avLst/>
+          </a:prstGeom>
+        </p:spPr>
+      </p:pic>
+      <p:pic>
+        <p:nvPicPr>
+          <p:cNvPr id="8" name="Picture 7" descr="The diagram illustrates a flowchart or logic diagram with nodes labeled as A, R1, R2, C, B, R3, and D, showing connections or relationships between these elements.&#10;&#10;AI-generated content may be incorrect.">
+            <a:extLst>
+              <a:ext uri="{FF2B5EF4-FFF2-40B4-BE49-F238E27FC236}">
+                <a16:creationId xmlns:a16="http://schemas.microsoft.com/office/drawing/2014/main" id="{652F0B2E-9845-2F54-191F-72AA422D53BE}"/>
+              </a:ext>
+            </a:extLst>
+          </p:cNvPr>
+          <p:cNvPicPr>
+            <a:picLocks noChangeAspect="1"/>
+          </p:cNvPicPr>
+          <p:nvPr/>
+        </p:nvPicPr>
+        <p:blipFill>
+          <a:blip r:embed="rId4"/>
+          <a:stretch>
+            <a:fillRect/>
+          </a:stretch>
+        </p:blipFill>
+        <p:spPr>
+          <a:xfrm>
+            <a:off x="6091656" y="5150312"/>
+            <a:ext cx="5721383" cy="1631488"/>
+          </a:xfrm>
+          <a:prstGeom prst="rect">
+            <a:avLst/>
+          </a:prstGeom>
+        </p:spPr>
+      </p:pic>
+      <p:pic>
+        <p:nvPicPr>
+          <p:cNvPr id="14" name="Picture 13" descr="The image presents a table displaying the routing information for a Next Hop Router, including the destination (A, B, C, D) and associated costs (1, 3, 2, 3).&#10;&#10;AI-generated content may be incorrect.">
+            <a:extLst>
+              <a:ext uri="{FF2B5EF4-FFF2-40B4-BE49-F238E27FC236}">
+                <a16:creationId xmlns:a16="http://schemas.microsoft.com/office/drawing/2014/main" id="{EE5D1112-93FB-B4DF-BAF6-7ABD76FCC0E7}"/>
+              </a:ext>
+            </a:extLst>
+          </p:cNvPr>
+          <p:cNvPicPr>
+            <a:picLocks noChangeAspect="1"/>
+          </p:cNvPicPr>
+          <p:nvPr/>
+        </p:nvPicPr>
+        <p:blipFill>
+          <a:blip r:embed="rId5"/>
+          <a:stretch>
+            <a:fillRect/>
+          </a:stretch>
+        </p:blipFill>
+        <p:spPr>
+          <a:xfrm>
+            <a:off x="152400" y="3406048"/>
+            <a:ext cx="5408710" cy="1794328"/>
+          </a:xfrm>
+          <a:prstGeom prst="rect">
+            <a:avLst/>
+          </a:prstGeom>
+        </p:spPr>
+      </p:pic>
+      <p:pic>
+        <p:nvPicPr>
+          <p:cNvPr id="16" name="Picture 15" descr="Next Hop Router&#10;&#10;AI-generated content may be incorrect.">
+            <a:extLst>
+              <a:ext uri="{FF2B5EF4-FFF2-40B4-BE49-F238E27FC236}">
+                <a16:creationId xmlns:a16="http://schemas.microsoft.com/office/drawing/2014/main" id="{A5306C0A-A378-B5BC-1D5D-697AC46F16E4}"/>
+              </a:ext>
+            </a:extLst>
+          </p:cNvPr>
+          <p:cNvPicPr>
+            <a:picLocks noChangeAspect="1"/>
+          </p:cNvPicPr>
+          <p:nvPr/>
+        </p:nvPicPr>
+        <p:blipFill>
+          <a:blip r:embed="rId6"/>
+          <a:stretch>
+            <a:fillRect/>
+          </a:stretch>
+        </p:blipFill>
+        <p:spPr>
+          <a:xfrm>
+            <a:off x="6274358" y="3376023"/>
+            <a:ext cx="5538681" cy="1824353"/>
+          </a:xfrm>
+          <a:prstGeom prst="rect">
+            <a:avLst/>
+          </a:prstGeom>
+        </p:spPr>
+      </p:pic>
+    </p:spTree>
+    <p:extLst>
+      <p:ext uri="{BB962C8B-B14F-4D97-AF65-F5344CB8AC3E}">
+        <p14:creationId xmlns:p14="http://schemas.microsoft.com/office/powerpoint/2010/main" val="2121627929"/>
+      </p:ext>
+    </p:extLst>
+  </p:cSld>
+  <p:clrMapOvr>
+    <a:masterClrMapping/>
+  </p:clrMapOvr>
+</p:sld>
+</file>
+
+<file path=ppt/slides/slide9.xml><?xml version="1.0" encoding="utf-8"?>
+<p:sld xmlns:a="http://schemas.openxmlformats.org/drawingml/2006/main" xmlns:r="http://schemas.openxmlformats.org/officeDocument/2006/relationships" xmlns:p="http://schemas.openxmlformats.org/presentationml/2006/main">
+  <p:cSld>
+    <p:spTree>
+      <p:nvGrpSpPr>
         <p:cNvPr id="1" name=""/>
         <p:cNvGrpSpPr/>
         <p:nvPr/>
@@ -23388,7 +25009,7 @@
             <a:fld id="{EA7C8D44-3667-46F6-9772-CC52308E2A7F}" type="slidenum">
               <a:rPr kumimoji="0" lang="en-US" smtClean="0"/>
               <a:pPr/>
-              <a:t>8</a:t>
+              <a:t>9</a:t>
             </a:fld>
             <a:endParaRPr kumimoji="0" lang="en-US" dirty="0"/>
           </a:p>
@@ -23449,7 +25070,31 @@
           <a:p>
             <a:r>
               <a:rPr lang="en-US" altLang="zh-CN" dirty="0"/>
-              <a:t>Q3.  Assume that at time t=0, A sends a packet to C. At t=0.5 seconds, the link between R4 and R5 goes down, and R4 and R5 instantaneously recognize and recompute their routes. Assume that link-state advertisements are processed and propagated instantaneously. A link’s propagation delay is equal to the link costs in the diagram (in seconds), i.e. R1 - R2 has a 1-second delay, R2 - R3 has 2-second delay, </a:t>
+              <a:t>Q3.  Assume that A sends a packet to C, and at</a:t>
+            </a:r>
+            <a:r>
+              <a:rPr lang="en-US" altLang="zh-CN" dirty="0">
+                <a:solidFill>
+                  <a:srgbClr val="C00000"/>
+                </a:solidFill>
+              </a:rPr>
+              <a:t> time t=0, it arrives at R1</a:t>
+            </a:r>
+            <a:r>
+              <a:rPr lang="en-US" altLang="zh-CN" dirty="0"/>
+              <a:t>. At </a:t>
+            </a:r>
+            <a:r>
+              <a:rPr lang="en-US" altLang="zh-CN" dirty="0">
+                <a:solidFill>
+                  <a:srgbClr val="C00000"/>
+                </a:solidFill>
+              </a:rPr>
+              <a:t>t=0.5s</a:t>
+            </a:r>
+            <a:r>
+              <a:rPr lang="en-US" altLang="zh-CN" dirty="0"/>
+              <a:t>, the link between R4 and R5 goes down, and R4 and R5 instantaneously recognize and recompute their routes.  Assume that link-state advertisements are processed and propagated instantaneously. A link’s propagation delay is equal to the link costs in the diagram (in seconds), i.e. R1 - R2 has a 1-second delay, R2 - R3 has 2-second delay, </a:t>
             </a:r>
             <a:r>
               <a:rPr lang="en-US" altLang="zh-CN" dirty="0" err="1"/>
@@ -23508,575 +25153,6 @@
   <p:clrMapOvr>
     <a:masterClrMapping/>
   </p:clrMapOvr>
-</p:sld>
-</file>
-
-<file path=ppt/slides/slide9.xml><?xml version="1.0" encoding="utf-8"?>
-<p:sld xmlns:a="http://schemas.openxmlformats.org/drawingml/2006/main" xmlns:r="http://schemas.openxmlformats.org/officeDocument/2006/relationships" xmlns:p="http://schemas.openxmlformats.org/presentationml/2006/main">
-  <p:cSld>
-    <p:spTree>
-      <p:nvGrpSpPr>
-        <p:cNvPr id="1" name="">
-          <a:extLst>
-            <a:ext uri="{FF2B5EF4-FFF2-40B4-BE49-F238E27FC236}">
-              <a16:creationId xmlns:a16="http://schemas.microsoft.com/office/drawing/2014/main" id="{CADCD358-DCD5-5D54-466E-ACFF98743B3E}"/>
-            </a:ext>
-          </a:extLst>
-        </p:cNvPr>
-        <p:cNvGrpSpPr/>
-        <p:nvPr/>
-      </p:nvGrpSpPr>
-      <p:grpSpPr>
-        <a:xfrm>
-          <a:off x="0" y="0"/>
-          <a:ext cx="0" cy="0"/>
-          <a:chOff x="0" y="0"/>
-          <a:chExt cx="0" cy="0"/>
-        </a:xfrm>
-      </p:grpSpPr>
-      <p:sp>
-        <p:nvSpPr>
-          <p:cNvPr id="2" name="Title 1">
-            <a:extLst>
-              <a:ext uri="{FF2B5EF4-FFF2-40B4-BE49-F238E27FC236}">
-                <a16:creationId xmlns:a16="http://schemas.microsoft.com/office/drawing/2014/main" id="{32833A3F-6964-20F1-79E8-FCFE8C1AEBFE}"/>
-              </a:ext>
-            </a:extLst>
-          </p:cNvPr>
-          <p:cNvSpPr>
-            <a:spLocks noGrp="1"/>
-          </p:cNvSpPr>
-          <p:nvPr>
-            <p:ph type="title"/>
-          </p:nvPr>
-        </p:nvSpPr>
-        <p:spPr/>
-        <p:txBody>
-          <a:bodyPr/>
-          <a:lstStyle/>
-          <a:p>
-            <a:r>
-              <a:rPr lang="nl-NL" altLang="zh-CN" dirty="0"/>
-              <a:t>Lecture 5.3 - Link-State ANS</a:t>
-            </a:r>
-            <a:endParaRPr lang="zh-CN" altLang="en-US" dirty="0"/>
-          </a:p>
-        </p:txBody>
-      </p:sp>
-      <p:sp>
-        <p:nvSpPr>
-          <p:cNvPr id="3" name="Slide Number Placeholder 2">
-            <a:extLst>
-              <a:ext uri="{FF2B5EF4-FFF2-40B4-BE49-F238E27FC236}">
-                <a16:creationId xmlns:a16="http://schemas.microsoft.com/office/drawing/2014/main" id="{8D106DA5-B39E-00EE-ADEA-C0F073DBB350}"/>
-              </a:ext>
-            </a:extLst>
-          </p:cNvPr>
-          <p:cNvSpPr>
-            <a:spLocks noGrp="1"/>
-          </p:cNvSpPr>
-          <p:nvPr>
-            <p:ph type="sldNum" sz="quarter" idx="12"/>
-          </p:nvPr>
-        </p:nvSpPr>
-        <p:spPr/>
-        <p:txBody>
-          <a:bodyPr/>
-          <a:lstStyle/>
-          <a:p>
-            <a:fld id="{EA7C8D44-3667-46F6-9772-CC52308E2A7F}" type="slidenum">
-              <a:rPr kumimoji="0" lang="en-US" smtClean="0"/>
-              <a:pPr/>
-              <a:t>9</a:t>
-            </a:fld>
-            <a:endParaRPr kumimoji="0" lang="en-US" dirty="0"/>
-          </a:p>
-        </p:txBody>
-      </p:sp>
-      <p:sp>
-        <p:nvSpPr>
-          <p:cNvPr id="4" name="Content Placeholder 3">
-            <a:extLst>
-              <a:ext uri="{FF2B5EF4-FFF2-40B4-BE49-F238E27FC236}">
-                <a16:creationId xmlns:a16="http://schemas.microsoft.com/office/drawing/2014/main" id="{8FEE1D6E-BDD8-543E-5201-693D655D1834}"/>
-              </a:ext>
-            </a:extLst>
-          </p:cNvPr>
-          <p:cNvSpPr>
-            <a:spLocks noGrp="1"/>
-          </p:cNvSpPr>
-          <p:nvPr>
-            <p:ph sz="quarter" idx="1"/>
-          </p:nvPr>
-        </p:nvSpPr>
-        <p:spPr>
-          <a:xfrm>
-            <a:off x="609600" y="1219200"/>
-            <a:ext cx="6260578" cy="5137150"/>
-          </a:xfrm>
-        </p:spPr>
-        <p:txBody>
-          <a:bodyPr>
-            <a:normAutofit fontScale="62500" lnSpcReduction="20000"/>
-          </a:bodyPr>
-          <a:lstStyle/>
-          <a:p>
-            <a:r>
-              <a:rPr lang="en-US" altLang="zh-CN" dirty="0"/>
-              <a:t>Q1. Suppose that </a:t>
-            </a:r>
-            <a:r>
-              <a:rPr lang="en-US" altLang="zh-CN" dirty="0">
-                <a:solidFill>
-                  <a:srgbClr val="C00000"/>
-                </a:solidFill>
-              </a:rPr>
-              <a:t>the</a:t>
-            </a:r>
-            <a:r>
-              <a:rPr lang="en-US" altLang="zh-CN" dirty="0"/>
-              <a:t> </a:t>
-            </a:r>
-            <a:r>
-              <a:rPr lang="en-US" altLang="zh-CN" dirty="0">
-                <a:solidFill>
-                  <a:srgbClr val="C00000"/>
-                </a:solidFill>
-              </a:rPr>
-              <a:t>link between R3 and R4 goes down</a:t>
-            </a:r>
-            <a:r>
-              <a:rPr lang="en-US" altLang="zh-CN" dirty="0"/>
-              <a:t>. R3 and R4 have recomputed their routes, but they have not yet sent updates. What route will a packet from A to C take?</a:t>
-            </a:r>
-          </a:p>
-          <a:p>
-            <a:r>
-              <a:rPr lang="en-US" altLang="zh-CN" dirty="0"/>
-              <a:t>ANS: </a:t>
-            </a:r>
-            <a:r>
-              <a:rPr lang="pt-BR" altLang="zh-CN" dirty="0"/>
-              <a:t> A → R1 → R2 → R3 → R2 → R3 (loop)</a:t>
-            </a:r>
-          </a:p>
-          <a:p>
-            <a:r>
-              <a:rPr lang="en-US" altLang="zh-CN" dirty="0"/>
-              <a:t>Explanation: Because R3 and R4 have not yet sent their Link-State Advertisements (LSAs), R1 and R2 are unaware of the failure and continue forwarding the packet toward R3, assuming it is the shortest path. However, R3 knows its link to R4 is down, so it has locally recomputed its next-best path to C, which happens to go back through R2 (R3</a:t>
-            </a:r>
-            <a:r>
-              <a:rPr lang="pt-BR" altLang="zh-CN" dirty="0"/>
-              <a:t> → R2 → R4 → R5 → C</a:t>
-            </a:r>
-            <a:r>
-              <a:rPr lang="en-US" altLang="zh-CN" dirty="0"/>
-              <a:t>).  This creates a temporary routing loop until R1 and R2 receive the updates</a:t>
-            </a:r>
-          </a:p>
-          <a:p>
-            <a:r>
-              <a:rPr lang="en-US" altLang="zh-CN" dirty="0"/>
-              <a:t>Q2. Suppose that </a:t>
-            </a:r>
-            <a:r>
-              <a:rPr lang="en-US" altLang="zh-CN" dirty="0">
-                <a:solidFill>
-                  <a:srgbClr val="C00000"/>
-                </a:solidFill>
-              </a:rPr>
-              <a:t>the link between R2 and R3 goes down</a:t>
-            </a:r>
-            <a:r>
-              <a:rPr lang="en-US" altLang="zh-CN" dirty="0"/>
-              <a:t>. R2 and R3 have recomputed their routes, but have not yet sent updates.  What route will a packet from A to C take? </a:t>
-            </a:r>
-          </a:p>
-          <a:p>
-            <a:r>
-              <a:rPr lang="en-US" altLang="zh-CN" dirty="0"/>
-              <a:t>ANS:  </a:t>
-            </a:r>
-            <a:r>
-              <a:rPr lang="pt-BR" altLang="zh-CN" dirty="0"/>
-              <a:t>A → R1 → R2 → R4 → R5 → C </a:t>
-            </a:r>
-          </a:p>
-          <a:p>
-            <a:r>
-              <a:rPr lang="en-US" altLang="zh-CN" dirty="0"/>
-              <a:t>Explanation: R1 is unaware of the failure and sends the packet to R2. However, R2 is aware that its link to R3 is down. R2 locally recalculates an alternate route to C via R4 and R5. Because this new path does not bounce back to an uninformed router that points back to R2, the packet successfully reaches its destination without looping.</a:t>
-            </a:r>
-            <a:endParaRPr lang="zh-CN" altLang="en-US" dirty="0"/>
-          </a:p>
-        </p:txBody>
-      </p:sp>
-      <p:pic>
-        <p:nvPicPr>
-          <p:cNvPr id="5" name="Picture 4">
-            <a:extLst>
-              <a:ext uri="{FF2B5EF4-FFF2-40B4-BE49-F238E27FC236}">
-                <a16:creationId xmlns:a16="http://schemas.microsoft.com/office/drawing/2014/main" id="{02D6FFA8-8915-83EB-E55C-9F4A48412A9A}"/>
-              </a:ext>
-            </a:extLst>
-          </p:cNvPr>
-          <p:cNvPicPr>
-            <a:picLocks noChangeAspect="1"/>
-          </p:cNvPicPr>
-          <p:nvPr/>
-        </p:nvPicPr>
-        <p:blipFill>
-          <a:blip r:embed="rId2"/>
-          <a:srcRect/>
-          <a:stretch/>
-        </p:blipFill>
-        <p:spPr>
-          <a:xfrm>
-            <a:off x="6870178" y="1752601"/>
-            <a:ext cx="5243053" cy="2743200"/>
-          </a:xfrm>
-          <a:prstGeom prst="rect">
-            <a:avLst/>
-          </a:prstGeom>
-        </p:spPr>
-      </p:pic>
-    </p:spTree>
-    <p:extLst>
-      <p:ext uri="{BB962C8B-B14F-4D97-AF65-F5344CB8AC3E}">
-        <p14:creationId xmlns:p14="http://schemas.microsoft.com/office/powerpoint/2010/main" val="2010822840"/>
-      </p:ext>
-    </p:extLst>
-  </p:cSld>
-  <p:clrMapOvr>
-    <a:masterClrMapping/>
-  </p:clrMapOvr>
-  <p:timing>
-    <p:tnLst>
-      <p:par>
-        <p:cTn id="1" dur="indefinite" restart="never" nodeType="tmRoot">
-          <p:childTnLst>
-            <p:seq concurrent="1" nextAc="seek">
-              <p:cTn id="2" dur="indefinite" nodeType="mainSeq">
-                <p:childTnLst>
-                  <p:par>
-                    <p:cTn id="3" fill="hold">
-                      <p:stCondLst>
-                        <p:cond delay="indefinite"/>
-                      </p:stCondLst>
-                      <p:childTnLst>
-                        <p:par>
-                          <p:cTn id="4" fill="hold">
-                            <p:stCondLst>
-                              <p:cond delay="0"/>
-                            </p:stCondLst>
-                            <p:childTnLst>
-                              <p:par>
-                                <p:cTn id="5" presetID="1" presetClass="entr" presetSubtype="0" fill="hold" grpId="0" nodeType="clickEffect">
-                                  <p:stCondLst>
-                                    <p:cond delay="0"/>
-                                  </p:stCondLst>
-                                  <p:childTnLst>
-                                    <p:set>
-                                      <p:cBhvr>
-                                        <p:cTn id="6" dur="1" fill="hold">
-                                          <p:stCondLst>
-                                            <p:cond delay="0"/>
-                                          </p:stCondLst>
-                                        </p:cTn>
-                                        <p:tgtEl>
-                                          <p:spTgt spid="4">
-                                            <p:txEl>
-                                              <p:pRg st="0" end="0"/>
-                                            </p:txEl>
-                                          </p:spTgt>
-                                        </p:tgtEl>
-                                        <p:attrNameLst>
-                                          <p:attrName>style.visibility</p:attrName>
-                                        </p:attrNameLst>
-                                      </p:cBhvr>
-                                      <p:to>
-                                        <p:strVal val="visible"/>
-                                      </p:to>
-                                    </p:set>
-                                  </p:childTnLst>
-                                </p:cTn>
-                              </p:par>
-                            </p:childTnLst>
-                          </p:cTn>
-                        </p:par>
-                      </p:childTnLst>
-                    </p:cTn>
-                  </p:par>
-                  <p:par>
-                    <p:cTn id="7" fill="hold">
-                      <p:stCondLst>
-                        <p:cond delay="indefinite"/>
-                      </p:stCondLst>
-                      <p:childTnLst>
-                        <p:par>
-                          <p:cTn id="8" fill="hold">
-                            <p:stCondLst>
-                              <p:cond delay="0"/>
-                            </p:stCondLst>
-                            <p:childTnLst>
-                              <p:par>
-                                <p:cTn id="9" presetID="1" presetClass="entr" presetSubtype="0" fill="hold" grpId="0" nodeType="clickEffect">
-                                  <p:stCondLst>
-                                    <p:cond delay="0"/>
-                                  </p:stCondLst>
-                                  <p:childTnLst>
-                                    <p:set>
-                                      <p:cBhvr>
-                                        <p:cTn id="10" dur="1" fill="hold">
-                                          <p:stCondLst>
-                                            <p:cond delay="0"/>
-                                          </p:stCondLst>
-                                        </p:cTn>
-                                        <p:tgtEl>
-                                          <p:spTgt spid="4">
-                                            <p:txEl>
-                                              <p:pRg st="1" end="1"/>
-                                            </p:txEl>
-                                          </p:spTgt>
-                                        </p:tgtEl>
-                                        <p:attrNameLst>
-                                          <p:attrName>style.visibility</p:attrName>
-                                        </p:attrNameLst>
-                                      </p:cBhvr>
-                                      <p:to>
-                                        <p:strVal val="visible"/>
-                                      </p:to>
-                                    </p:set>
-                                  </p:childTnLst>
-                                </p:cTn>
-                              </p:par>
-                            </p:childTnLst>
-                          </p:cTn>
-                        </p:par>
-                      </p:childTnLst>
-                    </p:cTn>
-                  </p:par>
-                  <p:par>
-                    <p:cTn id="11" fill="hold">
-                      <p:stCondLst>
-                        <p:cond delay="indefinite"/>
-                      </p:stCondLst>
-                      <p:childTnLst>
-                        <p:par>
-                          <p:cTn id="12" fill="hold">
-                            <p:stCondLst>
-                              <p:cond delay="0"/>
-                            </p:stCondLst>
-                            <p:childTnLst>
-                              <p:par>
-                                <p:cTn id="13" presetID="1" presetClass="entr" presetSubtype="0" fill="hold" grpId="0" nodeType="clickEffect">
-                                  <p:stCondLst>
-                                    <p:cond delay="0"/>
-                                  </p:stCondLst>
-                                  <p:childTnLst>
-                                    <p:set>
-                                      <p:cBhvr>
-                                        <p:cTn id="14" dur="1" fill="hold">
-                                          <p:stCondLst>
-                                            <p:cond delay="0"/>
-                                          </p:stCondLst>
-                                        </p:cTn>
-                                        <p:tgtEl>
-                                          <p:spTgt spid="4">
-                                            <p:txEl>
-                                              <p:pRg st="2" end="2"/>
-                                            </p:txEl>
-                                          </p:spTgt>
-                                        </p:tgtEl>
-                                        <p:attrNameLst>
-                                          <p:attrName>style.visibility</p:attrName>
-                                        </p:attrNameLst>
-                                      </p:cBhvr>
-                                      <p:to>
-                                        <p:strVal val="visible"/>
-                                      </p:to>
-                                    </p:set>
-                                  </p:childTnLst>
-                                </p:cTn>
-                              </p:par>
-                            </p:childTnLst>
-                          </p:cTn>
-                        </p:par>
-                      </p:childTnLst>
-                    </p:cTn>
-                  </p:par>
-                  <p:par>
-                    <p:cTn id="15" fill="hold">
-                      <p:stCondLst>
-                        <p:cond delay="indefinite"/>
-                      </p:stCondLst>
-                      <p:childTnLst>
-                        <p:par>
-                          <p:cTn id="16" fill="hold">
-                            <p:stCondLst>
-                              <p:cond delay="0"/>
-                            </p:stCondLst>
-                            <p:childTnLst>
-                              <p:par>
-                                <p:cTn id="17" presetID="1" presetClass="entr" presetSubtype="0" fill="hold" grpId="0" nodeType="clickEffect">
-                                  <p:stCondLst>
-                                    <p:cond delay="0"/>
-                                  </p:stCondLst>
-                                  <p:childTnLst>
-                                    <p:set>
-                                      <p:cBhvr>
-                                        <p:cTn id="18" dur="1" fill="hold">
-                                          <p:stCondLst>
-                                            <p:cond delay="0"/>
-                                          </p:stCondLst>
-                                        </p:cTn>
-                                        <p:tgtEl>
-                                          <p:spTgt spid="4">
-                                            <p:txEl>
-                                              <p:pRg st="3" end="3"/>
-                                            </p:txEl>
-                                          </p:spTgt>
-                                        </p:tgtEl>
-                                        <p:attrNameLst>
-                                          <p:attrName>style.visibility</p:attrName>
-                                        </p:attrNameLst>
-                                      </p:cBhvr>
-                                      <p:to>
-                                        <p:strVal val="visible"/>
-                                      </p:to>
-                                    </p:set>
-                                  </p:childTnLst>
-                                </p:cTn>
-                              </p:par>
-                            </p:childTnLst>
-                          </p:cTn>
-                        </p:par>
-                      </p:childTnLst>
-                    </p:cTn>
-                  </p:par>
-                  <p:par>
-                    <p:cTn id="19" fill="hold">
-                      <p:stCondLst>
-                        <p:cond delay="indefinite"/>
-                      </p:stCondLst>
-                      <p:childTnLst>
-                        <p:par>
-                          <p:cTn id="20" fill="hold">
-                            <p:stCondLst>
-                              <p:cond delay="0"/>
-                            </p:stCondLst>
-                            <p:childTnLst>
-                              <p:par>
-                                <p:cTn id="21" presetID="1" presetClass="entr" presetSubtype="0" fill="hold" grpId="0" nodeType="clickEffect">
-                                  <p:stCondLst>
-                                    <p:cond delay="0"/>
-                                  </p:stCondLst>
-                                  <p:childTnLst>
-                                    <p:set>
-                                      <p:cBhvr>
-                                        <p:cTn id="22" dur="1" fill="hold">
-                                          <p:stCondLst>
-                                            <p:cond delay="0"/>
-                                          </p:stCondLst>
-                                        </p:cTn>
-                                        <p:tgtEl>
-                                          <p:spTgt spid="4">
-                                            <p:txEl>
-                                              <p:pRg st="4" end="4"/>
-                                            </p:txEl>
-                                          </p:spTgt>
-                                        </p:tgtEl>
-                                        <p:attrNameLst>
-                                          <p:attrName>style.visibility</p:attrName>
-                                        </p:attrNameLst>
-                                      </p:cBhvr>
-                                      <p:to>
-                                        <p:strVal val="visible"/>
-                                      </p:to>
-                                    </p:set>
-                                  </p:childTnLst>
-                                </p:cTn>
-                              </p:par>
-                            </p:childTnLst>
-                          </p:cTn>
-                        </p:par>
-                      </p:childTnLst>
-                    </p:cTn>
-                  </p:par>
-                  <p:par>
-                    <p:cTn id="23" fill="hold">
-                      <p:stCondLst>
-                        <p:cond delay="indefinite"/>
-                      </p:stCondLst>
-                      <p:childTnLst>
-                        <p:par>
-                          <p:cTn id="24" fill="hold">
-                            <p:stCondLst>
-                              <p:cond delay="0"/>
-                            </p:stCondLst>
-                            <p:childTnLst>
-                              <p:par>
-                                <p:cTn id="25" presetID="1" presetClass="entr" presetSubtype="0" fill="hold" grpId="0" nodeType="clickEffect">
-                                  <p:stCondLst>
-                                    <p:cond delay="0"/>
-                                  </p:stCondLst>
-                                  <p:childTnLst>
-                                    <p:set>
-                                      <p:cBhvr>
-                                        <p:cTn id="26" dur="1" fill="hold">
-                                          <p:stCondLst>
-                                            <p:cond delay="0"/>
-                                          </p:stCondLst>
-                                        </p:cTn>
-                                        <p:tgtEl>
-                                          <p:spTgt spid="4">
-                                            <p:txEl>
-                                              <p:pRg st="5" end="5"/>
-                                            </p:txEl>
-                                          </p:spTgt>
-                                        </p:tgtEl>
-                                        <p:attrNameLst>
-                                          <p:attrName>style.visibility</p:attrName>
-                                        </p:attrNameLst>
-                                      </p:cBhvr>
-                                      <p:to>
-                                        <p:strVal val="visible"/>
-                                      </p:to>
-                                    </p:set>
-                                  </p:childTnLst>
-                                </p:cTn>
-                              </p:par>
-                            </p:childTnLst>
-                          </p:cTn>
-                        </p:par>
-                      </p:childTnLst>
-                    </p:cTn>
-                  </p:par>
-                </p:childTnLst>
-              </p:cTn>
-              <p:prevCondLst>
-                <p:cond evt="onPrev" delay="0">
-                  <p:tgtEl>
-                    <p:sldTgt/>
-                  </p:tgtEl>
-                </p:cond>
-              </p:prevCondLst>
-              <p:nextCondLst>
-                <p:cond evt="onNext" delay="0">
-                  <p:tgtEl>
-                    <p:sldTgt/>
-                  </p:tgtEl>
-                </p:cond>
-              </p:nextCondLst>
-            </p:seq>
-          </p:childTnLst>
-        </p:cTn>
-      </p:par>
-    </p:tnLst>
-    <p:bldLst>
-      <p:bldP spid="4" grpId="0" build="p"/>
-    </p:bldLst>
-  </p:timing>
 </p:sld>
 </file>
 
